--- a/2024/2024-05-10-AI-Updates.pptx
+++ b/2024/2024-05-10-AI-Updates.pptx
@@ -5,7 +5,7 @@
     <p:sldMasterId id="2147483660" r:id="rId1"/>
   </p:sldMasterIdLst>
   <p:notesMasterIdLst>
-    <p:notesMasterId r:id="rId19"/>
+    <p:notesMasterId r:id="rId20"/>
   </p:notesMasterIdLst>
   <p:sldIdLst>
     <p:sldId id="256" r:id="rId2"/>
@@ -25,6 +25,7 @@
     <p:sldId id="270" r:id="rId16"/>
     <p:sldId id="271" r:id="rId17"/>
     <p:sldId id="272" r:id="rId18"/>
+    <p:sldId id="273" r:id="rId19"/>
   </p:sldIdLst>
   <p:sldSz cx="9144000" cy="5143500" type="screen16x9"/>
   <p:notesSz cx="6858000" cy="9144000"/>
@@ -966,7 +967,7 @@
   <p:cSld>
     <p:spTree>
       <p:nvGrpSpPr>
-        <p:cNvPr id="1" name="Shape 141"/>
+        <p:cNvPr id="1" name="Shape 143"/>
         <p:cNvGrpSpPr/>
         <p:nvPr/>
       </p:nvGrpSpPr>
@@ -980,7 +981,7 @@
       </p:grpSpPr>
       <p:sp>
         <p:nvSpPr>
-          <p:cNvPr id="142" name="Google Shape;142;g2dac8b00e21_0_7:notes"/>
+          <p:cNvPr id="144" name="Google Shape;144;g2da63b0115c_1_0:notes"/>
           <p:cNvSpPr>
             <a:spLocks noGrp="1" noRot="1" noChangeAspect="1"/>
           </p:cNvSpPr>
@@ -1031,7 +1032,7 @@
       </p:sp>
       <p:sp>
         <p:nvSpPr>
-          <p:cNvPr id="143" name="Google Shape;143;g2dac8b00e21_0_7:notes"/>
+          <p:cNvPr id="145" name="Google Shape;145;g2da63b0115c_1_0:notes"/>
           <p:cNvSpPr txBox="1">
             <a:spLocks noGrp="1"/>
           </p:cNvSpPr>
@@ -1088,7 +1089,7 @@
   <p:cSld>
     <p:spTree>
       <p:nvGrpSpPr>
-        <p:cNvPr id="1" name="Shape 147"/>
+        <p:cNvPr id="1" name="Shape 151"/>
         <p:cNvGrpSpPr/>
         <p:nvPr/>
       </p:nvGrpSpPr>
@@ -1102,7 +1103,7 @@
       </p:grpSpPr>
       <p:sp>
         <p:nvSpPr>
-          <p:cNvPr id="148" name="Google Shape;148;g2d2a41362bd_1_0:notes"/>
+          <p:cNvPr id="152" name="Google Shape;152;g2dac8b00e21_0_7:notes"/>
           <p:cNvSpPr>
             <a:spLocks noGrp="1" noRot="1" noChangeAspect="1"/>
           </p:cNvSpPr>
@@ -1153,7 +1154,7 @@
       </p:sp>
       <p:sp>
         <p:nvSpPr>
-          <p:cNvPr id="149" name="Google Shape;149;g2d2a41362bd_1_0:notes"/>
+          <p:cNvPr id="153" name="Google Shape;153;g2dac8b00e21_0_7:notes"/>
           <p:cNvSpPr txBox="1">
             <a:spLocks noGrp="1"/>
           </p:cNvSpPr>
@@ -1210,7 +1211,7 @@
   <p:cSld>
     <p:spTree>
       <p:nvGrpSpPr>
-        <p:cNvPr id="1" name="Shape 161"/>
+        <p:cNvPr id="1" name="Shape 157"/>
         <p:cNvGrpSpPr/>
         <p:nvPr/>
       </p:nvGrpSpPr>
@@ -1224,7 +1225,7 @@
       </p:grpSpPr>
       <p:sp>
         <p:nvSpPr>
-          <p:cNvPr id="162" name="Google Shape;162;g2d9dfb3520c_0_0:notes"/>
+          <p:cNvPr id="158" name="Google Shape;158;g2d2a41362bd_1_0:notes"/>
           <p:cNvSpPr>
             <a:spLocks noGrp="1" noRot="1" noChangeAspect="1"/>
           </p:cNvSpPr>
@@ -1275,7 +1276,7 @@
       </p:sp>
       <p:sp>
         <p:nvSpPr>
-          <p:cNvPr id="163" name="Google Shape;163;g2d9dfb3520c_0_0:notes"/>
+          <p:cNvPr id="159" name="Google Shape;159;g2d2a41362bd_1_0:notes"/>
           <p:cNvSpPr txBox="1">
             <a:spLocks noGrp="1"/>
           </p:cNvSpPr>
@@ -1332,7 +1333,7 @@
   <p:cSld>
     <p:spTree>
       <p:nvGrpSpPr>
-        <p:cNvPr id="1" name="Shape 174"/>
+        <p:cNvPr id="1" name="Shape 171"/>
         <p:cNvGrpSpPr/>
         <p:nvPr/>
       </p:nvGrpSpPr>
@@ -1346,7 +1347,7 @@
       </p:grpSpPr>
       <p:sp>
         <p:nvSpPr>
-          <p:cNvPr id="175" name="Google Shape;175;g2da65806280_0_0:notes"/>
+          <p:cNvPr id="172" name="Google Shape;172;g2d9dfb3520c_0_0:notes"/>
           <p:cNvSpPr>
             <a:spLocks noGrp="1" noRot="1" noChangeAspect="1"/>
           </p:cNvSpPr>
@@ -1397,7 +1398,7 @@
       </p:sp>
       <p:sp>
         <p:nvSpPr>
-          <p:cNvPr id="176" name="Google Shape;176;g2da65806280_0_0:notes"/>
+          <p:cNvPr id="173" name="Google Shape;173;g2d9dfb3520c_0_0:notes"/>
           <p:cNvSpPr txBox="1">
             <a:spLocks noGrp="1"/>
           </p:cNvSpPr>
@@ -1468,7 +1469,7 @@
       </p:grpSpPr>
       <p:sp>
         <p:nvSpPr>
-          <p:cNvPr id="185" name="Google Shape;185;g1f80c797b9f_0_0:notes"/>
+          <p:cNvPr id="185" name="Google Shape;185;g2db3e12f42d_0_54:notes"/>
           <p:cNvSpPr>
             <a:spLocks noGrp="1" noRot="1" noChangeAspect="1"/>
           </p:cNvSpPr>
@@ -1519,7 +1520,7 @@
       </p:sp>
       <p:sp>
         <p:nvSpPr>
-          <p:cNvPr id="186" name="Google Shape;186;g1f80c797b9f_0_0:notes"/>
+          <p:cNvPr id="186" name="Google Shape;186;g2db3e12f42d_0_54:notes"/>
           <p:cNvSpPr txBox="1">
             <a:spLocks noGrp="1"/>
           </p:cNvSpPr>
@@ -1576,7 +1577,7 @@
   <p:cSld>
     <p:spTree>
       <p:nvGrpSpPr>
-        <p:cNvPr id="1" name="Shape 200"/>
+        <p:cNvPr id="1" name="Shape 192"/>
         <p:cNvGrpSpPr/>
         <p:nvPr/>
       </p:nvGrpSpPr>
@@ -1590,7 +1591,7 @@
       </p:grpSpPr>
       <p:sp>
         <p:nvSpPr>
-          <p:cNvPr id="201" name="Google Shape;201;p21:notes"/>
+          <p:cNvPr id="193" name="Google Shape;193;g1f80c797b9f_0_0:notes"/>
           <p:cNvSpPr>
             <a:spLocks noGrp="1" noRot="1" noChangeAspect="1"/>
           </p:cNvSpPr>
@@ -1641,7 +1642,7 @@
       </p:sp>
       <p:sp>
         <p:nvSpPr>
-          <p:cNvPr id="202" name="Google Shape;202;p21:notes"/>
+          <p:cNvPr id="194" name="Google Shape;194;g1f80c797b9f_0_0:notes"/>
           <p:cNvSpPr txBox="1">
             <a:spLocks noGrp="1"/>
           </p:cNvSpPr>
@@ -1698,7 +1699,7 @@
   <p:cSld>
     <p:spTree>
       <p:nvGrpSpPr>
-        <p:cNvPr id="1" name="Shape 210"/>
+        <p:cNvPr id="1" name="Shape 208"/>
         <p:cNvGrpSpPr/>
         <p:nvPr/>
       </p:nvGrpSpPr>
@@ -1712,7 +1713,129 @@
       </p:grpSpPr>
       <p:sp>
         <p:nvSpPr>
-          <p:cNvPr id="211" name="Google Shape;211;p22:notes"/>
+          <p:cNvPr id="209" name="Google Shape;209;p21:notes"/>
+          <p:cNvSpPr>
+            <a:spLocks noGrp="1" noRot="1" noChangeAspect="1"/>
+          </p:cNvSpPr>
+          <p:nvPr>
+            <p:ph type="sldImg" idx="2"/>
+          </p:nvPr>
+        </p:nvSpPr>
+        <p:spPr>
+          <a:xfrm>
+            <a:off x="381300" y="685800"/>
+            <a:ext cx="6096000" cy="3429000"/>
+          </a:xfrm>
+          <a:custGeom>
+            <a:avLst/>
+            <a:gdLst/>
+            <a:ahLst/>
+            <a:cxnLst/>
+            <a:rect l="l" t="t" r="r" b="b"/>
+            <a:pathLst>
+              <a:path w="120000" h="120000" extrusionOk="0">
+                <a:moveTo>
+                  <a:pt x="0" y="0"/>
+                </a:moveTo>
+                <a:lnTo>
+                  <a:pt x="120000" y="0"/>
+                </a:lnTo>
+                <a:lnTo>
+                  <a:pt x="120000" y="120000"/>
+                </a:lnTo>
+                <a:lnTo>
+                  <a:pt x="0" y="120000"/>
+                </a:lnTo>
+                <a:close/>
+              </a:path>
+            </a:pathLst>
+          </a:custGeom>
+          <a:noFill/>
+          <a:ln w="9525" cap="flat" cmpd="sng">
+            <a:solidFill>
+              <a:srgbClr val="000000"/>
+            </a:solidFill>
+            <a:prstDash val="solid"/>
+            <a:round/>
+            <a:headEnd type="none" w="sm" len="sm"/>
+            <a:tailEnd type="none" w="sm" len="sm"/>
+          </a:ln>
+        </p:spPr>
+      </p:sp>
+      <p:sp>
+        <p:nvSpPr>
+          <p:cNvPr id="210" name="Google Shape;210;p21:notes"/>
+          <p:cNvSpPr txBox="1">
+            <a:spLocks noGrp="1"/>
+          </p:cNvSpPr>
+          <p:nvPr>
+            <p:ph type="body" idx="1"/>
+          </p:nvPr>
+        </p:nvSpPr>
+        <p:spPr>
+          <a:xfrm>
+            <a:off x="685800" y="4343400"/>
+            <a:ext cx="5486400" cy="4114800"/>
+          </a:xfrm>
+          <a:prstGeom prst="rect">
+            <a:avLst/>
+          </a:prstGeom>
+          <a:noFill/>
+          <a:ln>
+            <a:noFill/>
+          </a:ln>
+        </p:spPr>
+        <p:txBody>
+          <a:bodyPr spcFirstLastPara="1" wrap="square" lIns="91425" tIns="91425" rIns="91425" bIns="91425" anchor="t" anchorCtr="0">
+            <a:noAutofit/>
+          </a:bodyPr>
+          <a:lstStyle/>
+          <a:p>
+            <a:pPr marL="0" lvl="0" indent="0" algn="l" rtl="0">
+              <a:lnSpc>
+                <a:spcPct val="100000"/>
+              </a:lnSpc>
+              <a:spcBef>
+                <a:spcPts val="0"/>
+              </a:spcBef>
+              <a:spcAft>
+                <a:spcPts val="0"/>
+              </a:spcAft>
+              <a:buSzPts val="1100"/>
+              <a:buNone/>
+            </a:pPr>
+            <a:endParaRPr/>
+          </a:p>
+        </p:txBody>
+      </p:sp>
+    </p:spTree>
+  </p:cSld>
+  <p:clrMapOvr>
+    <a:masterClrMapping/>
+  </p:clrMapOvr>
+</p:notes>
+</file>
+
+<file path=ppt/notesSlides/notesSlide17.xml><?xml version="1.0" encoding="utf-8"?>
+<p:notes xmlns:a="http://schemas.openxmlformats.org/drawingml/2006/main" xmlns:r="http://schemas.openxmlformats.org/officeDocument/2006/relationships" xmlns:p="http://schemas.openxmlformats.org/presentationml/2006/main" showMasterSp="0" showMasterPhAnim="0">
+  <p:cSld>
+    <p:spTree>
+      <p:nvGrpSpPr>
+        <p:cNvPr id="1" name="Shape 218"/>
+        <p:cNvGrpSpPr/>
+        <p:nvPr/>
+      </p:nvGrpSpPr>
+      <p:grpSpPr>
+        <a:xfrm>
+          <a:off x="0" y="0"/>
+          <a:ext cx="0" cy="0"/>
+          <a:chOff x="0" y="0"/>
+          <a:chExt cx="0" cy="0"/>
+        </a:xfrm>
+      </p:grpSpPr>
+      <p:sp>
+        <p:nvSpPr>
+          <p:cNvPr id="219" name="Google Shape;219;p22:notes"/>
           <p:cNvSpPr>
             <a:spLocks noGrp="1" noRot="1" noChangeAspect="1"/>
           </p:cNvSpPr>
@@ -1763,7 +1886,7 @@
       </p:sp>
       <p:sp>
         <p:nvSpPr>
-          <p:cNvPr id="212" name="Google Shape;212;p22:notes"/>
+          <p:cNvPr id="220" name="Google Shape;220;p22:notes"/>
           <p:cNvSpPr txBox="1">
             <a:spLocks noGrp="1"/>
           </p:cNvSpPr>
@@ -1815,12 +1938,12 @@
 </p:notes>
 </file>
 
-<file path=ppt/notesSlides/notesSlide17.xml><?xml version="1.0" encoding="utf-8"?>
+<file path=ppt/notesSlides/notesSlide18.xml><?xml version="1.0" encoding="utf-8"?>
 <p:notes xmlns:a="http://schemas.openxmlformats.org/drawingml/2006/main" xmlns:r="http://schemas.openxmlformats.org/officeDocument/2006/relationships" xmlns:p="http://schemas.openxmlformats.org/presentationml/2006/main" showMasterSp="0" showMasterPhAnim="0">
   <p:cSld>
     <p:spTree>
       <p:nvGrpSpPr>
-        <p:cNvPr id="1" name="Shape 220"/>
+        <p:cNvPr id="1" name="Shape 228"/>
         <p:cNvGrpSpPr/>
         <p:nvPr/>
       </p:nvGrpSpPr>
@@ -1834,7 +1957,7 @@
       </p:grpSpPr>
       <p:sp>
         <p:nvSpPr>
-          <p:cNvPr id="221" name="Google Shape;221;p23:notes"/>
+          <p:cNvPr id="229" name="Google Shape;229;p23:notes"/>
           <p:cNvSpPr>
             <a:spLocks noGrp="1" noRot="1" noChangeAspect="1"/>
           </p:cNvSpPr>
@@ -1885,7 +2008,7 @@
       </p:sp>
       <p:sp>
         <p:nvSpPr>
-          <p:cNvPr id="222" name="Google Shape;222;p23:notes"/>
+          <p:cNvPr id="230" name="Google Shape;230;p23:notes"/>
           <p:cNvSpPr txBox="1">
             <a:spLocks noGrp="1"/>
           </p:cNvSpPr>
@@ -2444,7 +2567,7 @@
       </p:grpSpPr>
       <p:sp>
         <p:nvSpPr>
-          <p:cNvPr id="108" name="Google Shape;108;g2d2a40d0852_0_0:notes"/>
+          <p:cNvPr id="108" name="Google Shape;108;g2da65806280_0_0:notes"/>
           <p:cNvSpPr>
             <a:spLocks noGrp="1" noRot="1" noChangeAspect="1"/>
           </p:cNvSpPr>
@@ -2495,7 +2618,7 @@
       </p:sp>
       <p:sp>
         <p:nvSpPr>
-          <p:cNvPr id="109" name="Google Shape;109;g2d2a40d0852_0_0:notes"/>
+          <p:cNvPr id="109" name="Google Shape;109;g2da65806280_0_0:notes"/>
           <p:cNvSpPr txBox="1">
             <a:spLocks noGrp="1"/>
           </p:cNvSpPr>
@@ -2552,7 +2675,7 @@
   <p:cSld>
     <p:spTree>
       <p:nvGrpSpPr>
-        <p:cNvPr id="1" name="Shape 114"/>
+        <p:cNvPr id="1" name="Shape 116"/>
         <p:cNvGrpSpPr/>
         <p:nvPr/>
       </p:nvGrpSpPr>
@@ -2566,7 +2689,7 @@
       </p:grpSpPr>
       <p:sp>
         <p:nvSpPr>
-          <p:cNvPr id="115" name="Google Shape;115;g2db2d87ec4d_0_0:notes"/>
+          <p:cNvPr id="117" name="Google Shape;117;g2d2a40d0852_0_0:notes"/>
           <p:cNvSpPr>
             <a:spLocks noGrp="1" noRot="1" noChangeAspect="1"/>
           </p:cNvSpPr>
@@ -2617,7 +2740,7 @@
       </p:sp>
       <p:sp>
         <p:nvSpPr>
-          <p:cNvPr id="116" name="Google Shape;116;g2db2d87ec4d_0_0:notes"/>
+          <p:cNvPr id="118" name="Google Shape;118;g2d2a40d0852_0_0:notes"/>
           <p:cNvSpPr txBox="1">
             <a:spLocks noGrp="1"/>
           </p:cNvSpPr>
@@ -2674,7 +2797,7 @@
   <p:cSld>
     <p:spTree>
       <p:nvGrpSpPr>
-        <p:cNvPr id="1" name="Shape 125"/>
+        <p:cNvPr id="1" name="Shape 123"/>
         <p:cNvGrpSpPr/>
         <p:nvPr/>
       </p:nvGrpSpPr>
@@ -2688,7 +2811,7 @@
       </p:grpSpPr>
       <p:sp>
         <p:nvSpPr>
-          <p:cNvPr id="126" name="Google Shape;126;g2d2a41362bd_0_0:notes"/>
+          <p:cNvPr id="124" name="Google Shape;124;g2db2d87ec4d_0_0:notes"/>
           <p:cNvSpPr>
             <a:spLocks noGrp="1" noRot="1" noChangeAspect="1"/>
           </p:cNvSpPr>
@@ -2739,7 +2862,7 @@
       </p:sp>
       <p:sp>
         <p:nvSpPr>
-          <p:cNvPr id="127" name="Google Shape;127;g2d2a41362bd_0_0:notes"/>
+          <p:cNvPr id="125" name="Google Shape;125;g2db2d87ec4d_0_0:notes"/>
           <p:cNvSpPr txBox="1">
             <a:spLocks noGrp="1"/>
           </p:cNvSpPr>
@@ -2796,7 +2919,7 @@
   <p:cSld>
     <p:spTree>
       <p:nvGrpSpPr>
-        <p:cNvPr id="1" name="Shape 133"/>
+        <p:cNvPr id="1" name="Shape 135"/>
         <p:cNvGrpSpPr/>
         <p:nvPr/>
       </p:nvGrpSpPr>
@@ -2810,7 +2933,7 @@
       </p:grpSpPr>
       <p:sp>
         <p:nvSpPr>
-          <p:cNvPr id="134" name="Google Shape;134;g2da63b0115c_1_0:notes"/>
+          <p:cNvPr id="136" name="Google Shape;136;g2d2a41362bd_0_0:notes"/>
           <p:cNvSpPr>
             <a:spLocks noGrp="1" noRot="1" noChangeAspect="1"/>
           </p:cNvSpPr>
@@ -2861,7 +2984,7 @@
       </p:sp>
       <p:sp>
         <p:nvSpPr>
-          <p:cNvPr id="135" name="Google Shape;135;g2da63b0115c_1_0:notes"/>
+          <p:cNvPr id="137" name="Google Shape;137;g2d2a41362bd_0_0:notes"/>
           <p:cNvSpPr txBox="1">
             <a:spLocks noGrp="1"/>
           </p:cNvSpPr>
@@ -11600,7 +11723,7 @@
   <p:cSld>
     <p:spTree>
       <p:nvGrpSpPr>
-        <p:cNvPr id="1" name="Shape 144"/>
+        <p:cNvPr id="1" name="Shape 146"/>
         <p:cNvGrpSpPr/>
         <p:nvPr/>
       </p:nvGrpSpPr>
@@ -11614,7 +11737,286 @@
       </p:grpSpPr>
       <p:sp>
         <p:nvSpPr>
-          <p:cNvPr id="145" name="Google Shape;145;p23"/>
+          <p:cNvPr id="147" name="Google Shape;147;p23"/>
+          <p:cNvSpPr txBox="1"/>
+          <p:nvPr/>
+        </p:nvSpPr>
+        <p:spPr>
+          <a:xfrm>
+            <a:off x="78050" y="384550"/>
+            <a:ext cx="2393700" cy="218400"/>
+          </a:xfrm>
+          <a:prstGeom prst="rect">
+            <a:avLst/>
+          </a:prstGeom>
+          <a:solidFill>
+            <a:srgbClr val="FFF2CC"/>
+          </a:solidFill>
+          <a:ln w="9525" cap="flat" cmpd="sng">
+            <a:solidFill>
+              <a:srgbClr val="FF0000"/>
+            </a:solidFill>
+            <a:prstDash val="solid"/>
+            <a:round/>
+            <a:headEnd type="none" w="sm" len="sm"/>
+            <a:tailEnd type="none" w="sm" len="sm"/>
+          </a:ln>
+        </p:spPr>
+        <p:txBody>
+          <a:bodyPr spcFirstLastPara="1" wrap="square" lIns="9125" tIns="9125" rIns="9125" bIns="9125" anchor="t" anchorCtr="0">
+            <a:spAutoFit/>
+          </a:bodyPr>
+          <a:lstStyle/>
+          <a:p>
+            <a:pPr marL="0" lvl="0" indent="0" algn="l" rtl="0">
+              <a:spcBef>
+                <a:spcPts val="0"/>
+              </a:spcBef>
+              <a:spcAft>
+                <a:spcPts val="0"/>
+              </a:spcAft>
+              <a:buClr>
+                <a:schemeClr val="dk1"/>
+              </a:buClr>
+              <a:buSzPts val="1100"/>
+              <a:buFont typeface="Arial"/>
+              <a:buNone/>
+            </a:pPr>
+            <a:r>
+              <a:rPr lang="en" sz="1300" u="sng">
+                <a:solidFill>
+                  <a:schemeClr val="hlink"/>
+                </a:solidFill>
+                <a:latin typeface="Calibri"/>
+                <a:ea typeface="Calibri"/>
+                <a:cs typeface="Calibri"/>
+                <a:sym typeface="Calibri"/>
+                <a:hlinkClick r:id="rId3"/>
+              </a:rPr>
+              <a:t>https://github.com/lselector/ai</a:t>
+            </a:r>
+            <a:r>
+              <a:rPr lang="en" sz="1300">
+                <a:solidFill>
+                  <a:schemeClr val="dk1"/>
+                </a:solidFill>
+                <a:latin typeface="Calibri"/>
+                <a:ea typeface="Calibri"/>
+                <a:cs typeface="Calibri"/>
+                <a:sym typeface="Calibri"/>
+              </a:rPr>
+              <a:t> </a:t>
+            </a:r>
+            <a:endParaRPr sz="1000">
+              <a:solidFill>
+                <a:schemeClr val="dk1"/>
+              </a:solidFill>
+              <a:latin typeface="Calibri"/>
+              <a:ea typeface="Calibri"/>
+              <a:cs typeface="Calibri"/>
+              <a:sym typeface="Calibri"/>
+            </a:endParaRPr>
+          </a:p>
+        </p:txBody>
+      </p:sp>
+      <p:sp>
+        <p:nvSpPr>
+          <p:cNvPr id="148" name="Google Shape;148;p23"/>
+          <p:cNvSpPr txBox="1"/>
+          <p:nvPr/>
+        </p:nvSpPr>
+        <p:spPr>
+          <a:xfrm>
+            <a:off x="35891" y="7380"/>
+            <a:ext cx="6174300" cy="326400"/>
+          </a:xfrm>
+          <a:prstGeom prst="rect">
+            <a:avLst/>
+          </a:prstGeom>
+          <a:noFill/>
+          <a:ln>
+            <a:noFill/>
+          </a:ln>
+        </p:spPr>
+        <p:txBody>
+          <a:bodyPr spcFirstLastPara="1" wrap="square" lIns="9125" tIns="9125" rIns="9125" bIns="9125" anchor="t" anchorCtr="0">
+            <a:spAutoFit/>
+          </a:bodyPr>
+          <a:lstStyle/>
+          <a:p>
+            <a:pPr marL="0" marR="0" lvl="0" indent="0" algn="l" rtl="0">
+              <a:lnSpc>
+                <a:spcPct val="100000"/>
+              </a:lnSpc>
+              <a:spcBef>
+                <a:spcPts val="0"/>
+              </a:spcBef>
+              <a:spcAft>
+                <a:spcPts val="0"/>
+              </a:spcAft>
+              <a:buClr>
+                <a:srgbClr val="000000"/>
+              </a:buClr>
+              <a:buSzPts val="2000"/>
+              <a:buFont typeface="Arial"/>
+              <a:buNone/>
+            </a:pPr>
+            <a:r>
+              <a:rPr lang="en" sz="2000" b="1">
+                <a:solidFill>
+                  <a:schemeClr val="dk1"/>
+                </a:solidFill>
+                <a:latin typeface="Calibri"/>
+                <a:ea typeface="Calibri"/>
+                <a:cs typeface="Calibri"/>
+                <a:sym typeface="Calibri"/>
+              </a:rPr>
+              <a:t>My "ai" GitHub repo - how to start with LLMs and RAG</a:t>
+            </a:r>
+            <a:endParaRPr sz="2000" b="1" i="0" u="none" strike="noStrike" cap="none">
+              <a:solidFill>
+                <a:srgbClr val="000000"/>
+              </a:solidFill>
+              <a:latin typeface="Calibri"/>
+              <a:ea typeface="Calibri"/>
+              <a:cs typeface="Calibri"/>
+              <a:sym typeface="Calibri"/>
+            </a:endParaRPr>
+          </a:p>
+        </p:txBody>
+      </p:sp>
+      <p:sp>
+        <p:nvSpPr>
+          <p:cNvPr id="149" name="Google Shape;149;p23"/>
+          <p:cNvSpPr txBox="1"/>
+          <p:nvPr/>
+        </p:nvSpPr>
+        <p:spPr>
+          <a:xfrm>
+            <a:off x="4638225" y="384550"/>
+            <a:ext cx="4392000" cy="218400"/>
+          </a:xfrm>
+          <a:prstGeom prst="rect">
+            <a:avLst/>
+          </a:prstGeom>
+          <a:solidFill>
+            <a:srgbClr val="FFF2CC"/>
+          </a:solidFill>
+          <a:ln w="9525" cap="flat" cmpd="sng">
+            <a:solidFill>
+              <a:srgbClr val="FF0000"/>
+            </a:solidFill>
+            <a:prstDash val="solid"/>
+            <a:round/>
+            <a:headEnd type="none" w="sm" len="sm"/>
+            <a:tailEnd type="none" w="sm" len="sm"/>
+          </a:ln>
+        </p:spPr>
+        <p:txBody>
+          <a:bodyPr spcFirstLastPara="1" wrap="square" lIns="9125" tIns="9125" rIns="9125" bIns="9125" anchor="t" anchorCtr="0">
+            <a:spAutoFit/>
+          </a:bodyPr>
+          <a:lstStyle/>
+          <a:p>
+            <a:pPr marL="0" lvl="0" indent="0" algn="l" rtl="0">
+              <a:spcBef>
+                <a:spcPts val="0"/>
+              </a:spcBef>
+              <a:spcAft>
+                <a:spcPts val="0"/>
+              </a:spcAft>
+              <a:buClr>
+                <a:schemeClr val="dk1"/>
+              </a:buClr>
+              <a:buSzPts val="1100"/>
+              <a:buFont typeface="Arial"/>
+              <a:buNone/>
+            </a:pPr>
+            <a:r>
+              <a:rPr lang="en" sz="1300">
+                <a:solidFill>
+                  <a:schemeClr val="dk1"/>
+                </a:solidFill>
+                <a:latin typeface="Calibri"/>
+                <a:ea typeface="Calibri"/>
+                <a:cs typeface="Calibri"/>
+                <a:sym typeface="Calibri"/>
+              </a:rPr>
+              <a:t>xxxxx</a:t>
+            </a:r>
+            <a:endParaRPr sz="1000">
+              <a:solidFill>
+                <a:schemeClr val="dk1"/>
+              </a:solidFill>
+              <a:latin typeface="Calibri"/>
+              <a:ea typeface="Calibri"/>
+              <a:cs typeface="Calibri"/>
+              <a:sym typeface="Calibri"/>
+            </a:endParaRPr>
+          </a:p>
+        </p:txBody>
+      </p:sp>
+      <p:pic>
+        <p:nvPicPr>
+          <p:cNvPr id="150" name="Google Shape;150;p23"/>
+          <p:cNvPicPr preferRelativeResize="0"/>
+          <p:nvPr/>
+        </p:nvPicPr>
+        <p:blipFill>
+          <a:blip r:embed="rId4" cstate="email">
+            <a:alphaModFix/>
+            <a:extLst>
+              <a:ext uri="{28A0092B-C50C-407E-A947-70E740481C1C}">
+                <a14:useLocalDpi xmlns:a14="http://schemas.microsoft.com/office/drawing/2010/main"/>
+              </a:ext>
+            </a:extLst>
+          </a:blip>
+          <a:stretch>
+            <a:fillRect/>
+          </a:stretch>
+        </p:blipFill>
+        <p:spPr>
+          <a:xfrm>
+            <a:off x="152400" y="755350"/>
+            <a:ext cx="3700877" cy="4235748"/>
+          </a:xfrm>
+          <a:prstGeom prst="rect">
+            <a:avLst/>
+          </a:prstGeom>
+          <a:noFill/>
+          <a:ln>
+            <a:noFill/>
+          </a:ln>
+        </p:spPr>
+      </p:pic>
+    </p:spTree>
+  </p:cSld>
+  <p:clrMapOvr>
+    <a:masterClrMapping/>
+  </p:clrMapOvr>
+</p:sld>
+</file>
+
+<file path=ppt/slides/slide11.xml><?xml version="1.0" encoding="utf-8"?>
+<p:sld xmlns:a="http://schemas.openxmlformats.org/drawingml/2006/main" xmlns:r="http://schemas.openxmlformats.org/officeDocument/2006/relationships" xmlns:p="http://schemas.openxmlformats.org/presentationml/2006/main">
+  <p:cSld>
+    <p:spTree>
+      <p:nvGrpSpPr>
+        <p:cNvPr id="1" name="Shape 154"/>
+        <p:cNvGrpSpPr/>
+        <p:nvPr/>
+      </p:nvGrpSpPr>
+      <p:grpSpPr>
+        <a:xfrm>
+          <a:off x="0" y="0"/>
+          <a:ext cx="0" cy="0"/>
+          <a:chOff x="0" y="0"/>
+          <a:chExt cx="0" cy="0"/>
+        </a:xfrm>
+      </p:grpSpPr>
+      <p:sp>
+        <p:nvSpPr>
+          <p:cNvPr id="155" name="Google Shape;155;p24"/>
           <p:cNvSpPr txBox="1"/>
           <p:nvPr/>
         </p:nvSpPr>
@@ -12287,7 +12689,7 @@
       </p:sp>
       <p:sp>
         <p:nvSpPr>
-          <p:cNvPr id="146" name="Google Shape;146;p23"/>
+          <p:cNvPr id="156" name="Google Shape;156;p24"/>
           <p:cNvSpPr txBox="1"/>
           <p:nvPr/>
         </p:nvSpPr>
@@ -12359,12 +12761,12 @@
 </p:sld>
 </file>
 
-<file path=ppt/slides/slide11.xml><?xml version="1.0" encoding="utf-8"?>
+<file path=ppt/slides/slide12.xml><?xml version="1.0" encoding="utf-8"?>
 <p:sld xmlns:a="http://schemas.openxmlformats.org/drawingml/2006/main" xmlns:r="http://schemas.openxmlformats.org/officeDocument/2006/relationships" xmlns:p="http://schemas.openxmlformats.org/presentationml/2006/main">
   <p:cSld>
     <p:spTree>
       <p:nvGrpSpPr>
-        <p:cNvPr id="1" name="Shape 150"/>
+        <p:cNvPr id="1" name="Shape 160"/>
         <p:cNvGrpSpPr/>
         <p:nvPr/>
       </p:nvGrpSpPr>
@@ -12378,7 +12780,7 @@
       </p:grpSpPr>
       <p:sp>
         <p:nvSpPr>
-          <p:cNvPr id="151" name="Google Shape;151;p24"/>
+          <p:cNvPr id="161" name="Google Shape;161;p25"/>
           <p:cNvSpPr txBox="1"/>
           <p:nvPr/>
         </p:nvSpPr>
@@ -12941,7 +13343,7 @@
       </p:sp>
       <p:sp>
         <p:nvSpPr>
-          <p:cNvPr id="152" name="Google Shape;152;p24"/>
+          <p:cNvPr id="162" name="Google Shape;162;p25"/>
           <p:cNvSpPr txBox="1"/>
           <p:nvPr/>
         </p:nvSpPr>
@@ -13007,7 +13409,7 @@
       </p:sp>
       <p:sp>
         <p:nvSpPr>
-          <p:cNvPr id="153" name="Google Shape;153;p24"/>
+          <p:cNvPr id="163" name="Google Shape;163;p25"/>
           <p:cNvSpPr txBox="1"/>
           <p:nvPr/>
         </p:nvSpPr>
@@ -13103,7 +13505,7 @@
       </p:sp>
       <p:sp>
         <p:nvSpPr>
-          <p:cNvPr id="154" name="Google Shape;154;p24"/>
+          <p:cNvPr id="164" name="Google Shape;164;p25"/>
           <p:cNvSpPr txBox="1"/>
           <p:nvPr/>
         </p:nvSpPr>
@@ -13169,7 +13571,7 @@
       </p:sp>
       <p:sp>
         <p:nvSpPr>
-          <p:cNvPr id="155" name="Google Shape;155;p24"/>
+          <p:cNvPr id="165" name="Google Shape;165;p25"/>
           <p:cNvSpPr txBox="1"/>
           <p:nvPr/>
         </p:nvSpPr>
@@ -13400,7 +13802,7 @@
       </p:sp>
       <p:pic>
         <p:nvPicPr>
-          <p:cNvPr id="156" name="Google Shape;156;p24"/>
+          <p:cNvPr id="166" name="Google Shape;166;p25"/>
           <p:cNvPicPr preferRelativeResize="0"/>
           <p:nvPr/>
         </p:nvPicPr>
@@ -13433,7 +13835,7 @@
       </p:pic>
       <p:sp>
         <p:nvSpPr>
-          <p:cNvPr id="157" name="Google Shape;157;p24"/>
+          <p:cNvPr id="167" name="Google Shape;167;p25"/>
           <p:cNvSpPr/>
           <p:nvPr/>
         </p:nvSpPr>
@@ -13482,7 +13884,7 @@
       </p:sp>
       <p:sp>
         <p:nvSpPr>
-          <p:cNvPr id="158" name="Google Shape;158;p24"/>
+          <p:cNvPr id="168" name="Google Shape;168;p25"/>
           <p:cNvSpPr txBox="1"/>
           <p:nvPr/>
         </p:nvSpPr>
@@ -13553,7 +13955,7 @@
       </p:sp>
       <p:sp>
         <p:nvSpPr>
-          <p:cNvPr id="159" name="Google Shape;159;p24"/>
+          <p:cNvPr id="169" name="Google Shape;169;p25"/>
           <p:cNvSpPr/>
           <p:nvPr/>
         </p:nvSpPr>
@@ -13602,7 +14004,7 @@
       </p:sp>
       <p:sp>
         <p:nvSpPr>
-          <p:cNvPr id="160" name="Google Shape;160;p24"/>
+          <p:cNvPr id="170" name="Google Shape;170;p25"/>
           <p:cNvSpPr txBox="1"/>
           <p:nvPr/>
         </p:nvSpPr>
@@ -13716,12 +14118,12 @@
 </p:sld>
 </file>
 
-<file path=ppt/slides/slide12.xml><?xml version="1.0" encoding="utf-8"?>
+<file path=ppt/slides/slide13.xml><?xml version="1.0" encoding="utf-8"?>
 <p:sld xmlns:a="http://schemas.openxmlformats.org/drawingml/2006/main" xmlns:r="http://schemas.openxmlformats.org/officeDocument/2006/relationships" xmlns:p="http://schemas.openxmlformats.org/presentationml/2006/main">
   <p:cSld>
     <p:spTree>
       <p:nvGrpSpPr>
-        <p:cNvPr id="1" name="Shape 164"/>
+        <p:cNvPr id="1" name="Shape 174"/>
         <p:cNvGrpSpPr/>
         <p:nvPr/>
       </p:nvGrpSpPr>
@@ -13735,7 +14137,7 @@
       </p:grpSpPr>
       <p:sp>
         <p:nvSpPr>
-          <p:cNvPr id="165" name="Google Shape;165;p25"/>
+          <p:cNvPr id="175" name="Google Shape;175;p26"/>
           <p:cNvSpPr txBox="1"/>
           <p:nvPr/>
         </p:nvSpPr>
@@ -13924,7 +14326,7 @@
       </p:sp>
       <p:sp>
         <p:nvSpPr>
-          <p:cNvPr id="166" name="Google Shape;166;p25"/>
+          <p:cNvPr id="176" name="Google Shape;176;p26"/>
           <p:cNvSpPr txBox="1"/>
           <p:nvPr/>
         </p:nvSpPr>
@@ -13990,7 +14392,7 @@
       </p:sp>
       <p:sp>
         <p:nvSpPr>
-          <p:cNvPr id="167" name="Google Shape;167;p25"/>
+          <p:cNvPr id="177" name="Google Shape;177;p26"/>
           <p:cNvSpPr txBox="1"/>
           <p:nvPr/>
         </p:nvSpPr>
@@ -14170,7 +14572,7 @@
       </p:sp>
       <p:sp>
         <p:nvSpPr>
-          <p:cNvPr id="168" name="Google Shape;168;p25"/>
+          <p:cNvPr id="178" name="Google Shape;178;p26"/>
           <p:cNvSpPr txBox="1"/>
           <p:nvPr/>
         </p:nvSpPr>
@@ -14265,7 +14667,7 @@
       </p:sp>
       <p:sp>
         <p:nvSpPr>
-          <p:cNvPr id="169" name="Google Shape;169;p25"/>
+          <p:cNvPr id="179" name="Google Shape;179;p26"/>
           <p:cNvSpPr txBox="1"/>
           <p:nvPr/>
         </p:nvSpPr>
@@ -14396,7 +14798,7 @@
       </p:sp>
       <p:sp>
         <p:nvSpPr>
-          <p:cNvPr id="170" name="Google Shape;170;p25"/>
+          <p:cNvPr id="180" name="Google Shape;180;p26"/>
           <p:cNvSpPr txBox="1"/>
           <p:nvPr/>
         </p:nvSpPr>
@@ -14467,7 +14869,7 @@
       </p:sp>
       <p:sp>
         <p:nvSpPr>
-          <p:cNvPr id="171" name="Google Shape;171;p25"/>
+          <p:cNvPr id="181" name="Google Shape;181;p26"/>
           <p:cNvSpPr txBox="1"/>
           <p:nvPr/>
         </p:nvSpPr>
@@ -14694,7 +15096,7 @@
       </p:sp>
       <p:pic>
         <p:nvPicPr>
-          <p:cNvPr id="172" name="Google Shape;172;p25"/>
+          <p:cNvPr id="182" name="Google Shape;182;p26"/>
           <p:cNvPicPr preferRelativeResize="0"/>
           <p:nvPr/>
         </p:nvPicPr>
@@ -14727,7 +15129,7 @@
       </p:pic>
       <p:sp>
         <p:nvSpPr>
-          <p:cNvPr id="173" name="Google Shape;173;p25"/>
+          <p:cNvPr id="183" name="Google Shape;183;p26"/>
           <p:cNvSpPr txBox="1"/>
           <p:nvPr/>
         </p:nvSpPr>
@@ -14836,995 +15238,6 @@
             </a:r>
             <a:r>
               <a:rPr lang="en" sz="1300">
-                <a:solidFill>
-                  <a:schemeClr val="dk1"/>
-                </a:solidFill>
-                <a:latin typeface="Calibri"/>
-                <a:ea typeface="Calibri"/>
-                <a:cs typeface="Calibri"/>
-                <a:sym typeface="Calibri"/>
-              </a:rPr>
-              <a:t> </a:t>
-            </a:r>
-            <a:endParaRPr sz="1300">
-              <a:solidFill>
-                <a:schemeClr val="dk1"/>
-              </a:solidFill>
-              <a:latin typeface="Calibri"/>
-              <a:ea typeface="Calibri"/>
-              <a:cs typeface="Calibri"/>
-              <a:sym typeface="Calibri"/>
-            </a:endParaRPr>
-          </a:p>
-        </p:txBody>
-      </p:sp>
-    </p:spTree>
-  </p:cSld>
-  <p:clrMapOvr>
-    <a:masterClrMapping/>
-  </p:clrMapOvr>
-</p:sld>
-</file>
-
-<file path=ppt/slides/slide13.xml><?xml version="1.0" encoding="utf-8"?>
-<p:sld xmlns:a="http://schemas.openxmlformats.org/drawingml/2006/main" xmlns:r="http://schemas.openxmlformats.org/officeDocument/2006/relationships" xmlns:p="http://schemas.openxmlformats.org/presentationml/2006/main">
-  <p:cSld>
-    <p:spTree>
-      <p:nvGrpSpPr>
-        <p:cNvPr id="1" name="Shape 177"/>
-        <p:cNvGrpSpPr/>
-        <p:nvPr/>
-      </p:nvGrpSpPr>
-      <p:grpSpPr>
-        <a:xfrm>
-          <a:off x="0" y="0"/>
-          <a:ext cx="0" cy="0"/>
-          <a:chOff x="0" y="0"/>
-          <a:chExt cx="0" cy="0"/>
-        </a:xfrm>
-      </p:grpSpPr>
-      <p:sp>
-        <p:nvSpPr>
-          <p:cNvPr id="178" name="Google Shape;178;p26"/>
-          <p:cNvSpPr txBox="1"/>
-          <p:nvPr/>
-        </p:nvSpPr>
-        <p:spPr>
-          <a:xfrm>
-            <a:off x="78050" y="2882396"/>
-            <a:ext cx="4392000" cy="972900"/>
-          </a:xfrm>
-          <a:prstGeom prst="rect">
-            <a:avLst/>
-          </a:prstGeom>
-          <a:solidFill>
-            <a:srgbClr val="FFF2CC"/>
-          </a:solidFill>
-          <a:ln w="9525" cap="flat" cmpd="sng">
-            <a:solidFill>
-              <a:srgbClr val="FF0000"/>
-            </a:solidFill>
-            <a:prstDash val="solid"/>
-            <a:round/>
-            <a:headEnd type="none" w="sm" len="sm"/>
-            <a:tailEnd type="none" w="sm" len="sm"/>
-          </a:ln>
-        </p:spPr>
-        <p:txBody>
-          <a:bodyPr spcFirstLastPara="1" wrap="square" lIns="9125" tIns="9125" rIns="9125" bIns="9125" anchor="t" anchorCtr="0">
-            <a:spAutoFit/>
-          </a:bodyPr>
-          <a:lstStyle/>
-          <a:p>
-            <a:pPr marL="0" lvl="0" indent="0" algn="l" rtl="0">
-              <a:spcBef>
-                <a:spcPts val="0"/>
-              </a:spcBef>
-              <a:spcAft>
-                <a:spcPts val="0"/>
-              </a:spcAft>
-              <a:buClr>
-                <a:schemeClr val="dk1"/>
-              </a:buClr>
-              <a:buSzPts val="1100"/>
-              <a:buFont typeface="Arial"/>
-              <a:buNone/>
-            </a:pPr>
-            <a:r>
-              <a:rPr lang="en" sz="1300" b="1">
-                <a:solidFill>
-                  <a:srgbClr val="FF0000"/>
-                </a:solidFill>
-                <a:latin typeface="Calibri"/>
-                <a:ea typeface="Calibri"/>
-                <a:cs typeface="Calibri"/>
-                <a:sym typeface="Calibri"/>
-              </a:rPr>
-              <a:t>OpenAI Public Model Specification</a:t>
-            </a:r>
-            <a:r>
-              <a:rPr lang="en" sz="1300">
-                <a:solidFill>
-                  <a:schemeClr val="dk1"/>
-                </a:solidFill>
-                <a:latin typeface="Calibri"/>
-                <a:ea typeface="Calibri"/>
-                <a:cs typeface="Calibri"/>
-                <a:sym typeface="Calibri"/>
-              </a:rPr>
-              <a:t>:</a:t>
-            </a:r>
-            <a:br>
-              <a:rPr lang="en" sz="1300">
-                <a:solidFill>
-                  <a:schemeClr val="dk1"/>
-                </a:solidFill>
-                <a:latin typeface="Calibri"/>
-                <a:ea typeface="Calibri"/>
-                <a:cs typeface="Calibri"/>
-                <a:sym typeface="Calibri"/>
-              </a:rPr>
-            </a:br>
-            <a:r>
-              <a:rPr lang="en" sz="1000" u="sng">
-                <a:solidFill>
-                  <a:schemeClr val="hlink"/>
-                </a:solidFill>
-                <a:latin typeface="Calibri"/>
-                <a:ea typeface="Calibri"/>
-                <a:cs typeface="Calibri"/>
-                <a:sym typeface="Calibri"/>
-                <a:hlinkClick r:id="rId3"/>
-              </a:rPr>
-              <a:t>https://openai.com/index/introducing-the-model-spec/</a:t>
-            </a:r>
-            <a:r>
-              <a:rPr lang="en" sz="1000">
-                <a:solidFill>
-                  <a:schemeClr val="dk1"/>
-                </a:solidFill>
-                <a:latin typeface="Calibri"/>
-                <a:ea typeface="Calibri"/>
-                <a:cs typeface="Calibri"/>
-                <a:sym typeface="Calibri"/>
-              </a:rPr>
-              <a:t> </a:t>
-            </a:r>
-            <a:endParaRPr sz="1000">
-              <a:solidFill>
-                <a:schemeClr val="dk1"/>
-              </a:solidFill>
-              <a:latin typeface="Calibri"/>
-              <a:ea typeface="Calibri"/>
-              <a:cs typeface="Calibri"/>
-              <a:sym typeface="Calibri"/>
-            </a:endParaRPr>
-          </a:p>
-          <a:p>
-            <a:pPr marL="0" lvl="0" indent="0" algn="l" rtl="0">
-              <a:spcBef>
-                <a:spcPts val="0"/>
-              </a:spcBef>
-              <a:spcAft>
-                <a:spcPts val="0"/>
-              </a:spcAft>
-              <a:buClr>
-                <a:schemeClr val="dk1"/>
-              </a:buClr>
-              <a:buSzPts val="1100"/>
-              <a:buFont typeface="Arial"/>
-              <a:buNone/>
-            </a:pPr>
-            <a:r>
-              <a:rPr lang="en" sz="1300">
-                <a:solidFill>
-                  <a:schemeClr val="dk1"/>
-                </a:solidFill>
-                <a:latin typeface="Calibri"/>
-                <a:ea typeface="Calibri"/>
-                <a:cs typeface="Calibri"/>
-                <a:sym typeface="Calibri"/>
-              </a:rPr>
-              <a:t>Public specification on model behavior - objectives, rules, and default behaviors. You can participate by filling out the form, and selecting the most important objectives and behaviors. </a:t>
-            </a:r>
-            <a:endParaRPr sz="1300">
-              <a:solidFill>
-                <a:schemeClr val="dk1"/>
-              </a:solidFill>
-              <a:latin typeface="Calibri"/>
-              <a:ea typeface="Calibri"/>
-              <a:cs typeface="Calibri"/>
-              <a:sym typeface="Calibri"/>
-            </a:endParaRPr>
-          </a:p>
-        </p:txBody>
-      </p:sp>
-      <p:sp>
-        <p:nvSpPr>
-          <p:cNvPr id="179" name="Google Shape;179;p26"/>
-          <p:cNvSpPr txBox="1"/>
-          <p:nvPr/>
-        </p:nvSpPr>
-        <p:spPr>
-          <a:xfrm>
-            <a:off x="-38050" y="-108050"/>
-            <a:ext cx="5908800" cy="492600"/>
-          </a:xfrm>
-          <a:prstGeom prst="rect">
-            <a:avLst/>
-          </a:prstGeom>
-          <a:noFill/>
-          <a:ln>
-            <a:noFill/>
-          </a:ln>
-        </p:spPr>
-        <p:txBody>
-          <a:bodyPr spcFirstLastPara="1" wrap="square" lIns="91425" tIns="91425" rIns="91425" bIns="91425" anchor="t" anchorCtr="0">
-            <a:spAutoFit/>
-          </a:bodyPr>
-          <a:lstStyle/>
-          <a:p>
-            <a:pPr marL="0" marR="0" lvl="0" indent="0" algn="l" rtl="0">
-              <a:lnSpc>
-                <a:spcPct val="100000"/>
-              </a:lnSpc>
-              <a:spcBef>
-                <a:spcPts val="0"/>
-              </a:spcBef>
-              <a:spcAft>
-                <a:spcPts val="0"/>
-              </a:spcAft>
-              <a:buClr>
-                <a:srgbClr val="000000"/>
-              </a:buClr>
-              <a:buSzPts val="2000"/>
-              <a:buFont typeface="Arial"/>
-              <a:buNone/>
-            </a:pPr>
-            <a:r>
-              <a:rPr lang="en" sz="2000" b="1">
-                <a:solidFill>
-                  <a:schemeClr val="dk1"/>
-                </a:solidFill>
-                <a:latin typeface="Calibri"/>
-                <a:ea typeface="Calibri"/>
-                <a:cs typeface="Calibri"/>
-                <a:sym typeface="Calibri"/>
-              </a:rPr>
-              <a:t>Misc 2</a:t>
-            </a:r>
-            <a:endParaRPr sz="2000" b="1" i="0" u="none" strike="noStrike" cap="none">
-              <a:solidFill>
-                <a:srgbClr val="000000"/>
-              </a:solidFill>
-              <a:latin typeface="Calibri"/>
-              <a:ea typeface="Calibri"/>
-              <a:cs typeface="Calibri"/>
-              <a:sym typeface="Calibri"/>
-            </a:endParaRPr>
-          </a:p>
-        </p:txBody>
-      </p:sp>
-      <p:sp>
-        <p:nvSpPr>
-          <p:cNvPr id="180" name="Google Shape;180;p26"/>
-          <p:cNvSpPr txBox="1"/>
-          <p:nvPr/>
-        </p:nvSpPr>
-        <p:spPr>
-          <a:xfrm>
-            <a:off x="78050" y="3926064"/>
-            <a:ext cx="4392000" cy="372600"/>
-          </a:xfrm>
-          <a:prstGeom prst="rect">
-            <a:avLst/>
-          </a:prstGeom>
-          <a:solidFill>
-            <a:srgbClr val="FFF2CC"/>
-          </a:solidFill>
-          <a:ln w="9525" cap="flat" cmpd="sng">
-            <a:solidFill>
-              <a:srgbClr val="FF0000"/>
-            </a:solidFill>
-            <a:prstDash val="solid"/>
-            <a:round/>
-            <a:headEnd type="none" w="sm" len="sm"/>
-            <a:tailEnd type="none" w="sm" len="sm"/>
-          </a:ln>
-        </p:spPr>
-        <p:txBody>
-          <a:bodyPr spcFirstLastPara="1" wrap="square" lIns="9125" tIns="9125" rIns="9125" bIns="9125" anchor="t" anchorCtr="0">
-            <a:spAutoFit/>
-          </a:bodyPr>
-          <a:lstStyle/>
-          <a:p>
-            <a:pPr marL="0" lvl="0" indent="0" algn="l" rtl="0">
-              <a:spcBef>
-                <a:spcPts val="0"/>
-              </a:spcBef>
-              <a:spcAft>
-                <a:spcPts val="0"/>
-              </a:spcAft>
-              <a:buClr>
-                <a:schemeClr val="dk1"/>
-              </a:buClr>
-              <a:buSzPts val="1100"/>
-              <a:buFont typeface="Arial"/>
-              <a:buNone/>
-            </a:pPr>
-            <a:r>
-              <a:rPr lang="en" sz="1300" b="1">
-                <a:solidFill>
-                  <a:srgbClr val="FF0000"/>
-                </a:solidFill>
-                <a:latin typeface="Calibri"/>
-                <a:ea typeface="Calibri"/>
-                <a:cs typeface="Calibri"/>
-                <a:sym typeface="Calibri"/>
-              </a:rPr>
-              <a:t>DeepLearning.ai - Building Agentic RAG with LlamaIndex</a:t>
-            </a:r>
-            <a:endParaRPr sz="1300">
-              <a:solidFill>
-                <a:schemeClr val="dk1"/>
-              </a:solidFill>
-              <a:latin typeface="Calibri"/>
-              <a:ea typeface="Calibri"/>
-              <a:cs typeface="Calibri"/>
-              <a:sym typeface="Calibri"/>
-            </a:endParaRPr>
-          </a:p>
-          <a:p>
-            <a:pPr marL="0" lvl="0" indent="0" algn="l" rtl="0">
-              <a:spcBef>
-                <a:spcPts val="0"/>
-              </a:spcBef>
-              <a:spcAft>
-                <a:spcPts val="0"/>
-              </a:spcAft>
-              <a:buClr>
-                <a:schemeClr val="dk1"/>
-              </a:buClr>
-              <a:buSzPts val="1100"/>
-              <a:buFont typeface="Arial"/>
-              <a:buNone/>
-            </a:pPr>
-            <a:r>
-              <a:rPr lang="en" sz="1000" u="sng">
-                <a:solidFill>
-                  <a:schemeClr val="hlink"/>
-                </a:solidFill>
-                <a:latin typeface="Calibri"/>
-                <a:ea typeface="Calibri"/>
-                <a:cs typeface="Calibri"/>
-                <a:sym typeface="Calibri"/>
-                <a:hlinkClick r:id="rId4"/>
-              </a:rPr>
-              <a:t>https://www.deeplearning.ai/short-courses/building-agentic-rag-with-llamaindex/</a:t>
-            </a:r>
-            <a:r>
-              <a:rPr lang="en" sz="1000">
-                <a:solidFill>
-                  <a:schemeClr val="dk1"/>
-                </a:solidFill>
-                <a:latin typeface="Calibri"/>
-                <a:ea typeface="Calibri"/>
-                <a:cs typeface="Calibri"/>
-                <a:sym typeface="Calibri"/>
-              </a:rPr>
-              <a:t> </a:t>
-            </a:r>
-            <a:endParaRPr sz="1000">
-              <a:solidFill>
-                <a:schemeClr val="dk1"/>
-              </a:solidFill>
-              <a:latin typeface="Calibri"/>
-              <a:ea typeface="Calibri"/>
-              <a:cs typeface="Calibri"/>
-              <a:sym typeface="Calibri"/>
-            </a:endParaRPr>
-          </a:p>
-        </p:txBody>
-      </p:sp>
-      <p:sp>
-        <p:nvSpPr>
-          <p:cNvPr id="181" name="Google Shape;181;p26"/>
-          <p:cNvSpPr txBox="1"/>
-          <p:nvPr/>
-        </p:nvSpPr>
-        <p:spPr>
-          <a:xfrm>
-            <a:off x="78050" y="4367264"/>
-            <a:ext cx="4392000" cy="726600"/>
-          </a:xfrm>
-          <a:prstGeom prst="rect">
-            <a:avLst/>
-          </a:prstGeom>
-          <a:solidFill>
-            <a:srgbClr val="FFF2CC"/>
-          </a:solidFill>
-          <a:ln w="9525" cap="flat" cmpd="sng">
-            <a:solidFill>
-              <a:srgbClr val="FF0000"/>
-            </a:solidFill>
-            <a:prstDash val="solid"/>
-            <a:round/>
-            <a:headEnd type="none" w="sm" len="sm"/>
-            <a:tailEnd type="none" w="sm" len="sm"/>
-          </a:ln>
-        </p:spPr>
-        <p:txBody>
-          <a:bodyPr spcFirstLastPara="1" wrap="square" lIns="9125" tIns="9125" rIns="9125" bIns="9125" anchor="t" anchorCtr="0">
-            <a:spAutoFit/>
-          </a:bodyPr>
-          <a:lstStyle/>
-          <a:p>
-            <a:pPr marL="0" lvl="0" indent="0" algn="l" rtl="0">
-              <a:spcBef>
-                <a:spcPts val="0"/>
-              </a:spcBef>
-              <a:spcAft>
-                <a:spcPts val="0"/>
-              </a:spcAft>
-              <a:buClr>
-                <a:schemeClr val="dk1"/>
-              </a:buClr>
-              <a:buSzPts val="1100"/>
-              <a:buFont typeface="Arial"/>
-              <a:buNone/>
-            </a:pPr>
-            <a:r>
-              <a:rPr lang="en" sz="1300">
-                <a:solidFill>
-                  <a:schemeClr val="dk1"/>
-                </a:solidFill>
-                <a:latin typeface="Calibri"/>
-                <a:ea typeface="Calibri"/>
-                <a:cs typeface="Calibri"/>
-                <a:sym typeface="Calibri"/>
-              </a:rPr>
-              <a:t>Paris-based Mistral AI is raising up to $600 Mln at $6 Bln valuation - x3 times its valuation in December.</a:t>
-            </a:r>
-            <a:endParaRPr sz="1300">
-              <a:solidFill>
-                <a:schemeClr val="dk1"/>
-              </a:solidFill>
-              <a:latin typeface="Calibri"/>
-              <a:ea typeface="Calibri"/>
-              <a:cs typeface="Calibri"/>
-              <a:sym typeface="Calibri"/>
-            </a:endParaRPr>
-          </a:p>
-          <a:p>
-            <a:pPr marL="0" lvl="0" indent="0" algn="l" rtl="0">
-              <a:spcBef>
-                <a:spcPts val="0"/>
-              </a:spcBef>
-              <a:spcAft>
-                <a:spcPts val="0"/>
-              </a:spcAft>
-              <a:buClr>
-                <a:schemeClr val="dk1"/>
-              </a:buClr>
-              <a:buSzPts val="1100"/>
-              <a:buFont typeface="Arial"/>
-              <a:buNone/>
-            </a:pPr>
-            <a:r>
-              <a:rPr lang="en" sz="1000" u="sng">
-                <a:solidFill>
-                  <a:schemeClr val="hlink"/>
-                </a:solidFill>
-                <a:latin typeface="Calibri"/>
-                <a:ea typeface="Calibri"/>
-                <a:cs typeface="Calibri"/>
-                <a:sym typeface="Calibri"/>
-                <a:hlinkClick r:id="rId5"/>
-              </a:rPr>
-              <a:t>https://techcrunch.com/2024/05/09/sources-mistral-ai-raising-at-a-6b-valuation-softbank-not-in-but-dst-is/</a:t>
-            </a:r>
-            <a:r>
-              <a:rPr lang="en" sz="1000">
-                <a:solidFill>
-                  <a:schemeClr val="dk1"/>
-                </a:solidFill>
-                <a:latin typeface="Calibri"/>
-                <a:ea typeface="Calibri"/>
-                <a:cs typeface="Calibri"/>
-                <a:sym typeface="Calibri"/>
-              </a:rPr>
-              <a:t> </a:t>
-            </a:r>
-            <a:endParaRPr sz="1000">
-              <a:solidFill>
-                <a:schemeClr val="dk1"/>
-              </a:solidFill>
-              <a:latin typeface="Calibri"/>
-              <a:ea typeface="Calibri"/>
-              <a:cs typeface="Calibri"/>
-              <a:sym typeface="Calibri"/>
-            </a:endParaRPr>
-          </a:p>
-        </p:txBody>
-      </p:sp>
-      <p:pic>
-        <p:nvPicPr>
-          <p:cNvPr id="182" name="Google Shape;182;p26"/>
-          <p:cNvPicPr preferRelativeResize="0"/>
-          <p:nvPr/>
-        </p:nvPicPr>
-        <p:blipFill>
-          <a:blip r:embed="rId6" cstate="email">
-            <a:alphaModFix/>
-            <a:extLst>
-              <a:ext uri="{28A0092B-C50C-407E-A947-70E740481C1C}">
-                <a14:useLocalDpi xmlns:a14="http://schemas.microsoft.com/office/drawing/2010/main"/>
-              </a:ext>
-            </a:extLst>
-          </a:blip>
-          <a:stretch>
-            <a:fillRect/>
-          </a:stretch>
-        </p:blipFill>
-        <p:spPr>
-          <a:xfrm>
-            <a:off x="4630825" y="443225"/>
-            <a:ext cx="4369153" cy="3048127"/>
-          </a:xfrm>
-          <a:prstGeom prst="rect">
-            <a:avLst/>
-          </a:prstGeom>
-          <a:noFill/>
-          <a:ln w="9525" cap="flat" cmpd="sng">
-            <a:solidFill>
-              <a:srgbClr val="FF0000"/>
-            </a:solidFill>
-            <a:prstDash val="solid"/>
-            <a:round/>
-            <a:headEnd type="none" w="sm" len="sm"/>
-            <a:tailEnd type="none" w="sm" len="sm"/>
-          </a:ln>
-        </p:spPr>
-      </p:pic>
-      <p:sp>
-        <p:nvSpPr>
-          <p:cNvPr id="183" name="Google Shape;183;p26"/>
-          <p:cNvSpPr txBox="1"/>
-          <p:nvPr/>
-        </p:nvSpPr>
-        <p:spPr>
-          <a:xfrm>
-            <a:off x="78050" y="443225"/>
-            <a:ext cx="4392000" cy="2219400"/>
-          </a:xfrm>
-          <a:prstGeom prst="rect">
-            <a:avLst/>
-          </a:prstGeom>
-          <a:solidFill>
-            <a:srgbClr val="FFF2CC"/>
-          </a:solidFill>
-          <a:ln w="9525" cap="flat" cmpd="sng">
-            <a:solidFill>
-              <a:srgbClr val="FF0000"/>
-            </a:solidFill>
-            <a:prstDash val="solid"/>
-            <a:round/>
-            <a:headEnd type="none" w="sm" len="sm"/>
-            <a:tailEnd type="none" w="sm" len="sm"/>
-          </a:ln>
-        </p:spPr>
-        <p:txBody>
-          <a:bodyPr spcFirstLastPara="1" wrap="square" lIns="9125" tIns="9125" rIns="9125" bIns="9125" anchor="t" anchorCtr="0">
-            <a:spAutoFit/>
-          </a:bodyPr>
-          <a:lstStyle/>
-          <a:p>
-            <a:pPr marL="0" lvl="0" indent="0" algn="l" rtl="0">
-              <a:spcBef>
-                <a:spcPts val="0"/>
-              </a:spcBef>
-              <a:spcAft>
-                <a:spcPts val="0"/>
-              </a:spcAft>
-              <a:buClr>
-                <a:schemeClr val="dk1"/>
-              </a:buClr>
-              <a:buSzPts val="1100"/>
-              <a:buFont typeface="Arial"/>
-              <a:buNone/>
-            </a:pPr>
-            <a:r>
-              <a:rPr lang="en" sz="1300" b="1">
-                <a:solidFill>
-                  <a:srgbClr val="FF0000"/>
-                </a:solidFill>
-                <a:latin typeface="Calibri"/>
-                <a:ea typeface="Calibri"/>
-                <a:cs typeface="Calibri"/>
-                <a:sym typeface="Calibri"/>
-              </a:rPr>
-              <a:t>DeepSeek-V2</a:t>
-            </a:r>
-            <a:r>
-              <a:rPr lang="en" sz="1300">
-                <a:solidFill>
-                  <a:schemeClr val="dk1"/>
-                </a:solidFill>
-                <a:latin typeface="Calibri"/>
-                <a:ea typeface="Calibri"/>
-                <a:cs typeface="Calibri"/>
-                <a:sym typeface="Calibri"/>
-              </a:rPr>
-              <a:t>, an open-source LLM</a:t>
-            </a:r>
-            <a:endParaRPr sz="1300">
-              <a:solidFill>
-                <a:schemeClr val="dk1"/>
-              </a:solidFill>
-              <a:latin typeface="Calibri"/>
-              <a:ea typeface="Calibri"/>
-              <a:cs typeface="Calibri"/>
-              <a:sym typeface="Calibri"/>
-            </a:endParaRPr>
-          </a:p>
-          <a:p>
-            <a:pPr marL="0" lvl="0" indent="0" algn="l" rtl="0">
-              <a:spcBef>
-                <a:spcPts val="0"/>
-              </a:spcBef>
-              <a:spcAft>
-                <a:spcPts val="0"/>
-              </a:spcAft>
-              <a:buClr>
-                <a:schemeClr val="dk1"/>
-              </a:buClr>
-              <a:buSzPts val="1100"/>
-              <a:buFont typeface="Arial"/>
-              <a:buNone/>
-            </a:pPr>
-            <a:r>
-              <a:rPr lang="en" sz="1300">
-                <a:solidFill>
-                  <a:schemeClr val="dk1"/>
-                </a:solidFill>
-                <a:latin typeface="Calibri"/>
-                <a:ea typeface="Calibri"/>
-                <a:cs typeface="Calibri"/>
-                <a:sym typeface="Calibri"/>
-              </a:rPr>
-              <a:t>DeepSeek (深度求索) is a Chinese company focused on artificial general intelligence (AGI), was founded in 2023</a:t>
-            </a:r>
-            <a:endParaRPr sz="1300">
-              <a:solidFill>
-                <a:schemeClr val="dk1"/>
-              </a:solidFill>
-              <a:latin typeface="Calibri"/>
-              <a:ea typeface="Calibri"/>
-              <a:cs typeface="Calibri"/>
-              <a:sym typeface="Calibri"/>
-            </a:endParaRPr>
-          </a:p>
-          <a:p>
-            <a:pPr marL="0" lvl="0" indent="0" algn="l" rtl="0">
-              <a:spcBef>
-                <a:spcPts val="0"/>
-              </a:spcBef>
-              <a:spcAft>
-                <a:spcPts val="0"/>
-              </a:spcAft>
-              <a:buClr>
-                <a:schemeClr val="dk1"/>
-              </a:buClr>
-              <a:buSzPts val="1100"/>
-              <a:buFont typeface="Arial"/>
-              <a:buNone/>
-            </a:pPr>
-            <a:endParaRPr sz="600">
-              <a:solidFill>
-                <a:schemeClr val="dk1"/>
-              </a:solidFill>
-              <a:latin typeface="Calibri"/>
-              <a:ea typeface="Calibri"/>
-              <a:cs typeface="Calibri"/>
-              <a:sym typeface="Calibri"/>
-            </a:endParaRPr>
-          </a:p>
-          <a:p>
-            <a:pPr marL="228600" lvl="0" indent="-139700" algn="l" rtl="0">
-              <a:spcBef>
-                <a:spcPts val="0"/>
-              </a:spcBef>
-              <a:spcAft>
-                <a:spcPts val="0"/>
-              </a:spcAft>
-              <a:buClr>
-                <a:schemeClr val="dk1"/>
-              </a:buClr>
-              <a:buSzPts val="1300"/>
-              <a:buFont typeface="Calibri"/>
-              <a:buChar char="●"/>
-            </a:pPr>
-            <a:r>
-              <a:rPr lang="en" sz="1300">
-                <a:solidFill>
-                  <a:schemeClr val="dk1"/>
-                </a:solidFill>
-                <a:latin typeface="Calibri"/>
-                <a:ea typeface="Calibri"/>
-                <a:cs typeface="Calibri"/>
-                <a:sym typeface="Calibri"/>
-              </a:rPr>
-              <a:t>MoE LM, 236B total params, activating 21B per token</a:t>
-            </a:r>
-            <a:endParaRPr sz="1300">
-              <a:solidFill>
-                <a:schemeClr val="dk1"/>
-              </a:solidFill>
-              <a:latin typeface="Calibri"/>
-              <a:ea typeface="Calibri"/>
-              <a:cs typeface="Calibri"/>
-              <a:sym typeface="Calibri"/>
-            </a:endParaRPr>
-          </a:p>
-          <a:p>
-            <a:pPr marL="228600" lvl="0" indent="-139700" algn="l" rtl="0">
-              <a:spcBef>
-                <a:spcPts val="0"/>
-              </a:spcBef>
-              <a:spcAft>
-                <a:spcPts val="0"/>
-              </a:spcAft>
-              <a:buClr>
-                <a:schemeClr val="dk1"/>
-              </a:buClr>
-              <a:buSzPts val="1300"/>
-              <a:buFont typeface="Calibri"/>
-              <a:buChar char="●"/>
-            </a:pPr>
-            <a:r>
-              <a:rPr lang="en" sz="1300">
-                <a:solidFill>
-                  <a:schemeClr val="dk1"/>
-                </a:solidFill>
-                <a:latin typeface="Calibri"/>
-                <a:ea typeface="Calibri"/>
-                <a:cs typeface="Calibri"/>
-                <a:sym typeface="Calibri"/>
-              </a:rPr>
-              <a:t>128K context length</a:t>
-            </a:r>
-            <a:endParaRPr sz="1300">
-              <a:solidFill>
-                <a:schemeClr val="dk1"/>
-              </a:solidFill>
-              <a:latin typeface="Calibri"/>
-              <a:ea typeface="Calibri"/>
-              <a:cs typeface="Calibri"/>
-              <a:sym typeface="Calibri"/>
-            </a:endParaRPr>
-          </a:p>
-          <a:p>
-            <a:pPr marL="228600" lvl="0" indent="-139700" algn="l" rtl="0">
-              <a:spcBef>
-                <a:spcPts val="0"/>
-              </a:spcBef>
-              <a:spcAft>
-                <a:spcPts val="0"/>
-              </a:spcAft>
-              <a:buClr>
-                <a:schemeClr val="dk1"/>
-              </a:buClr>
-              <a:buSzPts val="1300"/>
-              <a:buFont typeface="Calibri"/>
-              <a:buChar char="●"/>
-            </a:pPr>
-            <a:r>
-              <a:rPr lang="en" sz="1300">
-                <a:solidFill>
-                  <a:schemeClr val="dk1"/>
-                </a:solidFill>
-                <a:latin typeface="Calibri"/>
-                <a:ea typeface="Calibri"/>
-                <a:cs typeface="Calibri"/>
-                <a:sym typeface="Calibri"/>
-              </a:rPr>
-              <a:t>AlignBench: in top 3, better than GPT-4, close to GPT-4-Turbo</a:t>
-            </a:r>
-            <a:endParaRPr sz="1300">
-              <a:solidFill>
-                <a:schemeClr val="dk1"/>
-              </a:solidFill>
-              <a:latin typeface="Calibri"/>
-              <a:ea typeface="Calibri"/>
-              <a:cs typeface="Calibri"/>
-              <a:sym typeface="Calibri"/>
-            </a:endParaRPr>
-          </a:p>
-          <a:p>
-            <a:pPr marL="228600" lvl="0" indent="-139700" algn="l" rtl="0">
-              <a:spcBef>
-                <a:spcPts val="0"/>
-              </a:spcBef>
-              <a:spcAft>
-                <a:spcPts val="0"/>
-              </a:spcAft>
-              <a:buClr>
-                <a:schemeClr val="dk1"/>
-              </a:buClr>
-              <a:buSzPts val="1300"/>
-              <a:buFont typeface="Calibri"/>
-              <a:buChar char="●"/>
-            </a:pPr>
-            <a:r>
-              <a:rPr lang="en" sz="1300">
-                <a:solidFill>
-                  <a:schemeClr val="dk1"/>
-                </a:solidFill>
-                <a:latin typeface="Calibri"/>
-                <a:ea typeface="Calibri"/>
-                <a:cs typeface="Calibri"/>
-                <a:sym typeface="Calibri"/>
-              </a:rPr>
-              <a:t>MT-Bench: rivaling LLaMa3-70B, better than Mixtral 8x22B</a:t>
-            </a:r>
-            <a:endParaRPr sz="1300">
-              <a:solidFill>
-                <a:schemeClr val="dk1"/>
-              </a:solidFill>
-              <a:latin typeface="Calibri"/>
-              <a:ea typeface="Calibri"/>
-              <a:cs typeface="Calibri"/>
-              <a:sym typeface="Calibri"/>
-            </a:endParaRPr>
-          </a:p>
-          <a:p>
-            <a:pPr marL="228600" lvl="0" indent="-139700" algn="l" rtl="0">
-              <a:spcBef>
-                <a:spcPts val="0"/>
-              </a:spcBef>
-              <a:spcAft>
-                <a:spcPts val="0"/>
-              </a:spcAft>
-              <a:buClr>
-                <a:schemeClr val="dk1"/>
-              </a:buClr>
-              <a:buSzPts val="1300"/>
-              <a:buFont typeface="Calibri"/>
-              <a:buChar char="●"/>
-            </a:pPr>
-            <a:r>
-              <a:rPr lang="en" sz="1300">
-                <a:solidFill>
-                  <a:schemeClr val="dk1"/>
-                </a:solidFill>
-                <a:latin typeface="Calibri"/>
-                <a:ea typeface="Calibri"/>
-                <a:cs typeface="Calibri"/>
-                <a:sym typeface="Calibri"/>
-              </a:rPr>
-              <a:t>Specializes in Math, Code, Reasoning</a:t>
-            </a:r>
-            <a:endParaRPr sz="1300">
-              <a:solidFill>
-                <a:schemeClr val="dk1"/>
-              </a:solidFill>
-              <a:latin typeface="Calibri"/>
-              <a:ea typeface="Calibri"/>
-              <a:cs typeface="Calibri"/>
-              <a:sym typeface="Calibri"/>
-            </a:endParaRPr>
-          </a:p>
-          <a:p>
-            <a:pPr marL="228600" lvl="0" indent="-139700" algn="l" rtl="0">
-              <a:spcBef>
-                <a:spcPts val="0"/>
-              </a:spcBef>
-              <a:spcAft>
-                <a:spcPts val="0"/>
-              </a:spcAft>
-              <a:buClr>
-                <a:schemeClr val="dk1"/>
-              </a:buClr>
-              <a:buSzPts val="1300"/>
-              <a:buFont typeface="Calibri"/>
-              <a:buChar char="●"/>
-            </a:pPr>
-            <a:r>
-              <a:rPr lang="en" sz="1300">
-                <a:solidFill>
-                  <a:schemeClr val="dk1"/>
-                </a:solidFill>
-                <a:latin typeface="Calibri"/>
-                <a:ea typeface="Calibri"/>
-                <a:cs typeface="Calibri"/>
-                <a:sym typeface="Calibri"/>
-              </a:rPr>
-              <a:t>not available on lmsys arena leaderboard</a:t>
-            </a:r>
-            <a:endParaRPr sz="1000">
-              <a:solidFill>
-                <a:schemeClr val="dk1"/>
-              </a:solidFill>
-              <a:latin typeface="Calibri"/>
-              <a:ea typeface="Calibri"/>
-              <a:cs typeface="Calibri"/>
-              <a:sym typeface="Calibri"/>
-            </a:endParaRPr>
-          </a:p>
-          <a:p>
-            <a:pPr marL="228600" lvl="0" indent="-120650" algn="l" rtl="0">
-              <a:spcBef>
-                <a:spcPts val="0"/>
-              </a:spcBef>
-              <a:spcAft>
-                <a:spcPts val="0"/>
-              </a:spcAft>
-              <a:buSzPts val="1000"/>
-              <a:buFont typeface="Calibri"/>
-              <a:buChar char="●"/>
-            </a:pPr>
-            <a:r>
-              <a:rPr lang="en" sz="1000" u="sng">
-                <a:solidFill>
-                  <a:schemeClr val="hlink"/>
-                </a:solidFill>
-                <a:latin typeface="Calibri"/>
-                <a:ea typeface="Calibri"/>
-                <a:cs typeface="Calibri"/>
-                <a:sym typeface="Calibri"/>
-                <a:hlinkClick r:id="rId7"/>
-              </a:rPr>
-              <a:t>https://www.deepseek.com</a:t>
-            </a:r>
-            <a:r>
-              <a:rPr lang="en" sz="1000">
-                <a:solidFill>
-                  <a:schemeClr val="dk1"/>
-                </a:solidFill>
-                <a:latin typeface="Calibri"/>
-                <a:ea typeface="Calibri"/>
-                <a:cs typeface="Calibri"/>
-                <a:sym typeface="Calibri"/>
-              </a:rPr>
-              <a:t> </a:t>
-            </a:r>
-            <a:endParaRPr sz="1000">
-              <a:solidFill>
-                <a:schemeClr val="dk1"/>
-              </a:solidFill>
-              <a:latin typeface="Calibri"/>
-              <a:ea typeface="Calibri"/>
-              <a:cs typeface="Calibri"/>
-              <a:sym typeface="Calibri"/>
-            </a:endParaRPr>
-          </a:p>
-          <a:p>
-            <a:pPr marL="228600" lvl="0" indent="-120650" algn="l" rtl="0">
-              <a:spcBef>
-                <a:spcPts val="0"/>
-              </a:spcBef>
-              <a:spcAft>
-                <a:spcPts val="0"/>
-              </a:spcAft>
-              <a:buSzPts val="1000"/>
-              <a:buFont typeface="Calibri"/>
-              <a:buChar char="●"/>
-            </a:pPr>
-            <a:r>
-              <a:rPr lang="en" sz="1000" u="sng">
-                <a:solidFill>
-                  <a:schemeClr val="hlink"/>
-                </a:solidFill>
-                <a:latin typeface="Calibri"/>
-                <a:ea typeface="Calibri"/>
-                <a:cs typeface="Calibri"/>
-                <a:sym typeface="Calibri"/>
-                <a:hlinkClick r:id="rId8"/>
-              </a:rPr>
-              <a:t>https://github.com/deepseek-ai</a:t>
-            </a:r>
-            <a:r>
-              <a:rPr lang="en" sz="1000">
                 <a:solidFill>
                   <a:schemeClr val="dk1"/>
                 </a:solidFill>
@@ -15880,6 +15293,495 @@
         </p:nvSpPr>
         <p:spPr>
           <a:xfrm>
+            <a:off x="78050" y="443996"/>
+            <a:ext cx="4392000" cy="972900"/>
+          </a:xfrm>
+          <a:prstGeom prst="rect">
+            <a:avLst/>
+          </a:prstGeom>
+          <a:solidFill>
+            <a:srgbClr val="FFF2CC"/>
+          </a:solidFill>
+          <a:ln w="9525" cap="flat" cmpd="sng">
+            <a:solidFill>
+              <a:srgbClr val="FF0000"/>
+            </a:solidFill>
+            <a:prstDash val="solid"/>
+            <a:round/>
+            <a:headEnd type="none" w="sm" len="sm"/>
+            <a:tailEnd type="none" w="sm" len="sm"/>
+          </a:ln>
+        </p:spPr>
+        <p:txBody>
+          <a:bodyPr spcFirstLastPara="1" wrap="square" lIns="9125" tIns="9125" rIns="9125" bIns="9125" anchor="t" anchorCtr="0">
+            <a:spAutoFit/>
+          </a:bodyPr>
+          <a:lstStyle/>
+          <a:p>
+            <a:pPr marL="0" lvl="0" indent="0" algn="l" rtl="0">
+              <a:spcBef>
+                <a:spcPts val="0"/>
+              </a:spcBef>
+              <a:spcAft>
+                <a:spcPts val="0"/>
+              </a:spcAft>
+              <a:buClr>
+                <a:schemeClr val="dk1"/>
+              </a:buClr>
+              <a:buSzPts val="1100"/>
+              <a:buFont typeface="Arial"/>
+              <a:buNone/>
+            </a:pPr>
+            <a:r>
+              <a:rPr lang="en" sz="1300" b="1">
+                <a:solidFill>
+                  <a:srgbClr val="FF0000"/>
+                </a:solidFill>
+                <a:latin typeface="Calibri"/>
+                <a:ea typeface="Calibri"/>
+                <a:cs typeface="Calibri"/>
+                <a:sym typeface="Calibri"/>
+              </a:rPr>
+              <a:t>OpenAI Public Model Specification</a:t>
+            </a:r>
+            <a:r>
+              <a:rPr lang="en" sz="1300">
+                <a:solidFill>
+                  <a:schemeClr val="dk1"/>
+                </a:solidFill>
+                <a:latin typeface="Calibri"/>
+                <a:ea typeface="Calibri"/>
+                <a:cs typeface="Calibri"/>
+                <a:sym typeface="Calibri"/>
+              </a:rPr>
+              <a:t>:</a:t>
+            </a:r>
+            <a:br>
+              <a:rPr lang="en" sz="1300">
+                <a:solidFill>
+                  <a:schemeClr val="dk1"/>
+                </a:solidFill>
+                <a:latin typeface="Calibri"/>
+                <a:ea typeface="Calibri"/>
+                <a:cs typeface="Calibri"/>
+                <a:sym typeface="Calibri"/>
+              </a:rPr>
+            </a:br>
+            <a:r>
+              <a:rPr lang="en" sz="1000" u="sng">
+                <a:solidFill>
+                  <a:schemeClr val="hlink"/>
+                </a:solidFill>
+                <a:latin typeface="Calibri"/>
+                <a:ea typeface="Calibri"/>
+                <a:cs typeface="Calibri"/>
+                <a:sym typeface="Calibri"/>
+                <a:hlinkClick r:id="rId3"/>
+              </a:rPr>
+              <a:t>https://openai.com/index/introducing-the-model-spec/</a:t>
+            </a:r>
+            <a:r>
+              <a:rPr lang="en" sz="1000">
+                <a:solidFill>
+                  <a:schemeClr val="dk1"/>
+                </a:solidFill>
+                <a:latin typeface="Calibri"/>
+                <a:ea typeface="Calibri"/>
+                <a:cs typeface="Calibri"/>
+                <a:sym typeface="Calibri"/>
+              </a:rPr>
+              <a:t> </a:t>
+            </a:r>
+            <a:endParaRPr sz="1000">
+              <a:solidFill>
+                <a:schemeClr val="dk1"/>
+              </a:solidFill>
+              <a:latin typeface="Calibri"/>
+              <a:ea typeface="Calibri"/>
+              <a:cs typeface="Calibri"/>
+              <a:sym typeface="Calibri"/>
+            </a:endParaRPr>
+          </a:p>
+          <a:p>
+            <a:pPr marL="0" lvl="0" indent="0" algn="l" rtl="0">
+              <a:spcBef>
+                <a:spcPts val="0"/>
+              </a:spcBef>
+              <a:spcAft>
+                <a:spcPts val="0"/>
+              </a:spcAft>
+              <a:buClr>
+                <a:schemeClr val="dk1"/>
+              </a:buClr>
+              <a:buSzPts val="1100"/>
+              <a:buFont typeface="Arial"/>
+              <a:buNone/>
+            </a:pPr>
+            <a:r>
+              <a:rPr lang="en" sz="1300">
+                <a:solidFill>
+                  <a:schemeClr val="dk1"/>
+                </a:solidFill>
+                <a:latin typeface="Calibri"/>
+                <a:ea typeface="Calibri"/>
+                <a:cs typeface="Calibri"/>
+                <a:sym typeface="Calibri"/>
+              </a:rPr>
+              <a:t>Public specification on model behavior - objectives, rules, and default behaviors. You can participate by filling out the form, and selecting the most important objectives and behaviors. </a:t>
+            </a:r>
+            <a:endParaRPr sz="1300">
+              <a:solidFill>
+                <a:schemeClr val="dk1"/>
+              </a:solidFill>
+              <a:latin typeface="Calibri"/>
+              <a:ea typeface="Calibri"/>
+              <a:cs typeface="Calibri"/>
+              <a:sym typeface="Calibri"/>
+            </a:endParaRPr>
+          </a:p>
+        </p:txBody>
+      </p:sp>
+      <p:sp>
+        <p:nvSpPr>
+          <p:cNvPr id="189" name="Google Shape;189;p27"/>
+          <p:cNvSpPr txBox="1"/>
+          <p:nvPr/>
+        </p:nvSpPr>
+        <p:spPr>
+          <a:xfrm>
+            <a:off x="-38050" y="-108050"/>
+            <a:ext cx="5908800" cy="492600"/>
+          </a:xfrm>
+          <a:prstGeom prst="rect">
+            <a:avLst/>
+          </a:prstGeom>
+          <a:noFill/>
+          <a:ln>
+            <a:noFill/>
+          </a:ln>
+        </p:spPr>
+        <p:txBody>
+          <a:bodyPr spcFirstLastPara="1" wrap="square" lIns="91425" tIns="91425" rIns="91425" bIns="91425" anchor="t" anchorCtr="0">
+            <a:spAutoFit/>
+          </a:bodyPr>
+          <a:lstStyle/>
+          <a:p>
+            <a:pPr marL="0" marR="0" lvl="0" indent="0" algn="l" rtl="0">
+              <a:lnSpc>
+                <a:spcPct val="100000"/>
+              </a:lnSpc>
+              <a:spcBef>
+                <a:spcPts val="0"/>
+              </a:spcBef>
+              <a:spcAft>
+                <a:spcPts val="0"/>
+              </a:spcAft>
+              <a:buClr>
+                <a:srgbClr val="000000"/>
+              </a:buClr>
+              <a:buSzPts val="2000"/>
+              <a:buFont typeface="Arial"/>
+              <a:buNone/>
+            </a:pPr>
+            <a:r>
+              <a:rPr lang="en" sz="2000" b="1">
+                <a:solidFill>
+                  <a:schemeClr val="dk1"/>
+                </a:solidFill>
+                <a:latin typeface="Calibri"/>
+                <a:ea typeface="Calibri"/>
+                <a:cs typeface="Calibri"/>
+                <a:sym typeface="Calibri"/>
+              </a:rPr>
+              <a:t>Misc 2</a:t>
+            </a:r>
+            <a:endParaRPr sz="2000" b="1" i="0" u="none" strike="noStrike" cap="none">
+              <a:solidFill>
+                <a:srgbClr val="000000"/>
+              </a:solidFill>
+              <a:latin typeface="Calibri"/>
+              <a:ea typeface="Calibri"/>
+              <a:cs typeface="Calibri"/>
+              <a:sym typeface="Calibri"/>
+            </a:endParaRPr>
+          </a:p>
+        </p:txBody>
+      </p:sp>
+      <p:sp>
+        <p:nvSpPr>
+          <p:cNvPr id="190" name="Google Shape;190;p27"/>
+          <p:cNvSpPr txBox="1"/>
+          <p:nvPr/>
+        </p:nvSpPr>
+        <p:spPr>
+          <a:xfrm>
+            <a:off x="78050" y="1487664"/>
+            <a:ext cx="4392000" cy="372600"/>
+          </a:xfrm>
+          <a:prstGeom prst="rect">
+            <a:avLst/>
+          </a:prstGeom>
+          <a:solidFill>
+            <a:srgbClr val="FFF2CC"/>
+          </a:solidFill>
+          <a:ln w="9525" cap="flat" cmpd="sng">
+            <a:solidFill>
+              <a:srgbClr val="FF0000"/>
+            </a:solidFill>
+            <a:prstDash val="solid"/>
+            <a:round/>
+            <a:headEnd type="none" w="sm" len="sm"/>
+            <a:tailEnd type="none" w="sm" len="sm"/>
+          </a:ln>
+        </p:spPr>
+        <p:txBody>
+          <a:bodyPr spcFirstLastPara="1" wrap="square" lIns="9125" tIns="9125" rIns="9125" bIns="9125" anchor="t" anchorCtr="0">
+            <a:spAutoFit/>
+          </a:bodyPr>
+          <a:lstStyle/>
+          <a:p>
+            <a:pPr marL="0" lvl="0" indent="0" algn="l" rtl="0">
+              <a:spcBef>
+                <a:spcPts val="0"/>
+              </a:spcBef>
+              <a:spcAft>
+                <a:spcPts val="0"/>
+              </a:spcAft>
+              <a:buClr>
+                <a:schemeClr val="dk1"/>
+              </a:buClr>
+              <a:buSzPts val="1100"/>
+              <a:buFont typeface="Arial"/>
+              <a:buNone/>
+            </a:pPr>
+            <a:r>
+              <a:rPr lang="en" sz="1300" b="1">
+                <a:solidFill>
+                  <a:srgbClr val="FF0000"/>
+                </a:solidFill>
+                <a:latin typeface="Calibri"/>
+                <a:ea typeface="Calibri"/>
+                <a:cs typeface="Calibri"/>
+                <a:sym typeface="Calibri"/>
+              </a:rPr>
+              <a:t>DeepLearning.ai - Building Agentic RAG with LlamaIndex</a:t>
+            </a:r>
+            <a:endParaRPr sz="1300">
+              <a:solidFill>
+                <a:schemeClr val="dk1"/>
+              </a:solidFill>
+              <a:latin typeface="Calibri"/>
+              <a:ea typeface="Calibri"/>
+              <a:cs typeface="Calibri"/>
+              <a:sym typeface="Calibri"/>
+            </a:endParaRPr>
+          </a:p>
+          <a:p>
+            <a:pPr marL="0" lvl="0" indent="0" algn="l" rtl="0">
+              <a:spcBef>
+                <a:spcPts val="0"/>
+              </a:spcBef>
+              <a:spcAft>
+                <a:spcPts val="0"/>
+              </a:spcAft>
+              <a:buClr>
+                <a:schemeClr val="dk1"/>
+              </a:buClr>
+              <a:buSzPts val="1100"/>
+              <a:buFont typeface="Arial"/>
+              <a:buNone/>
+            </a:pPr>
+            <a:r>
+              <a:rPr lang="en" sz="1000" u="sng">
+                <a:solidFill>
+                  <a:schemeClr val="hlink"/>
+                </a:solidFill>
+                <a:latin typeface="Calibri"/>
+                <a:ea typeface="Calibri"/>
+                <a:cs typeface="Calibri"/>
+                <a:sym typeface="Calibri"/>
+                <a:hlinkClick r:id="rId4"/>
+              </a:rPr>
+              <a:t>https://www.deeplearning.ai/short-courses/building-agentic-rag-with-llamaindex/</a:t>
+            </a:r>
+            <a:r>
+              <a:rPr lang="en" sz="1000">
+                <a:solidFill>
+                  <a:schemeClr val="dk1"/>
+                </a:solidFill>
+                <a:latin typeface="Calibri"/>
+                <a:ea typeface="Calibri"/>
+                <a:cs typeface="Calibri"/>
+                <a:sym typeface="Calibri"/>
+              </a:rPr>
+              <a:t> </a:t>
+            </a:r>
+            <a:endParaRPr sz="1000">
+              <a:solidFill>
+                <a:schemeClr val="dk1"/>
+              </a:solidFill>
+              <a:latin typeface="Calibri"/>
+              <a:ea typeface="Calibri"/>
+              <a:cs typeface="Calibri"/>
+              <a:sym typeface="Calibri"/>
+            </a:endParaRPr>
+          </a:p>
+        </p:txBody>
+      </p:sp>
+      <p:sp>
+        <p:nvSpPr>
+          <p:cNvPr id="191" name="Google Shape;191;p27"/>
+          <p:cNvSpPr txBox="1"/>
+          <p:nvPr/>
+        </p:nvSpPr>
+        <p:spPr>
+          <a:xfrm>
+            <a:off x="78050" y="1928864"/>
+            <a:ext cx="4392000" cy="726600"/>
+          </a:xfrm>
+          <a:prstGeom prst="rect">
+            <a:avLst/>
+          </a:prstGeom>
+          <a:solidFill>
+            <a:srgbClr val="FFF2CC"/>
+          </a:solidFill>
+          <a:ln w="9525" cap="flat" cmpd="sng">
+            <a:solidFill>
+              <a:srgbClr val="FF0000"/>
+            </a:solidFill>
+            <a:prstDash val="solid"/>
+            <a:round/>
+            <a:headEnd type="none" w="sm" len="sm"/>
+            <a:tailEnd type="none" w="sm" len="sm"/>
+          </a:ln>
+        </p:spPr>
+        <p:txBody>
+          <a:bodyPr spcFirstLastPara="1" wrap="square" lIns="9125" tIns="9125" rIns="9125" bIns="9125" anchor="t" anchorCtr="0">
+            <a:spAutoFit/>
+          </a:bodyPr>
+          <a:lstStyle/>
+          <a:p>
+            <a:pPr marL="0" lvl="0" indent="0" algn="l" rtl="0">
+              <a:spcBef>
+                <a:spcPts val="0"/>
+              </a:spcBef>
+              <a:spcAft>
+                <a:spcPts val="0"/>
+              </a:spcAft>
+              <a:buClr>
+                <a:schemeClr val="dk1"/>
+              </a:buClr>
+              <a:buSzPts val="1100"/>
+              <a:buFont typeface="Arial"/>
+              <a:buNone/>
+            </a:pPr>
+            <a:r>
+              <a:rPr lang="en" sz="1300">
+                <a:solidFill>
+                  <a:schemeClr val="dk1"/>
+                </a:solidFill>
+                <a:latin typeface="Calibri"/>
+                <a:ea typeface="Calibri"/>
+                <a:cs typeface="Calibri"/>
+                <a:sym typeface="Calibri"/>
+              </a:rPr>
+              <a:t>Paris-based Mistral AI is raising up to $600 Mln at $6 Bln valuation - x3 times its valuation in December.</a:t>
+            </a:r>
+            <a:endParaRPr sz="1300">
+              <a:solidFill>
+                <a:schemeClr val="dk1"/>
+              </a:solidFill>
+              <a:latin typeface="Calibri"/>
+              <a:ea typeface="Calibri"/>
+              <a:cs typeface="Calibri"/>
+              <a:sym typeface="Calibri"/>
+            </a:endParaRPr>
+          </a:p>
+          <a:p>
+            <a:pPr marL="0" lvl="0" indent="0" algn="l" rtl="0">
+              <a:spcBef>
+                <a:spcPts val="0"/>
+              </a:spcBef>
+              <a:spcAft>
+                <a:spcPts val="0"/>
+              </a:spcAft>
+              <a:buClr>
+                <a:schemeClr val="dk1"/>
+              </a:buClr>
+              <a:buSzPts val="1100"/>
+              <a:buFont typeface="Arial"/>
+              <a:buNone/>
+            </a:pPr>
+            <a:r>
+              <a:rPr lang="en" sz="1000" u="sng">
+                <a:solidFill>
+                  <a:schemeClr val="hlink"/>
+                </a:solidFill>
+                <a:latin typeface="Calibri"/>
+                <a:ea typeface="Calibri"/>
+                <a:cs typeface="Calibri"/>
+                <a:sym typeface="Calibri"/>
+                <a:hlinkClick r:id="rId5"/>
+              </a:rPr>
+              <a:t>https://techcrunch.com/2024/05/09/sources-mistral-ai-raising-at-a-6b-valuation-softbank-not-in-but-dst-is/</a:t>
+            </a:r>
+            <a:r>
+              <a:rPr lang="en" sz="1000">
+                <a:solidFill>
+                  <a:schemeClr val="dk1"/>
+                </a:solidFill>
+                <a:latin typeface="Calibri"/>
+                <a:ea typeface="Calibri"/>
+                <a:cs typeface="Calibri"/>
+                <a:sym typeface="Calibri"/>
+              </a:rPr>
+              <a:t> </a:t>
+            </a:r>
+            <a:endParaRPr sz="1000">
+              <a:solidFill>
+                <a:schemeClr val="dk1"/>
+              </a:solidFill>
+              <a:latin typeface="Calibri"/>
+              <a:ea typeface="Calibri"/>
+              <a:cs typeface="Calibri"/>
+              <a:sym typeface="Calibri"/>
+            </a:endParaRPr>
+          </a:p>
+        </p:txBody>
+      </p:sp>
+    </p:spTree>
+  </p:cSld>
+  <p:clrMapOvr>
+    <a:masterClrMapping/>
+  </p:clrMapOvr>
+</p:sld>
+</file>
+
+<file path=ppt/slides/slide15.xml><?xml version="1.0" encoding="utf-8"?>
+<p:sld xmlns:a="http://schemas.openxmlformats.org/drawingml/2006/main" xmlns:r="http://schemas.openxmlformats.org/officeDocument/2006/relationships" xmlns:p="http://schemas.openxmlformats.org/presentationml/2006/main">
+  <p:cSld>
+    <p:spTree>
+      <p:nvGrpSpPr>
+        <p:cNvPr id="1" name="Shape 195"/>
+        <p:cNvGrpSpPr/>
+        <p:nvPr/>
+      </p:nvGrpSpPr>
+      <p:grpSpPr>
+        <a:xfrm>
+          <a:off x="0" y="0"/>
+          <a:ext cx="0" cy="0"/>
+          <a:chOff x="0" y="0"/>
+          <a:chExt cx="0" cy="0"/>
+        </a:xfrm>
+      </p:grpSpPr>
+      <p:sp>
+        <p:nvSpPr>
+          <p:cNvPr id="196" name="Google Shape;196;p28"/>
+          <p:cNvSpPr txBox="1"/>
+          <p:nvPr/>
+        </p:nvSpPr>
+        <p:spPr>
+          <a:xfrm>
             <a:off x="5650240" y="55346"/>
             <a:ext cx="1550400" cy="526500"/>
           </a:xfrm>
@@ -16035,7 +15937,7 @@
       </p:sp>
       <p:sp>
         <p:nvSpPr>
-          <p:cNvPr id="189" name="Google Shape;189;p27"/>
+          <p:cNvPr id="197" name="Google Shape;197;p28"/>
           <p:cNvSpPr txBox="1"/>
           <p:nvPr/>
         </p:nvSpPr>
@@ -16149,7 +16051,7 @@
       </p:sp>
       <p:sp>
         <p:nvSpPr>
-          <p:cNvPr id="190" name="Google Shape;190;p27"/>
+          <p:cNvPr id="198" name="Google Shape;198;p28"/>
           <p:cNvSpPr txBox="1"/>
           <p:nvPr/>
         </p:nvSpPr>
@@ -16215,7 +16117,7 @@
       </p:sp>
       <p:sp>
         <p:nvSpPr>
-          <p:cNvPr id="191" name="Google Shape;191;p27"/>
+          <p:cNvPr id="199" name="Google Shape;199;p28"/>
           <p:cNvSpPr txBox="1"/>
           <p:nvPr/>
         </p:nvSpPr>
@@ -16306,7 +16208,7 @@
       </p:sp>
       <p:sp>
         <p:nvSpPr>
-          <p:cNvPr id="192" name="Google Shape;192;p27"/>
+          <p:cNvPr id="200" name="Google Shape;200;p28"/>
           <p:cNvSpPr txBox="1"/>
           <p:nvPr/>
         </p:nvSpPr>
@@ -16380,7 +16282,7 @@
       </p:sp>
       <p:pic>
         <p:nvPicPr>
-          <p:cNvPr id="193" name="Google Shape;193;p27"/>
+          <p:cNvPr id="201" name="Google Shape;201;p28"/>
           <p:cNvPicPr preferRelativeResize="0"/>
           <p:nvPr/>
         </p:nvPicPr>
@@ -16413,7 +16315,7 @@
       </p:pic>
       <p:pic>
         <p:nvPicPr>
-          <p:cNvPr id="194" name="Google Shape;194;p27"/>
+          <p:cNvPr id="202" name="Google Shape;202;p28"/>
           <p:cNvPicPr preferRelativeResize="0"/>
           <p:nvPr/>
         </p:nvPicPr>
@@ -16446,7 +16348,7 @@
       </p:pic>
       <p:pic>
         <p:nvPicPr>
-          <p:cNvPr id="195" name="Google Shape;195;p27"/>
+          <p:cNvPr id="203" name="Google Shape;203;p28"/>
           <p:cNvPicPr preferRelativeResize="0"/>
           <p:nvPr/>
         </p:nvPicPr>
@@ -16479,7 +16381,7 @@
       </p:pic>
       <p:pic>
         <p:nvPicPr>
-          <p:cNvPr id="196" name="Google Shape;196;p27"/>
+          <p:cNvPr id="204" name="Google Shape;204;p28"/>
           <p:cNvPicPr preferRelativeResize="0"/>
           <p:nvPr/>
         </p:nvPicPr>
@@ -16512,7 +16414,7 @@
       </p:pic>
       <p:sp>
         <p:nvSpPr>
-          <p:cNvPr id="197" name="Google Shape;197;p27"/>
+          <p:cNvPr id="205" name="Google Shape;205;p28"/>
           <p:cNvSpPr/>
           <p:nvPr/>
         </p:nvSpPr>
@@ -16558,7 +16460,7 @@
       </p:sp>
       <p:sp>
         <p:nvSpPr>
-          <p:cNvPr id="198" name="Google Shape;198;p27"/>
+          <p:cNvPr id="206" name="Google Shape;206;p28"/>
           <p:cNvSpPr/>
           <p:nvPr/>
         </p:nvSpPr>
@@ -16604,7 +16506,7 @@
       </p:sp>
       <p:sp>
         <p:nvSpPr>
-          <p:cNvPr id="199" name="Google Shape;199;p27"/>
+          <p:cNvPr id="207" name="Google Shape;207;p28"/>
           <p:cNvSpPr/>
           <p:nvPr/>
         </p:nvSpPr>
@@ -16656,12 +16558,12 @@
 </p:sld>
 </file>
 
-<file path=ppt/slides/slide15.xml><?xml version="1.0" encoding="utf-8"?>
+<file path=ppt/slides/slide16.xml><?xml version="1.0" encoding="utf-8"?>
 <p:sld xmlns:a="http://schemas.openxmlformats.org/drawingml/2006/main" xmlns:r="http://schemas.openxmlformats.org/officeDocument/2006/relationships" xmlns:p="http://schemas.openxmlformats.org/presentationml/2006/main">
   <p:cSld>
     <p:spTree>
       <p:nvGrpSpPr>
-        <p:cNvPr id="1" name="Shape 203"/>
+        <p:cNvPr id="1" name="Shape 211"/>
         <p:cNvGrpSpPr/>
         <p:nvPr/>
       </p:nvGrpSpPr>
@@ -16675,7 +16577,7 @@
       </p:grpSpPr>
       <p:pic>
         <p:nvPicPr>
-          <p:cNvPr id="204" name="Google Shape;204;p28"/>
+          <p:cNvPr id="212" name="Google Shape;212;p29"/>
           <p:cNvPicPr preferRelativeResize="0"/>
           <p:nvPr/>
         </p:nvPicPr>
@@ -16708,7 +16610,7 @@
       </p:pic>
       <p:sp>
         <p:nvSpPr>
-          <p:cNvPr id="205" name="Google Shape;205;p28"/>
+          <p:cNvPr id="213" name="Google Shape;213;p29"/>
           <p:cNvSpPr txBox="1"/>
           <p:nvPr/>
         </p:nvSpPr>
@@ -16798,7 +16700,7 @@
       </p:sp>
       <p:sp>
         <p:nvSpPr>
-          <p:cNvPr id="206" name="Google Shape;206;p28"/>
+          <p:cNvPr id="214" name="Google Shape;214;p29"/>
           <p:cNvSpPr txBox="1"/>
           <p:nvPr/>
         </p:nvSpPr>
@@ -16889,7 +16791,7 @@
       </p:sp>
       <p:sp>
         <p:nvSpPr>
-          <p:cNvPr id="207" name="Google Shape;207;p28"/>
+          <p:cNvPr id="215" name="Google Shape;215;p29"/>
           <p:cNvSpPr txBox="1"/>
           <p:nvPr/>
         </p:nvSpPr>
@@ -17061,7 +16963,7 @@
       </p:sp>
       <p:sp>
         <p:nvSpPr>
-          <p:cNvPr id="208" name="Google Shape;208;p28"/>
+          <p:cNvPr id="216" name="Google Shape;216;p29"/>
           <p:cNvSpPr/>
           <p:nvPr/>
         </p:nvSpPr>
@@ -17105,7 +17007,7 @@
       </p:sp>
       <p:sp>
         <p:nvSpPr>
-          <p:cNvPr id="209" name="Google Shape;209;p28"/>
+          <p:cNvPr id="217" name="Google Shape;217;p29"/>
           <p:cNvSpPr/>
           <p:nvPr/>
         </p:nvSpPr>
@@ -17155,12 +17057,12 @@
 </p:sld>
 </file>
 
-<file path=ppt/slides/slide16.xml><?xml version="1.0" encoding="utf-8"?>
+<file path=ppt/slides/slide17.xml><?xml version="1.0" encoding="utf-8"?>
 <p:sld xmlns:a="http://schemas.openxmlformats.org/drawingml/2006/main" xmlns:r="http://schemas.openxmlformats.org/officeDocument/2006/relationships" xmlns:p="http://schemas.openxmlformats.org/presentationml/2006/main">
   <p:cSld>
     <p:spTree>
       <p:nvGrpSpPr>
-        <p:cNvPr id="1" name="Shape 213"/>
+        <p:cNvPr id="1" name="Shape 221"/>
         <p:cNvGrpSpPr/>
         <p:nvPr/>
       </p:nvGrpSpPr>
@@ -17174,7 +17076,7 @@
       </p:grpSpPr>
       <p:pic>
         <p:nvPicPr>
-          <p:cNvPr id="214" name="Google Shape;214;p29"/>
+          <p:cNvPr id="222" name="Google Shape;222;p30"/>
           <p:cNvPicPr preferRelativeResize="0"/>
           <p:nvPr/>
         </p:nvPicPr>
@@ -17201,7 +17103,7 @@
       </p:pic>
       <p:sp>
         <p:nvSpPr>
-          <p:cNvPr id="215" name="Google Shape;215;p29"/>
+          <p:cNvPr id="223" name="Google Shape;223;p30"/>
           <p:cNvSpPr txBox="1"/>
           <p:nvPr/>
         </p:nvSpPr>
@@ -17267,7 +17169,7 @@
       </p:sp>
       <p:sp>
         <p:nvSpPr>
-          <p:cNvPr id="216" name="Google Shape;216;p29"/>
+          <p:cNvPr id="224" name="Google Shape;224;p30"/>
           <p:cNvSpPr txBox="1"/>
           <p:nvPr/>
         </p:nvSpPr>
@@ -17697,7 +17599,7 @@
       </p:sp>
       <p:pic>
         <p:nvPicPr>
-          <p:cNvPr id="217" name="Google Shape;217;p29"/>
+          <p:cNvPr id="225" name="Google Shape;225;p30"/>
           <p:cNvPicPr preferRelativeResize="0"/>
           <p:nvPr/>
         </p:nvPicPr>
@@ -17729,7 +17631,7 @@
       </p:pic>
       <p:sp>
         <p:nvSpPr>
-          <p:cNvPr id="218" name="Google Shape;218;p29"/>
+          <p:cNvPr id="226" name="Google Shape;226;p30"/>
           <p:cNvSpPr txBox="1"/>
           <p:nvPr/>
         </p:nvSpPr>
@@ -17808,7 +17710,7 @@
       </p:sp>
       <p:sp>
         <p:nvSpPr>
-          <p:cNvPr id="219" name="Google Shape;219;p29"/>
+          <p:cNvPr id="227" name="Google Shape;227;p30"/>
           <p:cNvSpPr txBox="1"/>
           <p:nvPr/>
         </p:nvSpPr>
@@ -17880,12 +17782,12 @@
 </p:sld>
 </file>
 
-<file path=ppt/slides/slide17.xml><?xml version="1.0" encoding="utf-8"?>
+<file path=ppt/slides/slide18.xml><?xml version="1.0" encoding="utf-8"?>
 <p:sld xmlns:a="http://schemas.openxmlformats.org/drawingml/2006/main" xmlns:r="http://schemas.openxmlformats.org/officeDocument/2006/relationships" xmlns:p="http://schemas.openxmlformats.org/presentationml/2006/main">
   <p:cSld>
     <p:spTree>
       <p:nvGrpSpPr>
-        <p:cNvPr id="1" name="Shape 223"/>
+        <p:cNvPr id="1" name="Shape 231"/>
         <p:cNvGrpSpPr/>
         <p:nvPr/>
       </p:nvGrpSpPr>
@@ -17899,7 +17801,7 @@
       </p:grpSpPr>
       <p:sp>
         <p:nvSpPr>
-          <p:cNvPr id="224" name="Google Shape;224;p30"/>
+          <p:cNvPr id="232" name="Google Shape;232;p31"/>
           <p:cNvSpPr txBox="1"/>
           <p:nvPr/>
         </p:nvSpPr>
@@ -17997,6 +17899,518 @@
         <p:spPr>
           <a:xfrm>
             <a:off x="128210" y="1432625"/>
+            <a:ext cx="4420200" cy="2955300"/>
+          </a:xfrm>
+          <a:prstGeom prst="rect">
+            <a:avLst/>
+          </a:prstGeom>
+          <a:noFill/>
+          <a:ln w="9525" cap="flat" cmpd="sng">
+            <a:solidFill>
+              <a:srgbClr val="FF0000"/>
+            </a:solidFill>
+            <a:prstDash val="solid"/>
+            <a:round/>
+            <a:headEnd type="none" w="sm" len="sm"/>
+            <a:tailEnd type="none" w="sm" len="sm"/>
+          </a:ln>
+        </p:spPr>
+        <p:txBody>
+          <a:bodyPr spcFirstLastPara="1" wrap="square" lIns="91425" tIns="91425" rIns="91425" bIns="91425" anchor="t" anchorCtr="0">
+            <a:spAutoFit/>
+          </a:bodyPr>
+          <a:lstStyle/>
+          <a:p>
+            <a:pPr marL="228600" marR="0" lvl="0" indent="-209550" algn="l" rtl="0">
+              <a:lnSpc>
+                <a:spcPct val="100000"/>
+              </a:lnSpc>
+              <a:spcBef>
+                <a:spcPts val="0"/>
+              </a:spcBef>
+              <a:spcAft>
+                <a:spcPts val="0"/>
+              </a:spcAft>
+              <a:buClr>
+                <a:srgbClr val="3C78D8"/>
+              </a:buClr>
+              <a:buSzPts val="1500"/>
+              <a:buFont typeface="Calibri"/>
+              <a:buChar char="●"/>
+            </a:pPr>
+            <a:r>
+              <a:rPr lang="en" sz="1500" b="1">
+                <a:solidFill>
+                  <a:srgbClr val="3C78D8"/>
+                </a:solidFill>
+                <a:latin typeface="Calibri"/>
+                <a:ea typeface="Calibri"/>
+                <a:cs typeface="Calibri"/>
+                <a:sym typeface="Calibri"/>
+              </a:rPr>
+              <a:t>Apple M4 Chip - Available in iPad Pro on May 15</a:t>
+            </a:r>
+            <a:endParaRPr sz="1500" b="1">
+              <a:solidFill>
+                <a:srgbClr val="3C78D8"/>
+              </a:solidFill>
+              <a:latin typeface="Calibri"/>
+              <a:ea typeface="Calibri"/>
+              <a:cs typeface="Calibri"/>
+              <a:sym typeface="Calibri"/>
+            </a:endParaRPr>
+          </a:p>
+          <a:p>
+            <a:pPr marL="228600" marR="0" lvl="0" indent="-209550" algn="l" rtl="0">
+              <a:lnSpc>
+                <a:spcPct val="100000"/>
+              </a:lnSpc>
+              <a:spcBef>
+                <a:spcPts val="0"/>
+              </a:spcBef>
+              <a:spcAft>
+                <a:spcPts val="0"/>
+              </a:spcAft>
+              <a:buClr>
+                <a:srgbClr val="3C78D8"/>
+              </a:buClr>
+              <a:buSzPts val="1500"/>
+              <a:buFont typeface="Calibri"/>
+              <a:buChar char="●"/>
+            </a:pPr>
+            <a:r>
+              <a:rPr lang="en" sz="1500" b="1">
+                <a:solidFill>
+                  <a:srgbClr val="3C78D8"/>
+                </a:solidFill>
+                <a:latin typeface="Calibri"/>
+                <a:ea typeface="Calibri"/>
+                <a:cs typeface="Calibri"/>
+                <a:sym typeface="Calibri"/>
+              </a:rPr>
+              <a:t>Microsoft MAI-1</a:t>
+            </a:r>
+            <a:endParaRPr sz="1500" b="1">
+              <a:solidFill>
+                <a:srgbClr val="3C78D8"/>
+              </a:solidFill>
+              <a:latin typeface="Calibri"/>
+              <a:ea typeface="Calibri"/>
+              <a:cs typeface="Calibri"/>
+              <a:sym typeface="Calibri"/>
+            </a:endParaRPr>
+          </a:p>
+          <a:p>
+            <a:pPr marL="228600" marR="0" lvl="0" indent="-209550" algn="l" rtl="0">
+              <a:lnSpc>
+                <a:spcPct val="100000"/>
+              </a:lnSpc>
+              <a:spcBef>
+                <a:spcPts val="0"/>
+              </a:spcBef>
+              <a:spcAft>
+                <a:spcPts val="0"/>
+              </a:spcAft>
+              <a:buClr>
+                <a:srgbClr val="3C78D8"/>
+              </a:buClr>
+              <a:buSzPts val="1500"/>
+              <a:buFont typeface="Calibri"/>
+              <a:buChar char="●"/>
+            </a:pPr>
+            <a:r>
+              <a:rPr lang="en" sz="1500" b="1">
+                <a:solidFill>
+                  <a:srgbClr val="3C78D8"/>
+                </a:solidFill>
+                <a:latin typeface="Calibri"/>
+                <a:ea typeface="Calibri"/>
+                <a:cs typeface="Calibri"/>
+                <a:sym typeface="Calibri"/>
+              </a:rPr>
+              <a:t>AI-enabled Web Search</a:t>
+            </a:r>
+            <a:endParaRPr sz="1500" b="1">
+              <a:solidFill>
+                <a:srgbClr val="3C78D8"/>
+              </a:solidFill>
+              <a:latin typeface="Calibri"/>
+              <a:ea typeface="Calibri"/>
+              <a:cs typeface="Calibri"/>
+              <a:sym typeface="Calibri"/>
+            </a:endParaRPr>
+          </a:p>
+          <a:p>
+            <a:pPr marL="228600" marR="0" lvl="0" indent="-209550" algn="l" rtl="0">
+              <a:lnSpc>
+                <a:spcPct val="100000"/>
+              </a:lnSpc>
+              <a:spcBef>
+                <a:spcPts val="0"/>
+              </a:spcBef>
+              <a:spcAft>
+                <a:spcPts val="0"/>
+              </a:spcAft>
+              <a:buClr>
+                <a:srgbClr val="3C78D8"/>
+              </a:buClr>
+              <a:buSzPts val="1500"/>
+              <a:buFont typeface="Calibri"/>
+              <a:buChar char="●"/>
+            </a:pPr>
+            <a:r>
+              <a:rPr lang="en" sz="1500" b="1">
+                <a:solidFill>
+                  <a:srgbClr val="3C78D8"/>
+                </a:solidFill>
+                <a:latin typeface="Calibri"/>
+                <a:ea typeface="Calibri"/>
+                <a:cs typeface="Calibri"/>
+                <a:sym typeface="Calibri"/>
+              </a:rPr>
+              <a:t>DeepSeek-V2, open-source, 236B, ~GPT-4</a:t>
+            </a:r>
+            <a:endParaRPr sz="1500" b="1">
+              <a:solidFill>
+                <a:srgbClr val="3C78D8"/>
+              </a:solidFill>
+              <a:latin typeface="Calibri"/>
+              <a:ea typeface="Calibri"/>
+              <a:cs typeface="Calibri"/>
+              <a:sym typeface="Calibri"/>
+            </a:endParaRPr>
+          </a:p>
+          <a:p>
+            <a:pPr marL="228600" marR="0" lvl="0" indent="-209550" algn="l" rtl="0">
+              <a:lnSpc>
+                <a:spcPct val="100000"/>
+              </a:lnSpc>
+              <a:spcBef>
+                <a:spcPts val="0"/>
+              </a:spcBef>
+              <a:spcAft>
+                <a:spcPts val="0"/>
+              </a:spcAft>
+              <a:buClr>
+                <a:srgbClr val="3C78D8"/>
+              </a:buClr>
+              <a:buSzPts val="1500"/>
+              <a:buFont typeface="Calibri"/>
+              <a:buChar char="●"/>
+            </a:pPr>
+            <a:r>
+              <a:rPr lang="en" sz="1500" b="1">
+                <a:solidFill>
+                  <a:srgbClr val="3C78D8"/>
+                </a:solidFill>
+                <a:latin typeface="Calibri"/>
+                <a:ea typeface="Calibri"/>
+                <a:cs typeface="Calibri"/>
+                <a:sym typeface="Calibri"/>
+              </a:rPr>
+              <a:t>Large LLMs are better at "generalizing"</a:t>
+            </a:r>
+            <a:endParaRPr sz="1500" b="1">
+              <a:solidFill>
+                <a:srgbClr val="3C78D8"/>
+              </a:solidFill>
+              <a:latin typeface="Calibri"/>
+              <a:ea typeface="Calibri"/>
+              <a:cs typeface="Calibri"/>
+              <a:sym typeface="Calibri"/>
+            </a:endParaRPr>
+          </a:p>
+          <a:p>
+            <a:pPr marL="228600" marR="0" lvl="0" indent="-209550" algn="l" rtl="0">
+              <a:lnSpc>
+                <a:spcPct val="100000"/>
+              </a:lnSpc>
+              <a:spcBef>
+                <a:spcPts val="0"/>
+              </a:spcBef>
+              <a:spcAft>
+                <a:spcPts val="0"/>
+              </a:spcAft>
+              <a:buClr>
+                <a:srgbClr val="3C78D8"/>
+              </a:buClr>
+              <a:buSzPts val="1500"/>
+              <a:buFont typeface="Calibri"/>
+              <a:buChar char="●"/>
+            </a:pPr>
+            <a:r>
+              <a:rPr lang="en" sz="1500" b="1">
+                <a:solidFill>
+                  <a:srgbClr val="3C78D8"/>
+                </a:solidFill>
+                <a:latin typeface="Calibri"/>
+                <a:ea typeface="Calibri"/>
+                <a:cs typeface="Calibri"/>
+                <a:sym typeface="Calibri"/>
+              </a:rPr>
+              <a:t>Regulatory Capture</a:t>
+            </a:r>
+            <a:endParaRPr sz="1500" b="1">
+              <a:solidFill>
+                <a:srgbClr val="3C78D8"/>
+              </a:solidFill>
+              <a:latin typeface="Calibri"/>
+              <a:ea typeface="Calibri"/>
+              <a:cs typeface="Calibri"/>
+              <a:sym typeface="Calibri"/>
+            </a:endParaRPr>
+          </a:p>
+          <a:p>
+            <a:pPr marL="228600" marR="0" lvl="0" indent="-209550" algn="l" rtl="0">
+              <a:lnSpc>
+                <a:spcPct val="100000"/>
+              </a:lnSpc>
+              <a:spcBef>
+                <a:spcPts val="0"/>
+              </a:spcBef>
+              <a:spcAft>
+                <a:spcPts val="0"/>
+              </a:spcAft>
+              <a:buClr>
+                <a:srgbClr val="3C78D8"/>
+              </a:buClr>
+              <a:buSzPts val="1500"/>
+              <a:buFont typeface="Calibri"/>
+              <a:buChar char="●"/>
+            </a:pPr>
+            <a:r>
+              <a:rPr lang="en" sz="1500" b="1">
+                <a:solidFill>
+                  <a:srgbClr val="3C78D8"/>
+                </a:solidFill>
+                <a:latin typeface="Calibri"/>
+                <a:ea typeface="Calibri"/>
+                <a:cs typeface="Calibri"/>
+                <a:sym typeface="Calibri"/>
+              </a:rPr>
+              <a:t>Yoshua Bengio - Fears About the Future of AI</a:t>
+            </a:r>
+            <a:endParaRPr sz="1500" b="1">
+              <a:solidFill>
+                <a:srgbClr val="3C78D8"/>
+              </a:solidFill>
+              <a:latin typeface="Calibri"/>
+              <a:ea typeface="Calibri"/>
+              <a:cs typeface="Calibri"/>
+              <a:sym typeface="Calibri"/>
+            </a:endParaRPr>
+          </a:p>
+          <a:p>
+            <a:pPr marL="228600" marR="0" lvl="0" indent="-209550" algn="l" rtl="0">
+              <a:lnSpc>
+                <a:spcPct val="100000"/>
+              </a:lnSpc>
+              <a:spcBef>
+                <a:spcPts val="0"/>
+              </a:spcBef>
+              <a:spcAft>
+                <a:spcPts val="0"/>
+              </a:spcAft>
+              <a:buClr>
+                <a:srgbClr val="3C78D8"/>
+              </a:buClr>
+              <a:buSzPts val="1500"/>
+              <a:buFont typeface="Calibri"/>
+              <a:buChar char="●"/>
+            </a:pPr>
+            <a:r>
+              <a:rPr lang="en" sz="1500" b="1">
+                <a:solidFill>
+                  <a:srgbClr val="3C78D8"/>
+                </a:solidFill>
+                <a:latin typeface="Calibri"/>
+                <a:ea typeface="Calibri"/>
+                <a:cs typeface="Calibri"/>
+                <a:sym typeface="Calibri"/>
+              </a:rPr>
+              <a:t>My "ai" GitHub repo - LLM &amp; RAG</a:t>
+            </a:r>
+            <a:endParaRPr sz="1500" b="1">
+              <a:solidFill>
+                <a:srgbClr val="3C78D8"/>
+              </a:solidFill>
+              <a:latin typeface="Calibri"/>
+              <a:ea typeface="Calibri"/>
+              <a:cs typeface="Calibri"/>
+              <a:sym typeface="Calibri"/>
+            </a:endParaRPr>
+          </a:p>
+          <a:p>
+            <a:pPr marL="228600" marR="0" lvl="0" indent="-209550" algn="l" rtl="0">
+              <a:lnSpc>
+                <a:spcPct val="100000"/>
+              </a:lnSpc>
+              <a:spcBef>
+                <a:spcPts val="0"/>
+              </a:spcBef>
+              <a:spcAft>
+                <a:spcPts val="0"/>
+              </a:spcAft>
+              <a:buClr>
+                <a:srgbClr val="3C78D8"/>
+              </a:buClr>
+              <a:buSzPts val="1500"/>
+              <a:buFont typeface="Calibri"/>
+              <a:buChar char="●"/>
+            </a:pPr>
+            <a:r>
+              <a:rPr lang="en" sz="1500" b="1">
+                <a:solidFill>
+                  <a:srgbClr val="3C78D8"/>
+                </a:solidFill>
+                <a:latin typeface="Calibri"/>
+                <a:ea typeface="Calibri"/>
+                <a:cs typeface="Calibri"/>
+                <a:sym typeface="Calibri"/>
+              </a:rPr>
+              <a:t>Most profitable business ideas with AI</a:t>
+            </a:r>
+            <a:endParaRPr sz="1500" b="1">
+              <a:solidFill>
+                <a:srgbClr val="3C78D8"/>
+              </a:solidFill>
+              <a:latin typeface="Calibri"/>
+              <a:ea typeface="Calibri"/>
+              <a:cs typeface="Calibri"/>
+              <a:sym typeface="Calibri"/>
+            </a:endParaRPr>
+          </a:p>
+          <a:p>
+            <a:pPr marL="228600" marR="0" lvl="0" indent="-209550" algn="l" rtl="0">
+              <a:lnSpc>
+                <a:spcPct val="100000"/>
+              </a:lnSpc>
+              <a:spcBef>
+                <a:spcPts val="0"/>
+              </a:spcBef>
+              <a:spcAft>
+                <a:spcPts val="0"/>
+              </a:spcAft>
+              <a:buClr>
+                <a:srgbClr val="3C78D8"/>
+              </a:buClr>
+              <a:buSzPts val="1500"/>
+              <a:buFont typeface="Calibri"/>
+              <a:buChar char="●"/>
+            </a:pPr>
+            <a:r>
+              <a:rPr lang="en" sz="1500" b="1">
+                <a:solidFill>
+                  <a:srgbClr val="3C78D8"/>
+                </a:solidFill>
+                <a:latin typeface="Calibri"/>
+                <a:ea typeface="Calibri"/>
+                <a:cs typeface="Calibri"/>
+                <a:sym typeface="Calibri"/>
+              </a:rPr>
+              <a:t>Information Overload</a:t>
+            </a:r>
+            <a:endParaRPr sz="1500" b="1">
+              <a:solidFill>
+                <a:srgbClr val="3C78D8"/>
+              </a:solidFill>
+              <a:latin typeface="Calibri"/>
+              <a:ea typeface="Calibri"/>
+              <a:cs typeface="Calibri"/>
+              <a:sym typeface="Calibri"/>
+            </a:endParaRPr>
+          </a:p>
+          <a:p>
+            <a:pPr marL="228600" marR="0" lvl="0" indent="-209550" algn="l" rtl="0">
+              <a:lnSpc>
+                <a:spcPct val="100000"/>
+              </a:lnSpc>
+              <a:spcBef>
+                <a:spcPts val="0"/>
+              </a:spcBef>
+              <a:spcAft>
+                <a:spcPts val="0"/>
+              </a:spcAft>
+              <a:buClr>
+                <a:srgbClr val="3C78D8"/>
+              </a:buClr>
+              <a:buSzPts val="1500"/>
+              <a:buFont typeface="Calibri"/>
+              <a:buChar char="●"/>
+            </a:pPr>
+            <a:r>
+              <a:rPr lang="en" sz="1500" b="1">
+                <a:solidFill>
+                  <a:srgbClr val="3C78D8"/>
+                </a:solidFill>
+                <a:latin typeface="Calibri"/>
+                <a:ea typeface="Calibri"/>
+                <a:cs typeface="Calibri"/>
+                <a:sym typeface="Calibri"/>
+              </a:rPr>
+              <a:t>Selling Information Stopped Working</a:t>
+            </a:r>
+            <a:endParaRPr sz="1500" b="1">
+              <a:solidFill>
+                <a:srgbClr val="3C78D8"/>
+              </a:solidFill>
+              <a:latin typeface="Calibri"/>
+              <a:ea typeface="Calibri"/>
+              <a:cs typeface="Calibri"/>
+              <a:sym typeface="Calibri"/>
+            </a:endParaRPr>
+          </a:p>
+          <a:p>
+            <a:pPr marL="228600" marR="0" lvl="0" indent="-209550" algn="l" rtl="0">
+              <a:lnSpc>
+                <a:spcPct val="100000"/>
+              </a:lnSpc>
+              <a:spcBef>
+                <a:spcPts val="0"/>
+              </a:spcBef>
+              <a:spcAft>
+                <a:spcPts val="0"/>
+              </a:spcAft>
+              <a:buClr>
+                <a:srgbClr val="3C78D8"/>
+              </a:buClr>
+              <a:buSzPts val="1500"/>
+              <a:buFont typeface="Calibri"/>
+              <a:buChar char="●"/>
+            </a:pPr>
+            <a:r>
+              <a:rPr lang="en" sz="1500" b="1">
+                <a:solidFill>
+                  <a:srgbClr val="3C78D8"/>
+                </a:solidFill>
+                <a:latin typeface="Calibri"/>
+                <a:ea typeface="Calibri"/>
+                <a:cs typeface="Calibri"/>
+                <a:sym typeface="Calibri"/>
+              </a:rPr>
+              <a:t>OpenAI will use Stack Overflow's OverflowAPI </a:t>
+            </a:r>
+            <a:endParaRPr sz="1500" b="1">
+              <a:solidFill>
+                <a:srgbClr val="3C78D8"/>
+              </a:solidFill>
+              <a:latin typeface="Calibri"/>
+              <a:ea typeface="Calibri"/>
+              <a:cs typeface="Calibri"/>
+              <a:sym typeface="Calibri"/>
+            </a:endParaRPr>
+          </a:p>
+        </p:txBody>
+      </p:sp>
+      <p:sp>
+        <p:nvSpPr>
+          <p:cNvPr id="70" name="Google Shape;70;p15"/>
+          <p:cNvSpPr txBox="1"/>
+          <p:nvPr/>
+        </p:nvSpPr>
+        <p:spPr>
+          <a:xfrm>
+            <a:off x="4641310" y="1438919"/>
             <a:ext cx="4420200" cy="2724300"/>
           </a:xfrm>
           <a:prstGeom prst="rect">
@@ -18046,7 +18460,7 @@
                 <a:cs typeface="Calibri"/>
                 <a:sym typeface="Calibri"/>
               </a:rPr>
-              <a:t>Apple M4 Chip - Available in iPad Pro on May 15</a:t>
+              <a:t>Warren Buffett warns about AI scamming</a:t>
             </a:r>
             <a:endParaRPr sz="1500" b="1">
               <a:solidFill>
@@ -18086,7 +18500,7 @@
                 <a:cs typeface="Calibri"/>
                 <a:sym typeface="Calibri"/>
               </a:rPr>
-              <a:t>Microsoft MAI-1</a:t>
+              <a:t>X.ai Grok + X.com - merge live news with social media commentary</a:t>
             </a:r>
             <a:endParaRPr sz="1500" b="1">
               <a:solidFill>
@@ -18126,7 +18540,7 @@
                 <a:cs typeface="Calibri"/>
                 <a:sym typeface="Calibri"/>
               </a:rPr>
-              <a:t>AI-enabled Web Search</a:t>
+              <a:t>ScrapeGraphAI - web scraping using AI</a:t>
             </a:r>
             <a:endParaRPr sz="1500" b="1">
               <a:solidFill>
@@ -18166,7 +18580,7 @@
                 <a:cs typeface="Calibri"/>
                 <a:sym typeface="Calibri"/>
               </a:rPr>
-              <a:t>Large LLMs are better at "generalizing"</a:t>
+              <a:t>DocRes - Document Image Restoration</a:t>
             </a:r>
             <a:endParaRPr sz="1500" b="1">
               <a:solidFill>
@@ -18206,519 +18620,7 @@
                 <a:cs typeface="Calibri"/>
                 <a:sym typeface="Calibri"/>
               </a:rPr>
-              <a:t>Regulatory Capture</a:t>
-            </a:r>
-            <a:endParaRPr sz="1500" b="1">
-              <a:solidFill>
-                <a:srgbClr val="3C78D8"/>
-              </a:solidFill>
-              <a:latin typeface="Calibri"/>
-              <a:ea typeface="Calibri"/>
-              <a:cs typeface="Calibri"/>
-              <a:sym typeface="Calibri"/>
-            </a:endParaRPr>
-          </a:p>
-          <a:p>
-            <a:pPr marL="228600" marR="0" lvl="0" indent="-209550" algn="l" rtl="0">
-              <a:lnSpc>
-                <a:spcPct val="100000"/>
-              </a:lnSpc>
-              <a:spcBef>
-                <a:spcPts val="0"/>
-              </a:spcBef>
-              <a:spcAft>
-                <a:spcPts val="0"/>
-              </a:spcAft>
-              <a:buClr>
-                <a:srgbClr val="3C78D8"/>
-              </a:buClr>
-              <a:buSzPts val="1500"/>
-              <a:buFont typeface="Calibri"/>
-              <a:buChar char="●"/>
-            </a:pPr>
-            <a:r>
-              <a:rPr lang="en" sz="1500" b="1">
-                <a:solidFill>
-                  <a:srgbClr val="3C78D8"/>
-                </a:solidFill>
-                <a:latin typeface="Calibri"/>
-                <a:ea typeface="Calibri"/>
-                <a:cs typeface="Calibri"/>
-                <a:sym typeface="Calibri"/>
-              </a:rPr>
-              <a:t>Yoshua Bengio - Fears About the Future of AI</a:t>
-            </a:r>
-            <a:endParaRPr sz="1500" b="1">
-              <a:solidFill>
-                <a:srgbClr val="3C78D8"/>
-              </a:solidFill>
-              <a:latin typeface="Calibri"/>
-              <a:ea typeface="Calibri"/>
-              <a:cs typeface="Calibri"/>
-              <a:sym typeface="Calibri"/>
-            </a:endParaRPr>
-          </a:p>
-          <a:p>
-            <a:pPr marL="228600" marR="0" lvl="0" indent="-209550" algn="l" rtl="0">
-              <a:lnSpc>
-                <a:spcPct val="100000"/>
-              </a:lnSpc>
-              <a:spcBef>
-                <a:spcPts val="0"/>
-              </a:spcBef>
-              <a:spcAft>
-                <a:spcPts val="0"/>
-              </a:spcAft>
-              <a:buClr>
-                <a:srgbClr val="3C78D8"/>
-              </a:buClr>
-              <a:buSzPts val="1500"/>
-              <a:buFont typeface="Calibri"/>
-              <a:buChar char="●"/>
-            </a:pPr>
-            <a:r>
-              <a:rPr lang="en" sz="1500" b="1">
-                <a:solidFill>
-                  <a:srgbClr val="3C78D8"/>
-                </a:solidFill>
-                <a:latin typeface="Calibri"/>
-                <a:ea typeface="Calibri"/>
-                <a:cs typeface="Calibri"/>
-                <a:sym typeface="Calibri"/>
-              </a:rPr>
-              <a:t>My "ai" GitHub repo - LLM &amp; RAG</a:t>
-            </a:r>
-            <a:endParaRPr sz="1500" b="1">
-              <a:solidFill>
-                <a:srgbClr val="3C78D8"/>
-              </a:solidFill>
-              <a:latin typeface="Calibri"/>
-              <a:ea typeface="Calibri"/>
-              <a:cs typeface="Calibri"/>
-              <a:sym typeface="Calibri"/>
-            </a:endParaRPr>
-          </a:p>
-          <a:p>
-            <a:pPr marL="228600" marR="0" lvl="0" indent="-209550" algn="l" rtl="0">
-              <a:lnSpc>
-                <a:spcPct val="100000"/>
-              </a:lnSpc>
-              <a:spcBef>
-                <a:spcPts val="0"/>
-              </a:spcBef>
-              <a:spcAft>
-                <a:spcPts val="0"/>
-              </a:spcAft>
-              <a:buClr>
-                <a:srgbClr val="3C78D8"/>
-              </a:buClr>
-              <a:buSzPts val="1500"/>
-              <a:buFont typeface="Calibri"/>
-              <a:buChar char="●"/>
-            </a:pPr>
-            <a:r>
-              <a:rPr lang="en" sz="1500" b="1">
-                <a:solidFill>
-                  <a:srgbClr val="3C78D8"/>
-                </a:solidFill>
-                <a:latin typeface="Calibri"/>
-                <a:ea typeface="Calibri"/>
-                <a:cs typeface="Calibri"/>
-                <a:sym typeface="Calibri"/>
-              </a:rPr>
-              <a:t>Most profitable business ideas with AI</a:t>
-            </a:r>
-            <a:endParaRPr sz="1500" b="1">
-              <a:solidFill>
-                <a:srgbClr val="3C78D8"/>
-              </a:solidFill>
-              <a:latin typeface="Calibri"/>
-              <a:ea typeface="Calibri"/>
-              <a:cs typeface="Calibri"/>
-              <a:sym typeface="Calibri"/>
-            </a:endParaRPr>
-          </a:p>
-          <a:p>
-            <a:pPr marL="228600" marR="0" lvl="0" indent="-209550" algn="l" rtl="0">
-              <a:lnSpc>
-                <a:spcPct val="100000"/>
-              </a:lnSpc>
-              <a:spcBef>
-                <a:spcPts val="0"/>
-              </a:spcBef>
-              <a:spcAft>
-                <a:spcPts val="0"/>
-              </a:spcAft>
-              <a:buClr>
-                <a:srgbClr val="3C78D8"/>
-              </a:buClr>
-              <a:buSzPts val="1500"/>
-              <a:buFont typeface="Calibri"/>
-              <a:buChar char="●"/>
-            </a:pPr>
-            <a:r>
-              <a:rPr lang="en" sz="1500" b="1">
-                <a:solidFill>
-                  <a:srgbClr val="3C78D8"/>
-                </a:solidFill>
-                <a:latin typeface="Calibri"/>
-                <a:ea typeface="Calibri"/>
-                <a:cs typeface="Calibri"/>
-                <a:sym typeface="Calibri"/>
-              </a:rPr>
-              <a:t>Information Overload</a:t>
-            </a:r>
-            <a:endParaRPr sz="1500" b="1">
-              <a:solidFill>
-                <a:srgbClr val="3C78D8"/>
-              </a:solidFill>
-              <a:latin typeface="Calibri"/>
-              <a:ea typeface="Calibri"/>
-              <a:cs typeface="Calibri"/>
-              <a:sym typeface="Calibri"/>
-            </a:endParaRPr>
-          </a:p>
-          <a:p>
-            <a:pPr marL="228600" marR="0" lvl="0" indent="-209550" algn="l" rtl="0">
-              <a:lnSpc>
-                <a:spcPct val="100000"/>
-              </a:lnSpc>
-              <a:spcBef>
-                <a:spcPts val="0"/>
-              </a:spcBef>
-              <a:spcAft>
-                <a:spcPts val="0"/>
-              </a:spcAft>
-              <a:buClr>
-                <a:srgbClr val="3C78D8"/>
-              </a:buClr>
-              <a:buSzPts val="1500"/>
-              <a:buFont typeface="Calibri"/>
-              <a:buChar char="●"/>
-            </a:pPr>
-            <a:r>
-              <a:rPr lang="en" sz="1500" b="1">
-                <a:solidFill>
-                  <a:srgbClr val="3C78D8"/>
-                </a:solidFill>
-                <a:latin typeface="Calibri"/>
-                <a:ea typeface="Calibri"/>
-                <a:cs typeface="Calibri"/>
-                <a:sym typeface="Calibri"/>
-              </a:rPr>
-              <a:t>Selling Information Stopped Working</a:t>
-            </a:r>
-            <a:endParaRPr sz="1500" b="1">
-              <a:solidFill>
-                <a:srgbClr val="3C78D8"/>
-              </a:solidFill>
-              <a:latin typeface="Calibri"/>
-              <a:ea typeface="Calibri"/>
-              <a:cs typeface="Calibri"/>
-              <a:sym typeface="Calibri"/>
-            </a:endParaRPr>
-          </a:p>
-          <a:p>
-            <a:pPr marL="228600" marR="0" lvl="0" indent="-209550" algn="l" rtl="0">
-              <a:lnSpc>
-                <a:spcPct val="100000"/>
-              </a:lnSpc>
-              <a:spcBef>
-                <a:spcPts val="0"/>
-              </a:spcBef>
-              <a:spcAft>
-                <a:spcPts val="0"/>
-              </a:spcAft>
-              <a:buClr>
-                <a:srgbClr val="3C78D8"/>
-              </a:buClr>
-              <a:buSzPts val="1500"/>
-              <a:buFont typeface="Calibri"/>
-              <a:buChar char="●"/>
-            </a:pPr>
-            <a:r>
-              <a:rPr lang="en" sz="1500" b="1">
-                <a:solidFill>
-                  <a:srgbClr val="3C78D8"/>
-                </a:solidFill>
-                <a:latin typeface="Calibri"/>
-                <a:ea typeface="Calibri"/>
-                <a:cs typeface="Calibri"/>
-                <a:sym typeface="Calibri"/>
-              </a:rPr>
-              <a:t>OpenAI will use Stack Overflow's OverflowAPI </a:t>
-            </a:r>
-            <a:endParaRPr sz="1500" b="1">
-              <a:solidFill>
-                <a:srgbClr val="3C78D8"/>
-              </a:solidFill>
-              <a:latin typeface="Calibri"/>
-              <a:ea typeface="Calibri"/>
-              <a:cs typeface="Calibri"/>
-              <a:sym typeface="Calibri"/>
-            </a:endParaRPr>
-          </a:p>
-        </p:txBody>
-      </p:sp>
-      <p:sp>
-        <p:nvSpPr>
-          <p:cNvPr id="70" name="Google Shape;70;p15"/>
-          <p:cNvSpPr txBox="1"/>
-          <p:nvPr/>
-        </p:nvSpPr>
-        <p:spPr>
-          <a:xfrm>
-            <a:off x="4641310" y="1438919"/>
-            <a:ext cx="4420200" cy="2955300"/>
-          </a:xfrm>
-          <a:prstGeom prst="rect">
-            <a:avLst/>
-          </a:prstGeom>
-          <a:noFill/>
-          <a:ln w="9525" cap="flat" cmpd="sng">
-            <a:solidFill>
-              <a:srgbClr val="FF0000"/>
-            </a:solidFill>
-            <a:prstDash val="solid"/>
-            <a:round/>
-            <a:headEnd type="none" w="sm" len="sm"/>
-            <a:tailEnd type="none" w="sm" len="sm"/>
-          </a:ln>
-        </p:spPr>
-        <p:txBody>
-          <a:bodyPr spcFirstLastPara="1" wrap="square" lIns="91425" tIns="91425" rIns="91425" bIns="91425" anchor="t" anchorCtr="0">
-            <a:spAutoFit/>
-          </a:bodyPr>
-          <a:lstStyle/>
-          <a:p>
-            <a:pPr marL="228600" marR="0" lvl="0" indent="-209550" algn="l" rtl="0">
-              <a:lnSpc>
-                <a:spcPct val="100000"/>
-              </a:lnSpc>
-              <a:spcBef>
-                <a:spcPts val="0"/>
-              </a:spcBef>
-              <a:spcAft>
-                <a:spcPts val="0"/>
-              </a:spcAft>
-              <a:buClr>
-                <a:srgbClr val="3C78D8"/>
-              </a:buClr>
-              <a:buSzPts val="1500"/>
-              <a:buFont typeface="Calibri"/>
-              <a:buChar char="●"/>
-            </a:pPr>
-            <a:r>
-              <a:rPr lang="en" sz="1500" b="1">
-                <a:solidFill>
-                  <a:srgbClr val="3C78D8"/>
-                </a:solidFill>
-                <a:latin typeface="Calibri"/>
-                <a:ea typeface="Calibri"/>
-                <a:cs typeface="Calibri"/>
-                <a:sym typeface="Calibri"/>
-              </a:rPr>
-              <a:t>Warren Buffett warns about AI scamming</a:t>
-            </a:r>
-            <a:endParaRPr sz="1500" b="1">
-              <a:solidFill>
-                <a:srgbClr val="3C78D8"/>
-              </a:solidFill>
-              <a:latin typeface="Calibri"/>
-              <a:ea typeface="Calibri"/>
-              <a:cs typeface="Calibri"/>
-              <a:sym typeface="Calibri"/>
-            </a:endParaRPr>
-          </a:p>
-          <a:p>
-            <a:pPr marL="228600" marR="0" lvl="0" indent="-209550" algn="l" rtl="0">
-              <a:lnSpc>
-                <a:spcPct val="100000"/>
-              </a:lnSpc>
-              <a:spcBef>
-                <a:spcPts val="0"/>
-              </a:spcBef>
-              <a:spcAft>
-                <a:spcPts val="0"/>
-              </a:spcAft>
-              <a:buClr>
-                <a:srgbClr val="3C78D8"/>
-              </a:buClr>
-              <a:buSzPts val="1500"/>
-              <a:buFont typeface="Calibri"/>
-              <a:buChar char="●"/>
-            </a:pPr>
-            <a:r>
-              <a:rPr lang="en" sz="1500" b="1">
-                <a:solidFill>
-                  <a:srgbClr val="3C78D8"/>
-                </a:solidFill>
-                <a:latin typeface="Calibri"/>
-                <a:ea typeface="Calibri"/>
-                <a:cs typeface="Calibri"/>
-                <a:sym typeface="Calibri"/>
-              </a:rPr>
-              <a:t>X.ai Grok + X.com - merge live news with social media commentary</a:t>
-            </a:r>
-            <a:endParaRPr sz="1500" b="1">
-              <a:solidFill>
-                <a:srgbClr val="3C78D8"/>
-              </a:solidFill>
-              <a:latin typeface="Calibri"/>
-              <a:ea typeface="Calibri"/>
-              <a:cs typeface="Calibri"/>
-              <a:sym typeface="Calibri"/>
-            </a:endParaRPr>
-          </a:p>
-          <a:p>
-            <a:pPr marL="228600" marR="0" lvl="0" indent="-209550" algn="l" rtl="0">
-              <a:lnSpc>
-                <a:spcPct val="100000"/>
-              </a:lnSpc>
-              <a:spcBef>
-                <a:spcPts val="0"/>
-              </a:spcBef>
-              <a:spcAft>
-                <a:spcPts val="0"/>
-              </a:spcAft>
-              <a:buClr>
-                <a:srgbClr val="3C78D8"/>
-              </a:buClr>
-              <a:buSzPts val="1500"/>
-              <a:buFont typeface="Calibri"/>
-              <a:buChar char="●"/>
-            </a:pPr>
-            <a:r>
-              <a:rPr lang="en" sz="1500" b="1">
-                <a:solidFill>
-                  <a:srgbClr val="3C78D8"/>
-                </a:solidFill>
-                <a:latin typeface="Calibri"/>
-                <a:ea typeface="Calibri"/>
-                <a:cs typeface="Calibri"/>
-                <a:sym typeface="Calibri"/>
-              </a:rPr>
-              <a:t>ScrapeGraphAI - web scraping using AI</a:t>
-            </a:r>
-            <a:endParaRPr sz="1500" b="1">
-              <a:solidFill>
-                <a:srgbClr val="3C78D8"/>
-              </a:solidFill>
-              <a:latin typeface="Calibri"/>
-              <a:ea typeface="Calibri"/>
-              <a:cs typeface="Calibri"/>
-              <a:sym typeface="Calibri"/>
-            </a:endParaRPr>
-          </a:p>
-          <a:p>
-            <a:pPr marL="228600" marR="0" lvl="0" indent="-209550" algn="l" rtl="0">
-              <a:lnSpc>
-                <a:spcPct val="100000"/>
-              </a:lnSpc>
-              <a:spcBef>
-                <a:spcPts val="0"/>
-              </a:spcBef>
-              <a:spcAft>
-                <a:spcPts val="0"/>
-              </a:spcAft>
-              <a:buClr>
-                <a:srgbClr val="3C78D8"/>
-              </a:buClr>
-              <a:buSzPts val="1500"/>
-              <a:buFont typeface="Calibri"/>
-              <a:buChar char="●"/>
-            </a:pPr>
-            <a:r>
-              <a:rPr lang="en" sz="1500" b="1">
-                <a:solidFill>
-                  <a:srgbClr val="3C78D8"/>
-                </a:solidFill>
-                <a:latin typeface="Calibri"/>
-                <a:ea typeface="Calibri"/>
-                <a:cs typeface="Calibri"/>
-                <a:sym typeface="Calibri"/>
-              </a:rPr>
-              <a:t>DocRes - Document Image Restoration</a:t>
-            </a:r>
-            <a:endParaRPr sz="1500" b="1">
-              <a:solidFill>
-                <a:srgbClr val="3C78D8"/>
-              </a:solidFill>
-              <a:latin typeface="Calibri"/>
-              <a:ea typeface="Calibri"/>
-              <a:cs typeface="Calibri"/>
-              <a:sym typeface="Calibri"/>
-            </a:endParaRPr>
-          </a:p>
-          <a:p>
-            <a:pPr marL="228600" marR="0" lvl="0" indent="-209550" algn="l" rtl="0">
-              <a:lnSpc>
-                <a:spcPct val="100000"/>
-              </a:lnSpc>
-              <a:spcBef>
-                <a:spcPts val="0"/>
-              </a:spcBef>
-              <a:spcAft>
-                <a:spcPts val="0"/>
-              </a:spcAft>
-              <a:buClr>
-                <a:srgbClr val="3C78D8"/>
-              </a:buClr>
-              <a:buSzPts val="1500"/>
-              <a:buFont typeface="Calibri"/>
-              <a:buChar char="●"/>
-            </a:pPr>
-            <a:r>
-              <a:rPr lang="en" sz="1500" b="1">
-                <a:solidFill>
-                  <a:srgbClr val="3C78D8"/>
-                </a:solidFill>
-                <a:latin typeface="Calibri"/>
-                <a:ea typeface="Calibri"/>
-                <a:cs typeface="Calibri"/>
-                <a:sym typeface="Calibri"/>
-              </a:rPr>
               <a:t>DeepMind AlphaFold 3</a:t>
-            </a:r>
-            <a:endParaRPr sz="1500" b="1">
-              <a:solidFill>
-                <a:srgbClr val="3C78D8"/>
-              </a:solidFill>
-              <a:latin typeface="Calibri"/>
-              <a:ea typeface="Calibri"/>
-              <a:cs typeface="Calibri"/>
-              <a:sym typeface="Calibri"/>
-            </a:endParaRPr>
-          </a:p>
-          <a:p>
-            <a:pPr marL="228600" marR="0" lvl="0" indent="-209550" algn="l" rtl="0">
-              <a:lnSpc>
-                <a:spcPct val="100000"/>
-              </a:lnSpc>
-              <a:spcBef>
-                <a:spcPts val="0"/>
-              </a:spcBef>
-              <a:spcAft>
-                <a:spcPts val="0"/>
-              </a:spcAft>
-              <a:buClr>
-                <a:srgbClr val="3C78D8"/>
-              </a:buClr>
-              <a:buSzPts val="1500"/>
-              <a:buFont typeface="Calibri"/>
-              <a:buChar char="●"/>
-            </a:pPr>
-            <a:r>
-              <a:rPr lang="en" sz="1500" b="1">
-                <a:solidFill>
-                  <a:srgbClr val="3C78D8"/>
-                </a:solidFill>
-                <a:latin typeface="Calibri"/>
-                <a:ea typeface="Calibri"/>
-                <a:cs typeface="Calibri"/>
-                <a:sym typeface="Calibri"/>
-              </a:rPr>
-              <a:t>DeepSeek-V2, open-source, 236B, ~GPT-4</a:t>
             </a:r>
             <a:endParaRPr sz="1500" b="1">
               <a:solidFill>
@@ -21888,6 +21790,605 @@
         </p:nvSpPr>
         <p:spPr>
           <a:xfrm>
+            <a:off x="-38050" y="-108050"/>
+            <a:ext cx="5908800" cy="492600"/>
+          </a:xfrm>
+          <a:prstGeom prst="rect">
+            <a:avLst/>
+          </a:prstGeom>
+          <a:noFill/>
+          <a:ln>
+            <a:noFill/>
+          </a:ln>
+        </p:spPr>
+        <p:txBody>
+          <a:bodyPr spcFirstLastPara="1" wrap="square" lIns="91425" tIns="91425" rIns="91425" bIns="91425" anchor="t" anchorCtr="0">
+            <a:spAutoFit/>
+          </a:bodyPr>
+          <a:lstStyle/>
+          <a:p>
+            <a:pPr marL="0" marR="0" lvl="0" indent="0" algn="l" rtl="0">
+              <a:lnSpc>
+                <a:spcPct val="100000"/>
+              </a:lnSpc>
+              <a:spcBef>
+                <a:spcPts val="0"/>
+              </a:spcBef>
+              <a:spcAft>
+                <a:spcPts val="0"/>
+              </a:spcAft>
+              <a:buClr>
+                <a:srgbClr val="000000"/>
+              </a:buClr>
+              <a:buSzPts val="2000"/>
+              <a:buFont typeface="Arial"/>
+              <a:buNone/>
+            </a:pPr>
+            <a:r>
+              <a:rPr lang="en" sz="2000" b="1">
+                <a:solidFill>
+                  <a:schemeClr val="dk1"/>
+                </a:solidFill>
+                <a:latin typeface="Calibri"/>
+                <a:ea typeface="Calibri"/>
+                <a:cs typeface="Calibri"/>
+                <a:sym typeface="Calibri"/>
+              </a:rPr>
+              <a:t>DeepSeek-V2</a:t>
+            </a:r>
+            <a:endParaRPr sz="2000" b="1" i="0" u="none" strike="noStrike" cap="none">
+              <a:solidFill>
+                <a:srgbClr val="000000"/>
+              </a:solidFill>
+              <a:latin typeface="Calibri"/>
+              <a:ea typeface="Calibri"/>
+              <a:cs typeface="Calibri"/>
+              <a:sym typeface="Calibri"/>
+            </a:endParaRPr>
+          </a:p>
+        </p:txBody>
+      </p:sp>
+      <p:pic>
+        <p:nvPicPr>
+          <p:cNvPr id="112" name="Google Shape;112;p19"/>
+          <p:cNvPicPr preferRelativeResize="0"/>
+          <p:nvPr/>
+        </p:nvPicPr>
+        <p:blipFill>
+          <a:blip r:embed="rId3" cstate="email">
+            <a:alphaModFix/>
+            <a:extLst>
+              <a:ext uri="{28A0092B-C50C-407E-A947-70E740481C1C}">
+                <a14:useLocalDpi xmlns:a14="http://schemas.microsoft.com/office/drawing/2010/main"/>
+              </a:ext>
+            </a:extLst>
+          </a:blip>
+          <a:stretch>
+            <a:fillRect/>
+          </a:stretch>
+        </p:blipFill>
+        <p:spPr>
+          <a:xfrm>
+            <a:off x="6837275" y="83025"/>
+            <a:ext cx="2246474" cy="1567249"/>
+          </a:xfrm>
+          <a:prstGeom prst="rect">
+            <a:avLst/>
+          </a:prstGeom>
+          <a:noFill/>
+          <a:ln w="9525" cap="flat" cmpd="sng">
+            <a:solidFill>
+              <a:srgbClr val="FF0000"/>
+            </a:solidFill>
+            <a:prstDash val="solid"/>
+            <a:round/>
+            <a:headEnd type="none" w="sm" len="sm"/>
+            <a:tailEnd type="none" w="sm" len="sm"/>
+          </a:ln>
+        </p:spPr>
+      </p:pic>
+      <p:sp>
+        <p:nvSpPr>
+          <p:cNvPr id="113" name="Google Shape;113;p19"/>
+          <p:cNvSpPr txBox="1"/>
+          <p:nvPr/>
+        </p:nvSpPr>
+        <p:spPr>
+          <a:xfrm>
+            <a:off x="78050" y="290825"/>
+            <a:ext cx="4981800" cy="1573200"/>
+          </a:xfrm>
+          <a:prstGeom prst="rect">
+            <a:avLst/>
+          </a:prstGeom>
+          <a:solidFill>
+            <a:srgbClr val="FFF2CC"/>
+          </a:solidFill>
+          <a:ln w="9525" cap="flat" cmpd="sng">
+            <a:solidFill>
+              <a:srgbClr val="FF0000"/>
+            </a:solidFill>
+            <a:prstDash val="solid"/>
+            <a:round/>
+            <a:headEnd type="none" w="sm" len="sm"/>
+            <a:tailEnd type="none" w="sm" len="sm"/>
+          </a:ln>
+        </p:spPr>
+        <p:txBody>
+          <a:bodyPr spcFirstLastPara="1" wrap="square" lIns="9125" tIns="9125" rIns="9125" bIns="9125" anchor="t" anchorCtr="0">
+            <a:spAutoFit/>
+          </a:bodyPr>
+          <a:lstStyle/>
+          <a:p>
+            <a:pPr marL="0" lvl="0" indent="0" algn="l" rtl="0">
+              <a:spcBef>
+                <a:spcPts val="0"/>
+              </a:spcBef>
+              <a:spcAft>
+                <a:spcPts val="0"/>
+              </a:spcAft>
+              <a:buClr>
+                <a:schemeClr val="dk1"/>
+              </a:buClr>
+              <a:buSzPts val="1100"/>
+              <a:buFont typeface="Arial"/>
+              <a:buNone/>
+            </a:pPr>
+            <a:r>
+              <a:rPr lang="en" sz="1300" b="1">
+                <a:solidFill>
+                  <a:srgbClr val="FF0000"/>
+                </a:solidFill>
+                <a:latin typeface="Calibri"/>
+                <a:ea typeface="Calibri"/>
+                <a:cs typeface="Calibri"/>
+                <a:sym typeface="Calibri"/>
+              </a:rPr>
+              <a:t>DeepSeek-V2</a:t>
+            </a:r>
+            <a:r>
+              <a:rPr lang="en" sz="1300">
+                <a:solidFill>
+                  <a:schemeClr val="dk1"/>
+                </a:solidFill>
+                <a:latin typeface="Calibri"/>
+                <a:ea typeface="Calibri"/>
+                <a:cs typeface="Calibri"/>
+                <a:sym typeface="Calibri"/>
+              </a:rPr>
+              <a:t>, an open-source LLM from China</a:t>
+            </a:r>
+            <a:endParaRPr sz="1300">
+              <a:solidFill>
+                <a:schemeClr val="dk1"/>
+              </a:solidFill>
+              <a:latin typeface="Calibri"/>
+              <a:ea typeface="Calibri"/>
+              <a:cs typeface="Calibri"/>
+              <a:sym typeface="Calibri"/>
+            </a:endParaRPr>
+          </a:p>
+          <a:p>
+            <a:pPr marL="0" lvl="0" indent="0" algn="l" rtl="0">
+              <a:spcBef>
+                <a:spcPts val="0"/>
+              </a:spcBef>
+              <a:spcAft>
+                <a:spcPts val="0"/>
+              </a:spcAft>
+              <a:buClr>
+                <a:schemeClr val="dk1"/>
+              </a:buClr>
+              <a:buSzPts val="1100"/>
+              <a:buFont typeface="Arial"/>
+              <a:buNone/>
+            </a:pPr>
+            <a:endParaRPr sz="600">
+              <a:solidFill>
+                <a:schemeClr val="dk1"/>
+              </a:solidFill>
+              <a:latin typeface="Calibri"/>
+              <a:ea typeface="Calibri"/>
+              <a:cs typeface="Calibri"/>
+              <a:sym typeface="Calibri"/>
+            </a:endParaRPr>
+          </a:p>
+          <a:p>
+            <a:pPr marL="228600" lvl="0" indent="-139700" algn="l" rtl="0">
+              <a:spcBef>
+                <a:spcPts val="0"/>
+              </a:spcBef>
+              <a:spcAft>
+                <a:spcPts val="0"/>
+              </a:spcAft>
+              <a:buClr>
+                <a:schemeClr val="dk1"/>
+              </a:buClr>
+              <a:buSzPts val="1300"/>
+              <a:buFont typeface="Calibri"/>
+              <a:buChar char="●"/>
+            </a:pPr>
+            <a:r>
+              <a:rPr lang="en" sz="1300">
+                <a:solidFill>
+                  <a:schemeClr val="dk1"/>
+                </a:solidFill>
+                <a:latin typeface="Calibri"/>
+                <a:ea typeface="Calibri"/>
+                <a:cs typeface="Calibri"/>
+                <a:sym typeface="Calibri"/>
+              </a:rPr>
+              <a:t>MoE LM, 236B total params, activating 21B per token</a:t>
+            </a:r>
+            <a:endParaRPr sz="1300">
+              <a:solidFill>
+                <a:schemeClr val="dk1"/>
+              </a:solidFill>
+              <a:latin typeface="Calibri"/>
+              <a:ea typeface="Calibri"/>
+              <a:cs typeface="Calibri"/>
+              <a:sym typeface="Calibri"/>
+            </a:endParaRPr>
+          </a:p>
+          <a:p>
+            <a:pPr marL="228600" lvl="0" indent="-139700" algn="l" rtl="0">
+              <a:spcBef>
+                <a:spcPts val="0"/>
+              </a:spcBef>
+              <a:spcAft>
+                <a:spcPts val="0"/>
+              </a:spcAft>
+              <a:buClr>
+                <a:schemeClr val="dk1"/>
+              </a:buClr>
+              <a:buSzPts val="1300"/>
+              <a:buFont typeface="Calibri"/>
+              <a:buChar char="●"/>
+            </a:pPr>
+            <a:r>
+              <a:rPr lang="en" sz="1300">
+                <a:solidFill>
+                  <a:schemeClr val="dk1"/>
+                </a:solidFill>
+                <a:latin typeface="Calibri"/>
+                <a:ea typeface="Calibri"/>
+                <a:cs typeface="Calibri"/>
+                <a:sym typeface="Calibri"/>
+              </a:rPr>
+              <a:t>128K context length</a:t>
+            </a:r>
+            <a:endParaRPr sz="1300">
+              <a:solidFill>
+                <a:schemeClr val="dk1"/>
+              </a:solidFill>
+              <a:latin typeface="Calibri"/>
+              <a:ea typeface="Calibri"/>
+              <a:cs typeface="Calibri"/>
+              <a:sym typeface="Calibri"/>
+            </a:endParaRPr>
+          </a:p>
+          <a:p>
+            <a:pPr marL="228600" lvl="0" indent="-139700" algn="l" rtl="0">
+              <a:spcBef>
+                <a:spcPts val="0"/>
+              </a:spcBef>
+              <a:spcAft>
+                <a:spcPts val="0"/>
+              </a:spcAft>
+              <a:buClr>
+                <a:schemeClr val="dk1"/>
+              </a:buClr>
+              <a:buSzPts val="1300"/>
+              <a:buFont typeface="Calibri"/>
+              <a:buChar char="●"/>
+            </a:pPr>
+            <a:r>
+              <a:rPr lang="en" sz="1300">
+                <a:solidFill>
+                  <a:schemeClr val="dk1"/>
+                </a:solidFill>
+                <a:latin typeface="Calibri"/>
+                <a:ea typeface="Calibri"/>
+                <a:cs typeface="Calibri"/>
+                <a:sym typeface="Calibri"/>
+              </a:rPr>
+              <a:t>Specializes in Math, Code, Reasoning</a:t>
+            </a:r>
+            <a:endParaRPr sz="1300">
+              <a:solidFill>
+                <a:schemeClr val="dk1"/>
+              </a:solidFill>
+              <a:latin typeface="Calibri"/>
+              <a:ea typeface="Calibri"/>
+              <a:cs typeface="Calibri"/>
+              <a:sym typeface="Calibri"/>
+            </a:endParaRPr>
+          </a:p>
+          <a:p>
+            <a:pPr marL="228600" lvl="0" indent="-139700" algn="l" rtl="0">
+              <a:spcBef>
+                <a:spcPts val="0"/>
+              </a:spcBef>
+              <a:spcAft>
+                <a:spcPts val="0"/>
+              </a:spcAft>
+              <a:buClr>
+                <a:schemeClr val="dk1"/>
+              </a:buClr>
+              <a:buSzPts val="1300"/>
+              <a:buFont typeface="Calibri"/>
+              <a:buChar char="●"/>
+            </a:pPr>
+            <a:r>
+              <a:rPr lang="en" sz="1300">
+                <a:solidFill>
+                  <a:schemeClr val="dk1"/>
+                </a:solidFill>
+                <a:latin typeface="Calibri"/>
+                <a:ea typeface="Calibri"/>
+                <a:cs typeface="Calibri"/>
+                <a:sym typeface="Calibri"/>
+              </a:rPr>
+              <a:t>not available on lmsys arena leaderboard</a:t>
+            </a:r>
+            <a:endParaRPr sz="1000">
+              <a:solidFill>
+                <a:schemeClr val="dk1"/>
+              </a:solidFill>
+              <a:latin typeface="Calibri"/>
+              <a:ea typeface="Calibri"/>
+              <a:cs typeface="Calibri"/>
+              <a:sym typeface="Calibri"/>
+            </a:endParaRPr>
+          </a:p>
+          <a:p>
+            <a:pPr marL="228600" lvl="0" indent="-120650" algn="l" rtl="0">
+              <a:spcBef>
+                <a:spcPts val="0"/>
+              </a:spcBef>
+              <a:spcAft>
+                <a:spcPts val="0"/>
+              </a:spcAft>
+              <a:buSzPts val="1000"/>
+              <a:buFont typeface="Calibri"/>
+              <a:buChar char="●"/>
+            </a:pPr>
+            <a:r>
+              <a:rPr lang="en" sz="1000" u="sng">
+                <a:solidFill>
+                  <a:schemeClr val="hlink"/>
+                </a:solidFill>
+                <a:latin typeface="Calibri"/>
+                <a:ea typeface="Calibri"/>
+                <a:cs typeface="Calibri"/>
+                <a:sym typeface="Calibri"/>
+                <a:hlinkClick r:id="rId4"/>
+              </a:rPr>
+              <a:t>https://www.deepseek.com</a:t>
+            </a:r>
+            <a:r>
+              <a:rPr lang="en" sz="1000">
+                <a:solidFill>
+                  <a:schemeClr val="dk1"/>
+                </a:solidFill>
+                <a:latin typeface="Calibri"/>
+                <a:ea typeface="Calibri"/>
+                <a:cs typeface="Calibri"/>
+                <a:sym typeface="Calibri"/>
+              </a:rPr>
+              <a:t> </a:t>
+            </a:r>
+            <a:endParaRPr sz="1000">
+              <a:solidFill>
+                <a:schemeClr val="dk1"/>
+              </a:solidFill>
+              <a:latin typeface="Calibri"/>
+              <a:ea typeface="Calibri"/>
+              <a:cs typeface="Calibri"/>
+              <a:sym typeface="Calibri"/>
+            </a:endParaRPr>
+          </a:p>
+          <a:p>
+            <a:pPr marL="228600" lvl="0" indent="-120650" algn="l" rtl="0">
+              <a:spcBef>
+                <a:spcPts val="0"/>
+              </a:spcBef>
+              <a:spcAft>
+                <a:spcPts val="0"/>
+              </a:spcAft>
+              <a:buSzPts val="1000"/>
+              <a:buFont typeface="Calibri"/>
+              <a:buChar char="●"/>
+            </a:pPr>
+            <a:r>
+              <a:rPr lang="en" sz="1000" u="sng">
+                <a:solidFill>
+                  <a:schemeClr val="hlink"/>
+                </a:solidFill>
+                <a:latin typeface="Calibri"/>
+                <a:ea typeface="Calibri"/>
+                <a:cs typeface="Calibri"/>
+                <a:sym typeface="Calibri"/>
+                <a:hlinkClick r:id="rId5"/>
+              </a:rPr>
+              <a:t>https://github.com/deepseek-ai</a:t>
+            </a:r>
+            <a:r>
+              <a:rPr lang="en" sz="1000">
+                <a:solidFill>
+                  <a:schemeClr val="dk1"/>
+                </a:solidFill>
+                <a:latin typeface="Calibri"/>
+                <a:ea typeface="Calibri"/>
+                <a:cs typeface="Calibri"/>
+                <a:sym typeface="Calibri"/>
+              </a:rPr>
+              <a:t> </a:t>
+            </a:r>
+            <a:endParaRPr sz="1000">
+              <a:solidFill>
+                <a:schemeClr val="dk1"/>
+              </a:solidFill>
+              <a:latin typeface="Calibri"/>
+              <a:ea typeface="Calibri"/>
+              <a:cs typeface="Calibri"/>
+              <a:sym typeface="Calibri"/>
+            </a:endParaRPr>
+          </a:p>
+          <a:p>
+            <a:pPr marL="228600" lvl="0" indent="-120650" algn="l" rtl="0">
+              <a:spcBef>
+                <a:spcPts val="0"/>
+              </a:spcBef>
+              <a:spcAft>
+                <a:spcPts val="0"/>
+              </a:spcAft>
+              <a:buSzPts val="1000"/>
+              <a:buFont typeface="Calibri"/>
+              <a:buChar char="●"/>
+            </a:pPr>
+            <a:r>
+              <a:rPr lang="en" sz="1000" u="sng">
+                <a:solidFill>
+                  <a:schemeClr val="hlink"/>
+                </a:solidFill>
+                <a:latin typeface="Calibri"/>
+                <a:ea typeface="Calibri"/>
+                <a:cs typeface="Calibri"/>
+                <a:sym typeface="Calibri"/>
+                <a:hlinkClick r:id="rId6"/>
+              </a:rPr>
+              <a:t>https://www.youtube.com/watch?v=yY0RSqRs0xQ</a:t>
+            </a:r>
+            <a:r>
+              <a:rPr lang="en" sz="1000">
+                <a:solidFill>
+                  <a:schemeClr val="dk1"/>
+                </a:solidFill>
+                <a:latin typeface="Calibri"/>
+                <a:ea typeface="Calibri"/>
+                <a:cs typeface="Calibri"/>
+                <a:sym typeface="Calibri"/>
+              </a:rPr>
+              <a:t> </a:t>
+            </a:r>
+            <a:endParaRPr sz="1300">
+              <a:solidFill>
+                <a:schemeClr val="dk1"/>
+              </a:solidFill>
+              <a:latin typeface="Calibri"/>
+              <a:ea typeface="Calibri"/>
+              <a:cs typeface="Calibri"/>
+              <a:sym typeface="Calibri"/>
+            </a:endParaRPr>
+          </a:p>
+        </p:txBody>
+      </p:sp>
+      <p:pic>
+        <p:nvPicPr>
+          <p:cNvPr id="114" name="Google Shape;114;p19"/>
+          <p:cNvPicPr preferRelativeResize="0"/>
+          <p:nvPr/>
+        </p:nvPicPr>
+        <p:blipFill>
+          <a:blip r:embed="rId7" cstate="email">
+            <a:alphaModFix/>
+            <a:extLst>
+              <a:ext uri="{28A0092B-C50C-407E-A947-70E740481C1C}">
+                <a14:useLocalDpi xmlns:a14="http://schemas.microsoft.com/office/drawing/2010/main"/>
+              </a:ext>
+            </a:extLst>
+          </a:blip>
+          <a:stretch>
+            <a:fillRect/>
+          </a:stretch>
+        </p:blipFill>
+        <p:spPr>
+          <a:xfrm>
+            <a:off x="6257650" y="1738475"/>
+            <a:ext cx="2826100" cy="3316974"/>
+          </a:xfrm>
+          <a:prstGeom prst="rect">
+            <a:avLst/>
+          </a:prstGeom>
+          <a:noFill/>
+          <a:ln w="9525" cap="flat" cmpd="sng">
+            <a:solidFill>
+              <a:srgbClr val="FF0000"/>
+            </a:solidFill>
+            <a:prstDash val="solid"/>
+            <a:round/>
+            <a:headEnd type="none" w="sm" len="sm"/>
+            <a:tailEnd type="none" w="sm" len="sm"/>
+          </a:ln>
+        </p:spPr>
+      </p:pic>
+      <p:pic>
+        <p:nvPicPr>
+          <p:cNvPr id="115" name="Google Shape;115;p19"/>
+          <p:cNvPicPr preferRelativeResize="0"/>
+          <p:nvPr/>
+        </p:nvPicPr>
+        <p:blipFill>
+          <a:blip r:embed="rId8" cstate="email">
+            <a:alphaModFix/>
+            <a:extLst>
+              <a:ext uri="{28A0092B-C50C-407E-A947-70E740481C1C}">
+                <a14:useLocalDpi xmlns:a14="http://schemas.microsoft.com/office/drawing/2010/main"/>
+              </a:ext>
+            </a:extLst>
+          </a:blip>
+          <a:stretch>
+            <a:fillRect/>
+          </a:stretch>
+        </p:blipFill>
+        <p:spPr>
+          <a:xfrm>
+            <a:off x="78050" y="2068925"/>
+            <a:ext cx="4981675" cy="3021324"/>
+          </a:xfrm>
+          <a:prstGeom prst="rect">
+            <a:avLst/>
+          </a:prstGeom>
+          <a:noFill/>
+          <a:ln>
+            <a:noFill/>
+          </a:ln>
+        </p:spPr>
+      </p:pic>
+    </p:spTree>
+  </p:cSld>
+  <p:clrMapOvr>
+    <a:masterClrMapping/>
+  </p:clrMapOvr>
+</p:sld>
+</file>
+
+<file path=ppt/slides/slide7.xml><?xml version="1.0" encoding="utf-8"?>
+<p:sld xmlns:a="http://schemas.openxmlformats.org/drawingml/2006/main" xmlns:r="http://schemas.openxmlformats.org/officeDocument/2006/relationships" xmlns:p="http://schemas.openxmlformats.org/presentationml/2006/main">
+  <p:cSld>
+    <p:spTree>
+      <p:nvGrpSpPr>
+        <p:cNvPr id="1" name="Shape 119"/>
+        <p:cNvGrpSpPr/>
+        <p:nvPr/>
+      </p:nvGrpSpPr>
+      <p:grpSpPr>
+        <a:xfrm>
+          <a:off x="0" y="0"/>
+          <a:ext cx="0" cy="0"/>
+          <a:chOff x="0" y="0"/>
+          <a:chExt cx="0" cy="0"/>
+        </a:xfrm>
+      </p:grpSpPr>
+      <p:sp>
+        <p:nvSpPr>
+          <p:cNvPr id="120" name="Google Shape;120;p20"/>
+          <p:cNvSpPr txBox="1"/>
+          <p:nvPr/>
+        </p:nvSpPr>
+        <p:spPr>
+          <a:xfrm>
             <a:off x="62100" y="496350"/>
             <a:ext cx="4392000" cy="3620400"/>
           </a:xfrm>
@@ -22250,7 +22751,7 @@
       </p:sp>
       <p:sp>
         <p:nvSpPr>
-          <p:cNvPr id="112" name="Google Shape;112;p19"/>
+          <p:cNvPr id="121" name="Google Shape;121;p20"/>
           <p:cNvSpPr txBox="1"/>
           <p:nvPr/>
         </p:nvSpPr>
@@ -22316,7 +22817,7 @@
       </p:sp>
       <p:sp>
         <p:nvSpPr>
-          <p:cNvPr id="113" name="Google Shape;113;p19"/>
+          <p:cNvPr id="122" name="Google Shape;122;p20"/>
           <p:cNvSpPr txBox="1"/>
           <p:nvPr/>
         </p:nvSpPr>
@@ -22541,12 +23042,12 @@
 </p:sld>
 </file>
 
-<file path=ppt/slides/slide7.xml><?xml version="1.0" encoding="utf-8"?>
+<file path=ppt/slides/slide8.xml><?xml version="1.0" encoding="utf-8"?>
 <p:sld xmlns:a="http://schemas.openxmlformats.org/drawingml/2006/main" xmlns:r="http://schemas.openxmlformats.org/officeDocument/2006/relationships" xmlns:p="http://schemas.openxmlformats.org/presentationml/2006/main">
   <p:cSld>
     <p:spTree>
       <p:nvGrpSpPr>
-        <p:cNvPr id="1" name="Shape 117"/>
+        <p:cNvPr id="1" name="Shape 126"/>
         <p:cNvGrpSpPr/>
         <p:nvPr/>
       </p:nvGrpSpPr>
@@ -22560,14 +23061,14 @@
       </p:grpSpPr>
       <p:sp>
         <p:nvSpPr>
-          <p:cNvPr id="118" name="Google Shape;118;p20"/>
+          <p:cNvPr id="127" name="Google Shape;127;p21"/>
           <p:cNvSpPr txBox="1"/>
           <p:nvPr/>
         </p:nvSpPr>
         <p:spPr>
           <a:xfrm>
             <a:off x="31350" y="57975"/>
-            <a:ext cx="2423400" cy="326400"/>
+            <a:ext cx="4785600" cy="326400"/>
           </a:xfrm>
           <a:prstGeom prst="rect">
             <a:avLst/>
@@ -22610,7 +23111,7 @@
                 <a:cs typeface="Calibri"/>
                 <a:sym typeface="Calibri"/>
               </a:rPr>
-              <a:t>Regulatory Capture</a:t>
+              <a:t>Regulatory Capture in AI Industry in the US</a:t>
             </a:r>
             <a:endParaRPr sz="2000" b="1" i="0" u="none" strike="noStrike" cap="none">
               <a:solidFill>
@@ -22626,14 +23127,14 @@
       </p:sp>
       <p:sp>
         <p:nvSpPr>
-          <p:cNvPr id="119" name="Google Shape;119;p20"/>
+          <p:cNvPr id="128" name="Google Shape;128;p21"/>
           <p:cNvSpPr txBox="1"/>
           <p:nvPr/>
         </p:nvSpPr>
         <p:spPr>
           <a:xfrm>
-            <a:off x="31350" y="384375"/>
-            <a:ext cx="6673200" cy="372600"/>
+            <a:off x="31350" y="1679775"/>
+            <a:ext cx="6066900" cy="357000"/>
           </a:xfrm>
           <a:prstGeom prst="rect">
             <a:avLst/>
@@ -22667,7 +23168,7 @@
               <a:buNone/>
             </a:pPr>
             <a:r>
-              <a:rPr lang="en" sz="1300">
+              <a:rPr lang="en" sz="1200">
                 <a:latin typeface="Calibri"/>
                 <a:ea typeface="Calibri"/>
                 <a:cs typeface="Calibri"/>
@@ -22676,7 +23177,7 @@
               <a:t>All-In Summit: Bill Gurley presents 2,851 Miles at </a:t>
             </a:r>
             <a:r>
-              <a:rPr lang="en" sz="1300">
+              <a:rPr lang="en" sz="1200">
                 <a:solidFill>
                   <a:schemeClr val="dk1"/>
                 </a:solidFill>
@@ -22688,7 +23189,7 @@
               <a:t>the All-In Summit about regulatory capture</a:t>
             </a:r>
             <a:r>
-              <a:rPr lang="en" sz="1300">
+              <a:rPr lang="en" sz="1200">
                 <a:latin typeface="Calibri"/>
                 <a:ea typeface="Calibri"/>
                 <a:cs typeface="Calibri"/>
@@ -22696,7 +23197,7 @@
               </a:rPr>
               <a:t> </a:t>
             </a:r>
-            <a:endParaRPr sz="1300">
+            <a:endParaRPr sz="1200">
               <a:latin typeface="Calibri"/>
               <a:ea typeface="Calibri"/>
               <a:cs typeface="Calibri"/>
@@ -22752,7 +23253,7 @@
       </p:sp>
       <p:pic>
         <p:nvPicPr>
-          <p:cNvPr id="120" name="Google Shape;120;p20"/>
+          <p:cNvPr id="129" name="Google Shape;129;p21"/>
           <p:cNvPicPr preferRelativeResize="0"/>
           <p:nvPr/>
         </p:nvPicPr>
@@ -22771,7 +23272,7 @@
         </p:blipFill>
         <p:spPr>
           <a:xfrm>
-            <a:off x="7621975" y="100725"/>
+            <a:off x="6936175" y="692764"/>
             <a:ext cx="1417800" cy="1417800"/>
           </a:xfrm>
           <a:prstGeom prst="rect">
@@ -22785,13 +23286,13 @@
       </p:pic>
       <p:sp>
         <p:nvSpPr>
-          <p:cNvPr id="121" name="Google Shape;121;p20"/>
+          <p:cNvPr id="130" name="Google Shape;130;p21"/>
           <p:cNvSpPr txBox="1"/>
           <p:nvPr/>
         </p:nvSpPr>
         <p:spPr>
           <a:xfrm>
-            <a:off x="7621975" y="1593425"/>
+            <a:off x="6936175" y="2185464"/>
             <a:ext cx="1417800" cy="203100"/>
           </a:xfrm>
           <a:prstGeom prst="rect">
@@ -22848,7 +23349,7 @@
       </p:sp>
       <p:pic>
         <p:nvPicPr>
-          <p:cNvPr id="122" name="Google Shape;122;p20"/>
+          <p:cNvPr id="131" name="Google Shape;131;p21"/>
           <p:cNvPicPr preferRelativeResize="0"/>
           <p:nvPr/>
         </p:nvPicPr>
@@ -22867,8 +23368,8 @@
         </p:blipFill>
         <p:spPr>
           <a:xfrm>
-            <a:off x="6704550" y="1871400"/>
-            <a:ext cx="2335224" cy="1310778"/>
+            <a:off x="6183125" y="2463464"/>
+            <a:ext cx="2856651" cy="1603447"/>
           </a:xfrm>
           <a:prstGeom prst="rect">
             <a:avLst/>
@@ -22881,14 +23382,14 @@
       </p:pic>
       <p:sp>
         <p:nvSpPr>
-          <p:cNvPr id="123" name="Google Shape;123;p20"/>
+          <p:cNvPr id="132" name="Google Shape;132;p21"/>
           <p:cNvSpPr txBox="1"/>
           <p:nvPr/>
         </p:nvSpPr>
         <p:spPr>
           <a:xfrm>
-            <a:off x="31350" y="807240"/>
-            <a:ext cx="6066900" cy="3220200"/>
+            <a:off x="31350" y="2102640"/>
+            <a:ext cx="6066900" cy="2973900"/>
           </a:xfrm>
           <a:prstGeom prst="rect">
             <a:avLst/>
@@ -22912,7 +23413,7 @@
           </a:bodyPr>
           <a:lstStyle/>
           <a:p>
-            <a:pPr marL="228600" lvl="0" indent="-139700" algn="l" rtl="0">
+            <a:pPr marL="228600" lvl="0" indent="-133350" algn="l" rtl="0">
               <a:spcBef>
                 <a:spcPts val="0"/>
               </a:spcBef>
@@ -22922,12 +23423,12 @@
               <a:buClr>
                 <a:srgbClr val="FF0000"/>
               </a:buClr>
-              <a:buSzPts val="1300"/>
+              <a:buSzPts val="1200"/>
               <a:buFont typeface="Calibri"/>
               <a:buChar char="●"/>
             </a:pPr>
             <a:r>
-              <a:rPr lang="en" sz="1300" b="1">
+              <a:rPr lang="en" sz="1200" b="1">
                 <a:solidFill>
                   <a:srgbClr val="FF0000"/>
                 </a:solidFill>
@@ -22938,7 +23439,7 @@
               </a:rPr>
               <a:t>Regulatory capture: a regulatory agency that is supposed to oversee an industry ends up being influenced by the industry it is supposed to regulate. </a:t>
             </a:r>
-            <a:endParaRPr sz="1300" b="1">
+            <a:endParaRPr sz="1200" b="1">
               <a:solidFill>
                 <a:srgbClr val="FF0000"/>
               </a:solidFill>
@@ -22949,19 +23450,19 @@
             </a:endParaRPr>
           </a:p>
           <a:p>
-            <a:pPr marL="228600" lvl="0" indent="-139700" algn="l" rtl="0">
-              <a:spcBef>
-                <a:spcPts val="0"/>
-              </a:spcBef>
-              <a:spcAft>
-                <a:spcPts val="0"/>
-              </a:spcAft>
-              <a:buSzPts val="1300"/>
+            <a:pPr marL="228600" lvl="0" indent="-133350" algn="l" rtl="0">
+              <a:spcBef>
+                <a:spcPts val="0"/>
+              </a:spcBef>
+              <a:spcAft>
+                <a:spcPts val="0"/>
+              </a:spcAft>
+              <a:buSzPts val="1200"/>
               <a:buFont typeface="Calibri"/>
               <a:buChar char="●"/>
             </a:pPr>
             <a:r>
-              <a:rPr lang="en" sz="1300" b="1">
+              <a:rPr lang="en" sz="1200" b="1">
                 <a:solidFill>
                   <a:srgbClr val="FF0000"/>
                 </a:solidFill>
@@ -22973,7 +23474,7 @@
               <a:t>Gurley argues</a:t>
             </a:r>
             <a:r>
-              <a:rPr lang="en" sz="1300">
+              <a:rPr lang="en" sz="1200">
                 <a:latin typeface="Calibri"/>
                 <a:ea typeface="Calibri"/>
                 <a:cs typeface="Calibri"/>
@@ -22982,7 +23483,7 @@
               <a:t> that this is a major problem in the United States and that it has </a:t>
             </a:r>
             <a:r>
-              <a:rPr lang="en" sz="1300" b="1">
+              <a:rPr lang="en" sz="1200" b="1">
                 <a:solidFill>
                   <a:srgbClr val="3C78D8"/>
                 </a:solidFill>
@@ -22994,7 +23495,7 @@
               <a:t>led to higher prices and less innovation</a:t>
             </a:r>
             <a:r>
-              <a:rPr lang="en" sz="1300">
+              <a:rPr lang="en" sz="1200">
                 <a:latin typeface="Calibri"/>
                 <a:ea typeface="Calibri"/>
                 <a:cs typeface="Calibri"/>
@@ -23002,7 +23503,7 @@
               </a:rPr>
               <a:t> in many industries.</a:t>
             </a:r>
-            <a:endParaRPr sz="1300">
+            <a:endParaRPr sz="1200">
               <a:latin typeface="Calibri"/>
               <a:ea typeface="Calibri"/>
               <a:cs typeface="Calibri"/>
@@ -23010,19 +23511,19 @@
             </a:endParaRPr>
           </a:p>
           <a:p>
-            <a:pPr marL="228600" lvl="0" indent="-139700" algn="l" rtl="0">
-              <a:spcBef>
-                <a:spcPts val="0"/>
-              </a:spcBef>
-              <a:spcAft>
-                <a:spcPts val="0"/>
-              </a:spcAft>
-              <a:buSzPts val="1300"/>
+            <a:pPr marL="228600" lvl="0" indent="-133350" algn="l" rtl="0">
+              <a:spcBef>
+                <a:spcPts val="0"/>
+              </a:spcBef>
+              <a:spcAft>
+                <a:spcPts val="0"/>
+              </a:spcAft>
+              <a:buSzPts val="1200"/>
               <a:buFont typeface="Calibri"/>
               <a:buChar char="●"/>
             </a:pPr>
             <a:r>
-              <a:rPr lang="en" sz="1300" b="1">
+              <a:rPr lang="en" sz="1200" b="1">
                 <a:solidFill>
                   <a:srgbClr val="6AA84F"/>
                 </a:solidFill>
@@ -23034,7 +23535,7 @@
               <a:t>Example -  the telecommunications industry</a:t>
             </a:r>
             <a:r>
-              <a:rPr lang="en" sz="1300">
+              <a:rPr lang="en" sz="1200">
                 <a:latin typeface="Calibri"/>
                 <a:ea typeface="Calibri"/>
                 <a:cs typeface="Calibri"/>
@@ -23043,7 +23544,7 @@
               <a:t>. In 1996, the </a:t>
             </a:r>
             <a:r>
-              <a:rPr lang="en" sz="1300" b="1">
+              <a:rPr lang="en" sz="1200" b="1">
                 <a:solidFill>
                   <a:srgbClr val="6AA84F"/>
                 </a:solidFill>
@@ -23055,7 +23556,7 @@
               <a:t>Telecommunications Act</a:t>
             </a:r>
             <a:r>
-              <a:rPr lang="en" sz="1300">
+              <a:rPr lang="en" sz="1200">
                 <a:latin typeface="Calibri"/>
                 <a:ea typeface="Calibri"/>
                 <a:cs typeface="Calibri"/>
@@ -23064,7 +23565,7 @@
               <a:t> was passed with the goal of promoting competition and innovation. </a:t>
             </a:r>
             <a:br>
-              <a:rPr lang="en" sz="1300">
+              <a:rPr lang="en" sz="1200">
                 <a:latin typeface="Calibri"/>
                 <a:ea typeface="Calibri"/>
                 <a:cs typeface="Calibri"/>
@@ -23072,7 +23573,7 @@
               </a:rPr>
             </a:br>
             <a:r>
-              <a:rPr lang="en" sz="1300">
+              <a:rPr lang="en" sz="1200">
                 <a:latin typeface="Calibri"/>
                 <a:ea typeface="Calibri"/>
                 <a:cs typeface="Calibri"/>
@@ -23081,7 +23582,7 @@
               <a:t>However, Gurley argues that </a:t>
             </a:r>
             <a:r>
-              <a:rPr lang="en" sz="1300" b="1">
+              <a:rPr lang="en" sz="1200" b="1">
                 <a:solidFill>
                   <a:srgbClr val="3C78D8"/>
                 </a:solidFill>
@@ -23093,7 +23594,7 @@
               <a:t>the Act has had the opposite effect</a:t>
             </a:r>
             <a:r>
-              <a:rPr lang="en" sz="1300">
+              <a:rPr lang="en" sz="1200">
                 <a:latin typeface="Calibri"/>
                 <a:ea typeface="Calibri"/>
                 <a:cs typeface="Calibri"/>
@@ -23101,7 +23602,7 @@
               </a:rPr>
               <a:t>. The number of major telecommunications companies has decreased from 4 to 2, and there has been little innovation in the industry.</a:t>
             </a:r>
-            <a:endParaRPr sz="1300">
+            <a:endParaRPr sz="1200">
               <a:latin typeface="Calibri"/>
               <a:ea typeface="Calibri"/>
               <a:cs typeface="Calibri"/>
@@ -23109,19 +23610,19 @@
             </a:endParaRPr>
           </a:p>
           <a:p>
-            <a:pPr marL="228600" lvl="0" indent="-139700" algn="l" rtl="0">
-              <a:spcBef>
-                <a:spcPts val="0"/>
-              </a:spcBef>
-              <a:spcAft>
-                <a:spcPts val="0"/>
-              </a:spcAft>
-              <a:buSzPts val="1300"/>
+            <a:pPr marL="228600" lvl="0" indent="-133350" algn="l" rtl="0">
+              <a:spcBef>
+                <a:spcPts val="0"/>
+              </a:spcBef>
+              <a:spcAft>
+                <a:spcPts val="0"/>
+              </a:spcAft>
+              <a:buSzPts val="1200"/>
               <a:buFont typeface="Calibri"/>
               <a:buChar char="●"/>
             </a:pPr>
             <a:r>
-              <a:rPr lang="en" sz="1300" b="1">
+              <a:rPr lang="en" sz="1200" b="1">
                 <a:solidFill>
                   <a:srgbClr val="6AA84F"/>
                 </a:solidFill>
@@ -23133,7 +23634,7 @@
               <a:t>Example - medical records industry</a:t>
             </a:r>
             <a:r>
-              <a:rPr lang="en" sz="1300">
+              <a:rPr lang="en" sz="1200">
                 <a:latin typeface="Calibri"/>
                 <a:ea typeface="Calibri"/>
                 <a:cs typeface="Calibri"/>
@@ -23142,7 +23643,7 @@
               <a:t>. In 2009, the </a:t>
             </a:r>
             <a:r>
-              <a:rPr lang="en" sz="1300" b="1">
+              <a:rPr lang="en" sz="1200" b="1">
                 <a:solidFill>
                   <a:srgbClr val="6AA84F"/>
                 </a:solidFill>
@@ -23154,7 +23655,7 @@
               <a:t>American Recovery Act </a:t>
             </a:r>
             <a:r>
-              <a:rPr lang="en" sz="1300">
+              <a:rPr lang="en" sz="1200">
                 <a:latin typeface="Calibri"/>
                 <a:ea typeface="Calibri"/>
                 <a:cs typeface="Calibri"/>
@@ -23162,7 +23663,7 @@
               </a:rPr>
               <a:t>was passed. One provision of the Act was to give doctors money to buy electronic health records software. Gurley argues that this provision was a giveaway to the medical records industry and that it did not lead to any significant improvements in the quality of care.</a:t>
             </a:r>
-            <a:endParaRPr sz="1300">
+            <a:endParaRPr sz="1200">
               <a:latin typeface="Calibri"/>
               <a:ea typeface="Calibri"/>
               <a:cs typeface="Calibri"/>
@@ -23170,19 +23671,19 @@
             </a:endParaRPr>
           </a:p>
           <a:p>
-            <a:pPr marL="228600" lvl="0" indent="-139700" algn="l" rtl="0">
-              <a:spcBef>
-                <a:spcPts val="0"/>
-              </a:spcBef>
-              <a:spcAft>
-                <a:spcPts val="0"/>
-              </a:spcAft>
-              <a:buSzPts val="1300"/>
+            <a:pPr marL="228600" lvl="0" indent="-133350" algn="l" rtl="0">
+              <a:spcBef>
+                <a:spcPts val="0"/>
+              </a:spcBef>
+              <a:spcAft>
+                <a:spcPts val="0"/>
+              </a:spcAft>
+              <a:buSzPts val="1200"/>
               <a:buFont typeface="Calibri"/>
               <a:buChar char="●"/>
             </a:pPr>
             <a:r>
-              <a:rPr lang="en" sz="1300">
+              <a:rPr lang="en" sz="1200">
                 <a:latin typeface="Calibri"/>
                 <a:ea typeface="Calibri"/>
                 <a:cs typeface="Calibri"/>
@@ -23191,7 +23692,7 @@
               <a:t>Gurley concludes his presentation by arguing that </a:t>
             </a:r>
             <a:r>
-              <a:rPr lang="en" sz="1300" b="1">
+              <a:rPr lang="en" sz="1200" b="1">
                 <a:solidFill>
                   <a:srgbClr val="FF0000"/>
                 </a:solidFill>
@@ -23203,7 +23704,7 @@
               <a:t>regulatory capture is a major problem in the United States</a:t>
             </a:r>
             <a:r>
-              <a:rPr lang="en" sz="1300">
+              <a:rPr lang="en" sz="1200">
                 <a:latin typeface="Calibri"/>
                 <a:ea typeface="Calibri"/>
                 <a:cs typeface="Calibri"/>
@@ -23212,7 +23713,7 @@
               <a:t> and that it needs to be addressed. He suggests that one way to address the problem is to </a:t>
             </a:r>
             <a:r>
-              <a:rPr lang="en" sz="1300" b="1">
+              <a:rPr lang="en" sz="1200" b="1">
                 <a:solidFill>
                   <a:srgbClr val="FF0000"/>
                 </a:solidFill>
@@ -23224,7 +23725,7 @@
               <a:t>increase transparency in the lobbying process</a:t>
             </a:r>
             <a:r>
-              <a:rPr lang="en" sz="1300">
+              <a:rPr lang="en" sz="1200">
                 <a:latin typeface="Calibri"/>
                 <a:ea typeface="Calibri"/>
                 <a:cs typeface="Calibri"/>
@@ -23232,7 +23733,7 @@
               </a:rPr>
               <a:t>.</a:t>
             </a:r>
-            <a:endParaRPr sz="1300">
+            <a:endParaRPr sz="1200">
               <a:latin typeface="Calibri"/>
               <a:ea typeface="Calibri"/>
               <a:cs typeface="Calibri"/>
@@ -23243,14 +23744,14 @@
       </p:sp>
       <p:sp>
         <p:nvSpPr>
-          <p:cNvPr id="124" name="Google Shape;124;p20"/>
+          <p:cNvPr id="133" name="Google Shape;133;p21"/>
           <p:cNvSpPr txBox="1"/>
           <p:nvPr/>
         </p:nvSpPr>
         <p:spPr>
           <a:xfrm>
-            <a:off x="31350" y="4073790"/>
-            <a:ext cx="6673200" cy="972900"/>
+            <a:off x="31350" y="478275"/>
+            <a:ext cx="6393900" cy="895800"/>
           </a:xfrm>
           <a:prstGeom prst="rect">
             <a:avLst/>
@@ -23274,17 +23775,22 @@
           </a:bodyPr>
           <a:lstStyle/>
           <a:p>
-            <a:pPr marL="0" lvl="0" indent="0" algn="l" rtl="0">
-              <a:spcBef>
-                <a:spcPts val="0"/>
-              </a:spcBef>
-              <a:spcAft>
-                <a:spcPts val="0"/>
-              </a:spcAft>
-              <a:buNone/>
-            </a:pPr>
-            <a:r>
-              <a:rPr lang="en" sz="1300">
+            <a:pPr marL="228600" lvl="0" indent="-133350" algn="l" rtl="0">
+              <a:spcBef>
+                <a:spcPts val="0"/>
+              </a:spcBef>
+              <a:spcAft>
+                <a:spcPts val="0"/>
+              </a:spcAft>
+              <a:buClr>
+                <a:schemeClr val="dk1"/>
+              </a:buClr>
+              <a:buSzPts val="1200"/>
+              <a:buFont typeface="Calibri"/>
+              <a:buChar char="●"/>
+            </a:pPr>
+            <a:r>
+              <a:rPr lang="en" sz="1200">
                 <a:solidFill>
                   <a:schemeClr val="dk1"/>
                 </a:solidFill>
@@ -23293,11 +23799,23 @@
                 <a:cs typeface="Calibri"/>
                 <a:sym typeface="Calibri"/>
               </a:rPr>
-              <a:t>Context: </a:t>
-            </a:r>
-            <a:endParaRPr sz="1300">
+              <a:t>open-source AI is not represented in the new </a:t>
+            </a:r>
+            <a:r>
+              <a:rPr lang="en" sz="1200" b="1">
+                <a:solidFill>
+                  <a:srgbClr val="FF0000"/>
+                </a:solidFill>
+                <a:latin typeface="Calibri"/>
+                <a:ea typeface="Calibri"/>
+                <a:cs typeface="Calibri"/>
+                <a:sym typeface="Calibri"/>
+              </a:rPr>
+              <a:t>DHS Artificial Intelligence Safety and Security Board</a:t>
+            </a:r>
+            <a:endParaRPr sz="1200" b="1">
               <a:solidFill>
-                <a:schemeClr val="dk1"/>
+                <a:srgbClr val="FF0000"/>
               </a:solidFill>
               <a:latin typeface="Calibri"/>
               <a:ea typeface="Calibri"/>
@@ -23306,7 +23824,7 @@
             </a:endParaRPr>
           </a:p>
           <a:p>
-            <a:pPr marL="457200" lvl="0" indent="-311150" algn="l" rtl="0">
+            <a:pPr marL="228600" lvl="0" indent="-139700" algn="l" rtl="0">
               <a:spcBef>
                 <a:spcPts val="0"/>
               </a:spcBef>
@@ -23321,6 +23839,30 @@
               <a:buChar char="●"/>
             </a:pPr>
             <a:r>
+              <a:rPr lang="en" sz="1200" b="1">
+                <a:solidFill>
+                  <a:srgbClr val="FF0000"/>
+                </a:solidFill>
+                <a:latin typeface="Calibri"/>
+                <a:ea typeface="Calibri"/>
+                <a:cs typeface="Calibri"/>
+                <a:sym typeface="Calibri"/>
+              </a:rPr>
+              <a:t>New blogpost from OpenAI</a:t>
+            </a:r>
+            <a:r>
+              <a:rPr lang="en" sz="1200">
+                <a:solidFill>
+                  <a:schemeClr val="dk1"/>
+                </a:solidFill>
+                <a:latin typeface="Calibri"/>
+                <a:ea typeface="Calibri"/>
+                <a:cs typeface="Calibri"/>
+                <a:sym typeface="Calibri"/>
+              </a:rPr>
+              <a:t> about AI security: close source, model weights protection, regulations to approve models, hardware-level enforcement</a:t>
+            </a:r>
+            <a:br>
               <a:rPr lang="en" sz="1300">
                 <a:solidFill>
                   <a:schemeClr val="dk1"/>
@@ -23330,9 +23872,69 @@
                 <a:cs typeface="Calibri"/>
                 <a:sym typeface="Calibri"/>
               </a:rPr>
-              <a:t>opens-source AI is not represented in the new US Government AI Board</a:t>
-            </a:r>
-            <a:endParaRPr sz="1300">
+            </a:br>
+            <a:r>
+              <a:rPr lang="en" sz="1000" u="sng">
+                <a:solidFill>
+                  <a:schemeClr val="hlink"/>
+                </a:solidFill>
+                <a:latin typeface="Calibri"/>
+                <a:ea typeface="Calibri"/>
+                <a:cs typeface="Calibri"/>
+                <a:sym typeface="Calibri"/>
+                <a:hlinkClick r:id="rId6"/>
+              </a:rPr>
+              <a:t>https://openai.com/index/reimagining-secure-infrastructure-for-advanced-ai/</a:t>
+            </a:r>
+            <a:r>
+              <a:rPr lang="en" sz="1000">
+                <a:solidFill>
+                  <a:schemeClr val="dk1"/>
+                </a:solidFill>
+                <a:latin typeface="Calibri"/>
+                <a:ea typeface="Calibri"/>
+                <a:cs typeface="Calibri"/>
+                <a:sym typeface="Calibri"/>
+              </a:rPr>
+              <a:t> - text</a:t>
+            </a:r>
+            <a:br>
+              <a:rPr lang="en" sz="1000">
+                <a:solidFill>
+                  <a:schemeClr val="dk1"/>
+                </a:solidFill>
+                <a:latin typeface="Calibri"/>
+                <a:ea typeface="Calibri"/>
+                <a:cs typeface="Calibri"/>
+                <a:sym typeface="Calibri"/>
+              </a:rPr>
+            </a:br>
+            <a:r>
+              <a:rPr lang="en" sz="1000" u="sng">
+                <a:solidFill>
+                  <a:schemeClr val="hlink"/>
+                </a:solidFill>
+                <a:latin typeface="Calibri"/>
+                <a:ea typeface="Calibri"/>
+                <a:cs typeface="Calibri"/>
+                <a:sym typeface="Calibri"/>
+                <a:hlinkClick r:id="rId7"/>
+              </a:rPr>
+              <a:t>https://www.youtube.com/watch?v=lQNEnVVv4OE</a:t>
+            </a:r>
+            <a:r>
+              <a:rPr lang="en" sz="1000">
+                <a:solidFill>
+                  <a:schemeClr val="dk1"/>
+                </a:solidFill>
+                <a:latin typeface="Calibri"/>
+                <a:ea typeface="Calibri"/>
+                <a:cs typeface="Calibri"/>
+                <a:sym typeface="Calibri"/>
+              </a:rPr>
+              <a:t> - video</a:t>
+            </a:r>
+            <a:endParaRPr sz="1000">
               <a:solidFill>
                 <a:schemeClr val="dk1"/>
               </a:solidFill>
@@ -23342,69 +23944,46 @@
               <a:sym typeface="Calibri"/>
             </a:endParaRPr>
           </a:p>
-          <a:p>
-            <a:pPr marL="457200" lvl="0" indent="-311150" algn="l" rtl="0">
-              <a:spcBef>
-                <a:spcPts val="0"/>
-              </a:spcBef>
-              <a:spcAft>
-                <a:spcPts val="0"/>
-              </a:spcAft>
-              <a:buClr>
-                <a:schemeClr val="dk1"/>
-              </a:buClr>
-              <a:buSzPts val="1300"/>
-              <a:buFont typeface="Calibri"/>
-              <a:buChar char="●"/>
-            </a:pPr>
-            <a:r>
-              <a:rPr lang="en" sz="1300">
-                <a:solidFill>
-                  <a:schemeClr val="dk1"/>
-                </a:solidFill>
-                <a:latin typeface="Calibri"/>
-                <a:ea typeface="Calibri"/>
-                <a:cs typeface="Calibri"/>
-                <a:sym typeface="Calibri"/>
-              </a:rPr>
-              <a:t>OpenAI blog about AI security - for close source, model weights protection, regulations to approve models, hardware-level enforcement</a:t>
-            </a:r>
-            <a:br>
-              <a:rPr lang="en" sz="1300">
-                <a:solidFill>
-                  <a:schemeClr val="dk1"/>
-                </a:solidFill>
-                <a:latin typeface="Calibri"/>
-                <a:ea typeface="Calibri"/>
-                <a:cs typeface="Calibri"/>
-                <a:sym typeface="Calibri"/>
-              </a:rPr>
-            </a:br>
-            <a:r>
-              <a:rPr lang="en" sz="1000" u="sng">
-                <a:solidFill>
-                  <a:schemeClr val="hlink"/>
-                </a:solidFill>
-                <a:latin typeface="Calibri"/>
-                <a:ea typeface="Calibri"/>
-                <a:cs typeface="Calibri"/>
-                <a:sym typeface="Calibri"/>
-                <a:hlinkClick r:id="rId6"/>
-              </a:rPr>
-              <a:t>https://openai.com/index/reimagining-secure-infrastructure-for-advanced-ai/</a:t>
-            </a:r>
-            <a:endParaRPr sz="1000">
-              <a:solidFill>
-                <a:schemeClr val="dk1"/>
-              </a:solidFill>
-              <a:latin typeface="Calibri"/>
-              <a:ea typeface="Calibri"/>
-              <a:cs typeface="Calibri"/>
-              <a:sym typeface="Calibri"/>
-            </a:endParaRPr>
-          </a:p>
         </p:txBody>
       </p:sp>
+      <p:pic>
+        <p:nvPicPr>
+          <p:cNvPr id="134" name="Google Shape;134;p21"/>
+          <p:cNvPicPr preferRelativeResize="0"/>
+          <p:nvPr/>
+        </p:nvPicPr>
+        <p:blipFill rotWithShape="1">
+          <a:blip r:embed="rId8" cstate="email">
+            <a:alphaModFix/>
+            <a:extLst>
+              <a:ext uri="{28A0092B-C50C-407E-A947-70E740481C1C}">
+                <a14:useLocalDpi xmlns:a14="http://schemas.microsoft.com/office/drawing/2010/main"/>
+              </a:ext>
+            </a:extLst>
+          </a:blip>
+          <a:srcRect/>
+          <a:stretch/>
+        </p:blipFill>
+        <p:spPr>
+          <a:xfrm>
+            <a:off x="6183131" y="4180152"/>
+            <a:ext cx="2881776" cy="874924"/>
+          </a:xfrm>
+          <a:prstGeom prst="rect">
+            <a:avLst/>
+          </a:prstGeom>
+          <a:noFill/>
+          <a:ln w="9525" cap="flat" cmpd="sng">
+            <a:solidFill>
+              <a:srgbClr val="FF0000"/>
+            </a:solidFill>
+            <a:prstDash val="solid"/>
+            <a:round/>
+            <a:headEnd type="none" w="sm" len="sm"/>
+            <a:tailEnd type="none" w="sm" len="sm"/>
+          </a:ln>
+        </p:spPr>
+      </p:pic>
     </p:spTree>
   </p:cSld>
   <p:clrMapOvr>
@@ -23413,12 +23992,12 @@
 </p:sld>
 </file>
 
-<file path=ppt/slides/slide8.xml><?xml version="1.0" encoding="utf-8"?>
+<file path=ppt/slides/slide9.xml><?xml version="1.0" encoding="utf-8"?>
 <p:sld xmlns:a="http://schemas.openxmlformats.org/drawingml/2006/main" xmlns:r="http://schemas.openxmlformats.org/officeDocument/2006/relationships" xmlns:p="http://schemas.openxmlformats.org/presentationml/2006/main">
   <p:cSld>
     <p:spTree>
       <p:nvGrpSpPr>
-        <p:cNvPr id="1" name="Shape 128"/>
+        <p:cNvPr id="1" name="Shape 138"/>
         <p:cNvGrpSpPr/>
         <p:nvPr/>
       </p:nvGrpSpPr>
@@ -23432,7 +24011,7 @@
       </p:grpSpPr>
       <p:sp>
         <p:nvSpPr>
-          <p:cNvPr id="129" name="Google Shape;129;p21"/>
+          <p:cNvPr id="139" name="Google Shape;139;p22"/>
           <p:cNvSpPr txBox="1"/>
           <p:nvPr/>
         </p:nvSpPr>
@@ -23602,7 +24181,7 @@
       </p:sp>
       <p:sp>
         <p:nvSpPr>
-          <p:cNvPr id="130" name="Google Shape;130;p21"/>
+          <p:cNvPr id="140" name="Google Shape;140;p22"/>
           <p:cNvSpPr txBox="1"/>
           <p:nvPr/>
         </p:nvSpPr>
@@ -23668,7 +24247,7 @@
       </p:sp>
       <p:sp>
         <p:nvSpPr>
-          <p:cNvPr id="131" name="Google Shape;131;p21"/>
+          <p:cNvPr id="141" name="Google Shape;141;p22"/>
           <p:cNvSpPr txBox="1"/>
           <p:nvPr/>
         </p:nvSpPr>
@@ -24131,7 +24710,7 @@
       </p:sp>
       <p:pic>
         <p:nvPicPr>
-          <p:cNvPr id="132" name="Google Shape;132;p21"/>
+          <p:cNvPr id="142" name="Google Shape;142;p22"/>
           <p:cNvPicPr preferRelativeResize="0"/>
           <p:nvPr/>
         </p:nvPicPr>
@@ -24152,285 +24731,6 @@
           <a:xfrm>
             <a:off x="78050" y="1107175"/>
             <a:ext cx="4392003" cy="2386856"/>
-          </a:xfrm>
-          <a:prstGeom prst="rect">
-            <a:avLst/>
-          </a:prstGeom>
-          <a:noFill/>
-          <a:ln>
-            <a:noFill/>
-          </a:ln>
-        </p:spPr>
-      </p:pic>
-    </p:spTree>
-  </p:cSld>
-  <p:clrMapOvr>
-    <a:masterClrMapping/>
-  </p:clrMapOvr>
-</p:sld>
-</file>
-
-<file path=ppt/slides/slide9.xml><?xml version="1.0" encoding="utf-8"?>
-<p:sld xmlns:a="http://schemas.openxmlformats.org/drawingml/2006/main" xmlns:r="http://schemas.openxmlformats.org/officeDocument/2006/relationships" xmlns:p="http://schemas.openxmlformats.org/presentationml/2006/main">
-  <p:cSld>
-    <p:spTree>
-      <p:nvGrpSpPr>
-        <p:cNvPr id="1" name="Shape 136"/>
-        <p:cNvGrpSpPr/>
-        <p:nvPr/>
-      </p:nvGrpSpPr>
-      <p:grpSpPr>
-        <a:xfrm>
-          <a:off x="0" y="0"/>
-          <a:ext cx="0" cy="0"/>
-          <a:chOff x="0" y="0"/>
-          <a:chExt cx="0" cy="0"/>
-        </a:xfrm>
-      </p:grpSpPr>
-      <p:sp>
-        <p:nvSpPr>
-          <p:cNvPr id="137" name="Google Shape;137;p22"/>
-          <p:cNvSpPr txBox="1"/>
-          <p:nvPr/>
-        </p:nvSpPr>
-        <p:spPr>
-          <a:xfrm>
-            <a:off x="78050" y="384550"/>
-            <a:ext cx="2393700" cy="218400"/>
-          </a:xfrm>
-          <a:prstGeom prst="rect">
-            <a:avLst/>
-          </a:prstGeom>
-          <a:solidFill>
-            <a:srgbClr val="FFF2CC"/>
-          </a:solidFill>
-          <a:ln w="9525" cap="flat" cmpd="sng">
-            <a:solidFill>
-              <a:srgbClr val="FF0000"/>
-            </a:solidFill>
-            <a:prstDash val="solid"/>
-            <a:round/>
-            <a:headEnd type="none" w="sm" len="sm"/>
-            <a:tailEnd type="none" w="sm" len="sm"/>
-          </a:ln>
-        </p:spPr>
-        <p:txBody>
-          <a:bodyPr spcFirstLastPara="1" wrap="square" lIns="9125" tIns="9125" rIns="9125" bIns="9125" anchor="t" anchorCtr="0">
-            <a:spAutoFit/>
-          </a:bodyPr>
-          <a:lstStyle/>
-          <a:p>
-            <a:pPr marL="0" lvl="0" indent="0" algn="l" rtl="0">
-              <a:spcBef>
-                <a:spcPts val="0"/>
-              </a:spcBef>
-              <a:spcAft>
-                <a:spcPts val="0"/>
-              </a:spcAft>
-              <a:buClr>
-                <a:schemeClr val="dk1"/>
-              </a:buClr>
-              <a:buSzPts val="1100"/>
-              <a:buFont typeface="Arial"/>
-              <a:buNone/>
-            </a:pPr>
-            <a:r>
-              <a:rPr lang="en" sz="1300" u="sng">
-                <a:solidFill>
-                  <a:schemeClr val="hlink"/>
-                </a:solidFill>
-                <a:latin typeface="Calibri"/>
-                <a:ea typeface="Calibri"/>
-                <a:cs typeface="Calibri"/>
-                <a:sym typeface="Calibri"/>
-                <a:hlinkClick r:id="rId3"/>
-              </a:rPr>
-              <a:t>https://github.com/lselector/ai</a:t>
-            </a:r>
-            <a:r>
-              <a:rPr lang="en" sz="1300">
-                <a:solidFill>
-                  <a:schemeClr val="dk1"/>
-                </a:solidFill>
-                <a:latin typeface="Calibri"/>
-                <a:ea typeface="Calibri"/>
-                <a:cs typeface="Calibri"/>
-                <a:sym typeface="Calibri"/>
-              </a:rPr>
-              <a:t> </a:t>
-            </a:r>
-            <a:endParaRPr sz="1000">
-              <a:solidFill>
-                <a:schemeClr val="dk1"/>
-              </a:solidFill>
-              <a:latin typeface="Calibri"/>
-              <a:ea typeface="Calibri"/>
-              <a:cs typeface="Calibri"/>
-              <a:sym typeface="Calibri"/>
-            </a:endParaRPr>
-          </a:p>
-        </p:txBody>
-      </p:sp>
-      <p:sp>
-        <p:nvSpPr>
-          <p:cNvPr id="138" name="Google Shape;138;p22"/>
-          <p:cNvSpPr txBox="1"/>
-          <p:nvPr/>
-        </p:nvSpPr>
-        <p:spPr>
-          <a:xfrm>
-            <a:off x="35891" y="7380"/>
-            <a:ext cx="6174300" cy="326400"/>
-          </a:xfrm>
-          <a:prstGeom prst="rect">
-            <a:avLst/>
-          </a:prstGeom>
-          <a:noFill/>
-          <a:ln>
-            <a:noFill/>
-          </a:ln>
-        </p:spPr>
-        <p:txBody>
-          <a:bodyPr spcFirstLastPara="1" wrap="square" lIns="9125" tIns="9125" rIns="9125" bIns="9125" anchor="t" anchorCtr="0">
-            <a:spAutoFit/>
-          </a:bodyPr>
-          <a:lstStyle/>
-          <a:p>
-            <a:pPr marL="0" marR="0" lvl="0" indent="0" algn="l" rtl="0">
-              <a:lnSpc>
-                <a:spcPct val="100000"/>
-              </a:lnSpc>
-              <a:spcBef>
-                <a:spcPts val="0"/>
-              </a:spcBef>
-              <a:spcAft>
-                <a:spcPts val="0"/>
-              </a:spcAft>
-              <a:buClr>
-                <a:srgbClr val="000000"/>
-              </a:buClr>
-              <a:buSzPts val="2000"/>
-              <a:buFont typeface="Arial"/>
-              <a:buNone/>
-            </a:pPr>
-            <a:r>
-              <a:rPr lang="en" sz="2000" b="1">
-                <a:solidFill>
-                  <a:schemeClr val="dk1"/>
-                </a:solidFill>
-                <a:latin typeface="Calibri"/>
-                <a:ea typeface="Calibri"/>
-                <a:cs typeface="Calibri"/>
-                <a:sym typeface="Calibri"/>
-              </a:rPr>
-              <a:t>My "ai" GitHub repo - how to start with LLMs and RAG</a:t>
-            </a:r>
-            <a:endParaRPr sz="2000" b="1" i="0" u="none" strike="noStrike" cap="none">
-              <a:solidFill>
-                <a:srgbClr val="000000"/>
-              </a:solidFill>
-              <a:latin typeface="Calibri"/>
-              <a:ea typeface="Calibri"/>
-              <a:cs typeface="Calibri"/>
-              <a:sym typeface="Calibri"/>
-            </a:endParaRPr>
-          </a:p>
-        </p:txBody>
-      </p:sp>
-      <p:sp>
-        <p:nvSpPr>
-          <p:cNvPr id="139" name="Google Shape;139;p22"/>
-          <p:cNvSpPr txBox="1"/>
-          <p:nvPr/>
-        </p:nvSpPr>
-        <p:spPr>
-          <a:xfrm>
-            <a:off x="4638225" y="384550"/>
-            <a:ext cx="4392000" cy="218400"/>
-          </a:xfrm>
-          <a:prstGeom prst="rect">
-            <a:avLst/>
-          </a:prstGeom>
-          <a:solidFill>
-            <a:srgbClr val="FFF2CC"/>
-          </a:solidFill>
-          <a:ln w="9525" cap="flat" cmpd="sng">
-            <a:solidFill>
-              <a:srgbClr val="FF0000"/>
-            </a:solidFill>
-            <a:prstDash val="solid"/>
-            <a:round/>
-            <a:headEnd type="none" w="sm" len="sm"/>
-            <a:tailEnd type="none" w="sm" len="sm"/>
-          </a:ln>
-        </p:spPr>
-        <p:txBody>
-          <a:bodyPr spcFirstLastPara="1" wrap="square" lIns="9125" tIns="9125" rIns="9125" bIns="9125" anchor="t" anchorCtr="0">
-            <a:spAutoFit/>
-          </a:bodyPr>
-          <a:lstStyle/>
-          <a:p>
-            <a:pPr marL="0" lvl="0" indent="0" algn="l" rtl="0">
-              <a:spcBef>
-                <a:spcPts val="0"/>
-              </a:spcBef>
-              <a:spcAft>
-                <a:spcPts val="0"/>
-              </a:spcAft>
-              <a:buClr>
-                <a:schemeClr val="dk1"/>
-              </a:buClr>
-              <a:buSzPts val="1100"/>
-              <a:buFont typeface="Arial"/>
-              <a:buNone/>
-            </a:pPr>
-            <a:r>
-              <a:rPr lang="en" sz="1300">
-                <a:solidFill>
-                  <a:schemeClr val="dk1"/>
-                </a:solidFill>
-                <a:latin typeface="Calibri"/>
-                <a:ea typeface="Calibri"/>
-                <a:cs typeface="Calibri"/>
-                <a:sym typeface="Calibri"/>
-              </a:rPr>
-              <a:t>xxxxx</a:t>
-            </a:r>
-            <a:endParaRPr sz="1000">
-              <a:solidFill>
-                <a:schemeClr val="dk1"/>
-              </a:solidFill>
-              <a:latin typeface="Calibri"/>
-              <a:ea typeface="Calibri"/>
-              <a:cs typeface="Calibri"/>
-              <a:sym typeface="Calibri"/>
-            </a:endParaRPr>
-          </a:p>
-        </p:txBody>
-      </p:sp>
-      <p:pic>
-        <p:nvPicPr>
-          <p:cNvPr id="140" name="Google Shape;140;p22"/>
-          <p:cNvPicPr preferRelativeResize="0"/>
-          <p:nvPr/>
-        </p:nvPicPr>
-        <p:blipFill>
-          <a:blip r:embed="rId4" cstate="email">
-            <a:alphaModFix/>
-            <a:extLst>
-              <a:ext uri="{28A0092B-C50C-407E-A947-70E740481C1C}">
-                <a14:useLocalDpi xmlns:a14="http://schemas.microsoft.com/office/drawing/2010/main"/>
-              </a:ext>
-            </a:extLst>
-          </a:blip>
-          <a:stretch>
-            <a:fillRect/>
-          </a:stretch>
-        </p:blipFill>
-        <p:spPr>
-          <a:xfrm>
-            <a:off x="152400" y="755350"/>
-            <a:ext cx="3700877" cy="4235748"/>
           </a:xfrm>
           <a:prstGeom prst="rect">
             <a:avLst/>

--- a/2024/2024-05-10-AI-Updates.pptx
+++ b/2024/2024-05-10-AI-Updates.pptx
@@ -25069,7 +25069,31 @@
                 <a:cs typeface="Calibri"/>
                 <a:sym typeface="Calibri"/>
               </a:rPr>
-              <a:t>It is a SoC (System on a Chip): CPU, GPU, Memory, and Neural Engine - all on one chip.</a:t>
+              <a:t>It is a </a:t>
+            </a:r>
+            <a:r>
+              <a:rPr lang="en" sz="1300" b="1">
+                <a:solidFill>
+                  <a:srgbClr val="FF0000"/>
+                </a:solidFill>
+                <a:latin typeface="Calibri"/>
+                <a:ea typeface="Calibri"/>
+                <a:cs typeface="Calibri"/>
+                <a:sym typeface="Calibri"/>
+              </a:rPr>
+              <a:t>SoC (System on a Chip)</a:t>
+            </a:r>
+            <a:r>
+              <a:rPr lang="en" sz="1300">
+                <a:solidFill>
+                  <a:schemeClr val="dk1"/>
+                </a:solidFill>
+                <a:latin typeface="Calibri"/>
+                <a:ea typeface="Calibri"/>
+                <a:cs typeface="Calibri"/>
+                <a:sym typeface="Calibri"/>
+              </a:rPr>
+              <a:t>: CPU, GPU, Memory, and Neural Engine - all on one chip.</a:t>
             </a:r>
             <a:endParaRPr sz="1300">
               <a:solidFill>
@@ -25106,7 +25130,19 @@
                 <a:cs typeface="Calibri"/>
                 <a:sym typeface="Calibri"/>
               </a:rPr>
-              <a:t>It is ARM based. ARM = (Advanced RISC Machine)</a:t>
+              <a:t>It is ARM based. </a:t>
+            </a:r>
+            <a:r>
+              <a:rPr lang="en" sz="1300" b="1">
+                <a:solidFill>
+                  <a:srgbClr val="FF0000"/>
+                </a:solidFill>
+                <a:latin typeface="Calibri"/>
+                <a:ea typeface="Calibri"/>
+                <a:cs typeface="Calibri"/>
+                <a:sym typeface="Calibri"/>
+              </a:rPr>
+              <a:t>ARM = (Advanced RISC Machine)</a:t>
             </a:r>
             <a:br>
               <a:rPr lang="en" sz="1300">
@@ -25120,9 +25156,9 @@
               </a:rPr>
             </a:br>
             <a:r>
-              <a:rPr lang="en" sz="1300">
-                <a:solidFill>
-                  <a:schemeClr val="dk1"/>
+              <a:rPr lang="en" sz="1300" b="1">
+                <a:solidFill>
+                  <a:srgbClr val="3C78D8"/>
                 </a:solidFill>
                 <a:latin typeface="Calibri"/>
                 <a:ea typeface="Calibri"/>
@@ -25131,9 +25167,9 @@
               </a:rPr>
               <a:t>RISC = (Reduced Instruction Set Computer)</a:t>
             </a:r>
-            <a:endParaRPr sz="1300">
+            <a:endParaRPr sz="1300" b="1">
               <a:solidFill>
-                <a:schemeClr val="dk1"/>
+                <a:srgbClr val="3C78D8"/>
               </a:solidFill>
               <a:latin typeface="Calibri"/>
               <a:ea typeface="Calibri"/>
@@ -25238,7 +25274,7 @@
         </p:blipFill>
         <p:spPr>
           <a:xfrm>
-            <a:off x="5581898" y="3881050"/>
+            <a:off x="5353298" y="4033450"/>
             <a:ext cx="908126" cy="613165"/>
           </a:xfrm>
           <a:prstGeom prst="rect">
@@ -25271,7 +25307,7 @@
         </p:blipFill>
         <p:spPr>
           <a:xfrm>
-            <a:off x="6566225" y="3881049"/>
+            <a:off x="6337625" y="4033449"/>
             <a:ext cx="908124" cy="624775"/>
           </a:xfrm>
           <a:prstGeom prst="rect">
@@ -27046,7 +27082,31 @@
                 <a:cs typeface="Calibri"/>
                 <a:sym typeface="Calibri"/>
               </a:rPr>
-              <a:t>It uses an advanced version of GPT-4 codenamed Promethus. It combines LLM and web search.</a:t>
+              <a:t>It uses an advanced version of GPT-4 codenamed </a:t>
+            </a:r>
+            <a:r>
+              <a:rPr lang="en" sz="1300" b="1">
+                <a:solidFill>
+                  <a:srgbClr val="FF0000"/>
+                </a:solidFill>
+                <a:latin typeface="Calibri"/>
+                <a:ea typeface="Calibri"/>
+                <a:cs typeface="Calibri"/>
+                <a:sym typeface="Calibri"/>
+              </a:rPr>
+              <a:t>Promethus</a:t>
+            </a:r>
+            <a:r>
+              <a:rPr lang="en" sz="1300">
+                <a:solidFill>
+                  <a:schemeClr val="dk1"/>
+                </a:solidFill>
+                <a:latin typeface="Calibri"/>
+                <a:ea typeface="Calibri"/>
+                <a:cs typeface="Calibri"/>
+                <a:sym typeface="Calibri"/>
+              </a:rPr>
+              <a:t>. It combines LLM and web search.</a:t>
             </a:r>
             <a:endParaRPr sz="1300">
               <a:solidFill>
